--- a/Assets/ProjectTanker/tank_game_template.pptx
+++ b/Assets/ProjectTanker/tank_game_template.pptx
@@ -5,15 +5,16 @@
     <p:sldMasterId id="2147483648" r:id="rId1"/>
   </p:sldMasterIdLst>
   <p:notesMasterIdLst>
-    <p:notesMasterId r:id="rId8"/>
+    <p:notesMasterId r:id="rId9"/>
   </p:notesMasterIdLst>
   <p:sldIdLst>
-    <p:sldId id="267" r:id="rId2"/>
+    <p:sldId id="271" r:id="rId2"/>
     <p:sldId id="262" r:id="rId3"/>
-    <p:sldId id="263" r:id="rId4"/>
-    <p:sldId id="264" r:id="rId5"/>
-    <p:sldId id="268" r:id="rId6"/>
-    <p:sldId id="266" r:id="rId7"/>
+    <p:sldId id="269" r:id="rId4"/>
+    <p:sldId id="263" r:id="rId5"/>
+    <p:sldId id="264" r:id="rId6"/>
+    <p:sldId id="268" r:id="rId7"/>
+    <p:sldId id="266" r:id="rId8"/>
   </p:sldIdLst>
   <p:sldSz cx="9144000" cy="5143500" type="screen16x9"/>
   <p:notesSz cx="5143500" cy="9144000"/>
@@ -415,7 +416,13 @@
   <p:cSld>
     <p:spTree>
       <p:nvGrpSpPr>
-        <p:cNvPr id="1" name=""/>
+        <p:cNvPr id="1" name="">
+          <a:extLst>
+            <a:ext uri="{FF2B5EF4-FFF2-40B4-BE49-F238E27FC236}">
+              <a16:creationId xmlns:a16="http://schemas.microsoft.com/office/drawing/2014/main" id="{CF349D06-4A84-34BA-DD3A-0655DBC2462D}"/>
+            </a:ext>
+          </a:extLst>
+        </p:cNvPr>
         <p:cNvGrpSpPr/>
         <p:nvPr/>
       </p:nvGrpSpPr>
@@ -429,7 +436,13 @@
       </p:grpSpPr>
       <p:sp>
         <p:nvSpPr>
-          <p:cNvPr id="2" name="Slide Image Placeholder 1"/>
+          <p:cNvPr id="2" name="Slide Image Placeholder 1">
+            <a:extLst>
+              <a:ext uri="{FF2B5EF4-FFF2-40B4-BE49-F238E27FC236}">
+                <a16:creationId xmlns:a16="http://schemas.microsoft.com/office/drawing/2014/main" id="{94FB156E-ECE9-E641-62C6-0AC2C4710ED5}"/>
+              </a:ext>
+            </a:extLst>
+          </p:cNvPr>
           <p:cNvSpPr>
             <a:spLocks noGrp="1" noRot="1" noChangeAspect="1"/>
           </p:cNvSpPr>
@@ -441,7 +454,13 @@
       </p:sp>
       <p:sp>
         <p:nvSpPr>
-          <p:cNvPr id="3" name="Notes Placeholder 2"/>
+          <p:cNvPr id="3" name="Notes Placeholder 2">
+            <a:extLst>
+              <a:ext uri="{FF2B5EF4-FFF2-40B4-BE49-F238E27FC236}">
+                <a16:creationId xmlns:a16="http://schemas.microsoft.com/office/drawing/2014/main" id="{E1CE6AF8-0508-C5F9-F862-FC93DC77B8B4}"/>
+              </a:ext>
+            </a:extLst>
+          </p:cNvPr>
           <p:cNvSpPr>
             <a:spLocks noGrp="1"/>
           </p:cNvSpPr>
@@ -460,7 +479,13 @@
       </p:sp>
       <p:sp>
         <p:nvSpPr>
-          <p:cNvPr id="4" name="Slide Number Placeholder 3"/>
+          <p:cNvPr id="4" name="Slide Number Placeholder 3">
+            <a:extLst>
+              <a:ext uri="{FF2B5EF4-FFF2-40B4-BE49-F238E27FC236}">
+                <a16:creationId xmlns:a16="http://schemas.microsoft.com/office/drawing/2014/main" id="{D67BF8AC-AD47-B8FE-8972-7B99EB41E5F6}"/>
+              </a:ext>
+            </a:extLst>
+          </p:cNvPr>
           <p:cNvSpPr>
             <a:spLocks noGrp="1"/>
           </p:cNvSpPr>
@@ -484,7 +509,7 @@
     </p:spTree>
     <p:extLst>
       <p:ext uri="{BB962C8B-B14F-4D97-AF65-F5344CB8AC3E}">
-        <p14:creationId xmlns:p14="http://schemas.microsoft.com/office/powerpoint/2010/main" val="1024086991"/>
+        <p14:creationId xmlns:p14="http://schemas.microsoft.com/office/powerpoint/2010/main" val="3787521132"/>
       </p:ext>
     </p:extLst>
   </p:cSld>
@@ -728,6 +753,90 @@
             <a:fld id="{F7021451-1387-4CA6-816F-3879F97B5CBC}" type="slidenum">
               <a:rPr lang="en-US"/>
               <a:t>6</a:t>
+            </a:fld>
+            <a:endParaRPr lang="en-US"/>
+          </a:p>
+        </p:txBody>
+      </p:sp>
+    </p:spTree>
+    <p:extLst>
+      <p:ext uri="{BB962C8B-B14F-4D97-AF65-F5344CB8AC3E}">
+        <p14:creationId xmlns:p14="http://schemas.microsoft.com/office/powerpoint/2010/main" val="1024086991"/>
+      </p:ext>
+    </p:extLst>
+  </p:cSld>
+  <p:clrMapOvr>
+    <a:masterClrMapping/>
+  </p:clrMapOvr>
+</p:notes>
+</file>
+
+<file path=ppt/notesSlides/notesSlide7.xml><?xml version="1.0" encoding="utf-8"?>
+<p:notes xmlns:a="http://schemas.openxmlformats.org/drawingml/2006/main" xmlns:r="http://schemas.openxmlformats.org/officeDocument/2006/relationships" xmlns:p="http://schemas.openxmlformats.org/presentationml/2006/main">
+  <p:cSld>
+    <p:spTree>
+      <p:nvGrpSpPr>
+        <p:cNvPr id="1" name=""/>
+        <p:cNvGrpSpPr/>
+        <p:nvPr/>
+      </p:nvGrpSpPr>
+      <p:grpSpPr>
+        <a:xfrm>
+          <a:off x="0" y="0"/>
+          <a:ext cx="0" cy="0"/>
+          <a:chOff x="0" y="0"/>
+          <a:chExt cx="0" cy="0"/>
+        </a:xfrm>
+      </p:grpSpPr>
+      <p:sp>
+        <p:nvSpPr>
+          <p:cNvPr id="2" name="Slide Image Placeholder 1"/>
+          <p:cNvSpPr>
+            <a:spLocks noGrp="1" noRot="1" noChangeAspect="1"/>
+          </p:cNvSpPr>
+          <p:nvPr>
+            <p:ph type="sldImg"/>
+          </p:nvPr>
+        </p:nvSpPr>
+        <p:spPr/>
+      </p:sp>
+      <p:sp>
+        <p:nvSpPr>
+          <p:cNvPr id="3" name="Notes Placeholder 2"/>
+          <p:cNvSpPr>
+            <a:spLocks noGrp="1"/>
+          </p:cNvSpPr>
+          <p:nvPr>
+            <p:ph type="body" idx="1"/>
+          </p:nvPr>
+        </p:nvSpPr>
+        <p:spPr/>
+        <p:txBody>
+          <a:bodyPr/>
+          <a:lstStyle/>
+          <a:p>
+            <a:endParaRPr lang="en-US" dirty="0"/>
+          </a:p>
+        </p:txBody>
+      </p:sp>
+      <p:sp>
+        <p:nvSpPr>
+          <p:cNvPr id="4" name="Slide Number Placeholder 3"/>
+          <p:cNvSpPr>
+            <a:spLocks noGrp="1"/>
+          </p:cNvSpPr>
+          <p:nvPr>
+            <p:ph type="sldNum" sz="quarter" idx="10"/>
+          </p:nvPr>
+        </p:nvSpPr>
+        <p:spPr/>
+        <p:txBody>
+          <a:bodyPr/>
+          <a:lstStyle/>
+          <a:p>
+            <a:fld id="{F7021451-1387-4CA6-816F-3879F97B5CBC}" type="slidenum">
+              <a:rPr lang="en-US"/>
+              <a:t>7</a:t>
             </a:fld>
             <a:endParaRPr lang="en-US"/>
           </a:p>
@@ -2130,86 +2239,14 @@
       </p:sp>
       <p:sp>
         <p:nvSpPr>
-          <p:cNvPr id="36" name="Shape 34"/>
-          <p:cNvSpPr/>
-          <p:nvPr/>
-        </p:nvSpPr>
-        <p:spPr>
-          <a:xfrm>
-            <a:off x="546100" y="863600"/>
-            <a:ext cx="3657600" cy="685800"/>
-          </a:xfrm>
-          <a:prstGeom prst="roundRect">
-            <a:avLst>
-              <a:gd name="adj" fmla="val 9333"/>
-            </a:avLst>
-          </a:prstGeom>
-          <a:solidFill>
-            <a:srgbClr val="FFF8E1"/>
-          </a:solidFill>
-          <a:ln w="12700">
-            <a:solidFill>
-              <a:srgbClr val="F0C040"/>
-            </a:solidFill>
-            <a:prstDash val="solid"/>
-          </a:ln>
-        </p:spPr>
-        <p:txBody>
-          <a:bodyPr/>
-          <a:lstStyle/>
-          <a:p>
-            <a:endParaRPr lang="ja-JP" altLang="en-US"/>
-          </a:p>
-        </p:txBody>
-      </p:sp>
-      <p:sp>
-        <p:nvSpPr>
-          <p:cNvPr id="37" name="Text 35"/>
-          <p:cNvSpPr/>
-          <p:nvPr/>
-        </p:nvSpPr>
-        <p:spPr>
-          <a:xfrm>
-            <a:off x="660400" y="939800"/>
-            <a:ext cx="3429000" cy="533400"/>
-          </a:xfrm>
-          <a:prstGeom prst="rect">
-            <a:avLst/>
-          </a:prstGeom>
-          <a:noFill/>
-          <a:ln/>
-        </p:spPr>
-        <p:txBody>
-          <a:bodyPr wrap="square" lIns="0" tIns="0" rIns="0" bIns="0" rtlCol="0" anchor="t"/>
-          <a:lstStyle/>
-          <a:p>
-            <a:pPr marL="0" indent="0" algn="l">
-              <a:lnSpc>
-                <a:spcPct val="140000"/>
-              </a:lnSpc>
-              <a:buNone/>
-            </a:pPr>
-            <a:r>
-              <a:rPr lang="en-US" sz="1050" i="1" dirty="0">
-                <a:solidFill>
-                  <a:srgbClr val="5A4800"/>
-                </a:solidFill>
-              </a:rPr>
-              <a:t>ゲームタイトル（仮）</a:t>
-            </a:r>
-          </a:p>
-        </p:txBody>
-      </p:sp>
-      <p:sp>
-        <p:nvSpPr>
           <p:cNvPr id="38" name="Shape 36"/>
           <p:cNvSpPr/>
           <p:nvPr/>
         </p:nvSpPr>
         <p:spPr>
           <a:xfrm>
-            <a:off x="546100" y="1663700"/>
-            <a:ext cx="3657600" cy="1003300"/>
+            <a:off x="546100" y="889000"/>
+            <a:ext cx="3657600" cy="3556000"/>
           </a:xfrm>
           <a:prstGeom prst="roundRect">
             <a:avLst>
@@ -2227,7 +2264,7 @@
           </a:ln>
         </p:spPr>
         <p:txBody>
-          <a:bodyPr/>
+          <a:bodyPr anchor="ctr" anchorCtr="0"/>
           <a:lstStyle/>
           <a:p>
             <a:endParaRPr lang="ja-JP" altLang="en-US"/>
@@ -2242,8 +2279,8 @@
         </p:nvSpPr>
         <p:spPr>
           <a:xfrm>
-            <a:off x="546100" y="1663700"/>
-            <a:ext cx="3657600" cy="1003300"/>
+            <a:off x="546100" y="889000"/>
+            <a:ext cx="3657600" cy="3556000"/>
           </a:xfrm>
           <a:prstGeom prst="rect">
             <a:avLst/>
@@ -2252,7 +2289,7 @@
           <a:ln/>
         </p:spPr>
         <p:txBody>
-          <a:bodyPr wrap="square" lIns="0" tIns="0" rIns="0" bIns="0" rtlCol="0" anchor="ctr"/>
+          <a:bodyPr wrap="square" lIns="0" tIns="0" rIns="0" bIns="0" rtlCol="0" anchor="ctr" anchorCtr="0"/>
           <a:lstStyle/>
           <a:p>
             <a:pPr marL="0" indent="0" algn="ctr">
@@ -2267,150 +2304,6 @@
               <a:t>ゲームタイトル</a:t>
             </a:r>
             <a:endParaRPr lang="en-US" sz="2800" dirty="0"/>
-          </a:p>
-        </p:txBody>
-      </p:sp>
-      <p:sp>
-        <p:nvSpPr>
-          <p:cNvPr id="40" name="Shape 38"/>
-          <p:cNvSpPr/>
-          <p:nvPr/>
-        </p:nvSpPr>
-        <p:spPr>
-          <a:xfrm>
-            <a:off x="546100" y="2794000"/>
-            <a:ext cx="3657600" cy="596900"/>
-          </a:xfrm>
-          <a:prstGeom prst="roundRect">
-            <a:avLst>
-              <a:gd name="adj" fmla="val 10769"/>
-            </a:avLst>
-          </a:prstGeom>
-          <a:solidFill>
-            <a:srgbClr val="FFF8E1"/>
-          </a:solidFill>
-          <a:ln w="12700">
-            <a:solidFill>
-              <a:srgbClr val="F0C040"/>
-            </a:solidFill>
-            <a:prstDash val="solid"/>
-          </a:ln>
-        </p:spPr>
-        <p:txBody>
-          <a:bodyPr/>
-          <a:lstStyle/>
-          <a:p>
-            <a:endParaRPr lang="ja-JP" altLang="en-US"/>
-          </a:p>
-        </p:txBody>
-      </p:sp>
-      <p:sp>
-        <p:nvSpPr>
-          <p:cNvPr id="41" name="Text 39"/>
-          <p:cNvSpPr/>
-          <p:nvPr/>
-        </p:nvSpPr>
-        <p:spPr>
-          <a:xfrm>
-            <a:off x="660400" y="2857500"/>
-            <a:ext cx="3429000" cy="444500"/>
-          </a:xfrm>
-          <a:prstGeom prst="rect">
-            <a:avLst/>
-          </a:prstGeom>
-          <a:noFill/>
-          <a:ln/>
-        </p:spPr>
-        <p:txBody>
-          <a:bodyPr wrap="square" lIns="0" tIns="0" rIns="0" bIns="0" rtlCol="0" anchor="t"/>
-          <a:lstStyle/>
-          <a:p>
-            <a:pPr marL="0" indent="0" algn="l">
-              <a:lnSpc>
-                <a:spcPct val="140000"/>
-              </a:lnSpc>
-              <a:buNone/>
-            </a:pPr>
-            <a:r>
-              <a:rPr lang="en-US" sz="1050" i="1" dirty="0">
-                <a:solidFill>
-                  <a:srgbClr val="5A4800"/>
-                </a:solidFill>
-              </a:rPr>
-              <a:t>キャッチコピー（15字程度）</a:t>
-            </a:r>
-          </a:p>
-        </p:txBody>
-      </p:sp>
-      <p:sp>
-        <p:nvSpPr>
-          <p:cNvPr id="42" name="Shape 40"/>
-          <p:cNvSpPr/>
-          <p:nvPr/>
-        </p:nvSpPr>
-        <p:spPr>
-          <a:xfrm>
-            <a:off x="546100" y="3492500"/>
-            <a:ext cx="3657600" cy="596900"/>
-          </a:xfrm>
-          <a:prstGeom prst="roundRect">
-            <a:avLst>
-              <a:gd name="adj" fmla="val 10769"/>
-            </a:avLst>
-          </a:prstGeom>
-          <a:solidFill>
-            <a:srgbClr val="FFF8E1"/>
-          </a:solidFill>
-          <a:ln w="12700">
-            <a:solidFill>
-              <a:srgbClr val="F0C040"/>
-            </a:solidFill>
-            <a:prstDash val="solid"/>
-          </a:ln>
-        </p:spPr>
-        <p:txBody>
-          <a:bodyPr/>
-          <a:lstStyle/>
-          <a:p>
-            <a:endParaRPr lang="ja-JP" altLang="en-US"/>
-          </a:p>
-        </p:txBody>
-      </p:sp>
-      <p:sp>
-        <p:nvSpPr>
-          <p:cNvPr id="43" name="Text 41"/>
-          <p:cNvSpPr/>
-          <p:nvPr/>
-        </p:nvSpPr>
-        <p:spPr>
-          <a:xfrm>
-            <a:off x="660400" y="3568700"/>
-            <a:ext cx="3429000" cy="444500"/>
-          </a:xfrm>
-          <a:prstGeom prst="rect">
-            <a:avLst/>
-          </a:prstGeom>
-          <a:noFill/>
-          <a:ln/>
-        </p:spPr>
-        <p:txBody>
-          <a:bodyPr wrap="square" lIns="0" tIns="0" rIns="0" bIns="0" rtlCol="0" anchor="t"/>
-          <a:lstStyle/>
-          <a:p>
-            <a:pPr marL="0" indent="0" algn="l">
-              <a:lnSpc>
-                <a:spcPct val="140000"/>
-              </a:lnSpc>
-              <a:buNone/>
-            </a:pPr>
-            <a:r>
-              <a:rPr lang="en-US" sz="1050" i="1" dirty="0">
-                <a:solidFill>
-                  <a:srgbClr val="5A4800"/>
-                </a:solidFill>
-              </a:rPr>
-              <a:t>ジャンル / プラットフォーム / 開発者名</a:t>
-            </a:r>
           </a:p>
         </p:txBody>
       </p:sp>
@@ -2585,7 +2478,7 @@
     </p:spTree>
     <p:extLst>
       <p:ext uri="{BB962C8B-B14F-4D97-AF65-F5344CB8AC3E}">
-        <p14:creationId xmlns:p14="http://schemas.microsoft.com/office/powerpoint/2010/main" val="3383095424"/>
+        <p14:creationId xmlns:p14="http://schemas.microsoft.com/office/powerpoint/2010/main" val="2918241604"/>
       </p:ext>
     </p:extLst>
   </p:cSld>
@@ -2622,6 +2515,60 @@
       </p:grpSpPr>
       <p:sp>
         <p:nvSpPr>
+          <p:cNvPr id="53" name="四角形: 角を丸くする 52">
+            <a:extLst>
+              <a:ext uri="{FF2B5EF4-FFF2-40B4-BE49-F238E27FC236}">
+                <a16:creationId xmlns:a16="http://schemas.microsoft.com/office/drawing/2014/main" id="{E7D27420-4BEC-434A-83F4-9D5E9F136FEC}"/>
+              </a:ext>
+            </a:extLst>
+          </p:cNvPr>
+          <p:cNvSpPr/>
+          <p:nvPr/>
+        </p:nvSpPr>
+        <p:spPr>
+          <a:xfrm>
+            <a:off x="368300" y="2095500"/>
+            <a:ext cx="3200400" cy="2667000"/>
+          </a:xfrm>
+          <a:prstGeom prst="roundRect">
+            <a:avLst/>
+          </a:prstGeom>
+          <a:solidFill>
+            <a:srgbClr val="FFFFFF"/>
+          </a:solidFill>
+          <a:ln w="12700" cap="flat" cmpd="sng" algn="ctr">
+            <a:noFill/>
+            <a:prstDash val="solid"/>
+            <a:miter lim="800000"/>
+          </a:ln>
+        </p:spPr>
+        <p:style>
+          <a:lnRef idx="2">
+            <a:schemeClr val="accent1">
+              <a:shade val="15000"/>
+            </a:schemeClr>
+          </a:lnRef>
+          <a:fillRef idx="1">
+            <a:schemeClr val="accent1"/>
+          </a:fillRef>
+          <a:effectRef idx="0">
+            <a:schemeClr val="accent1"/>
+          </a:effectRef>
+          <a:fontRef idx="minor">
+            <a:schemeClr val="lt1"/>
+          </a:fontRef>
+        </p:style>
+        <p:txBody>
+          <a:bodyPr vertOverflow="clip" horzOverflow="clip" rtlCol="0" anchor="t"/>
+          <a:lstStyle/>
+          <a:p>
+            <a:pPr algn="l"/>
+            <a:endParaRPr lang="ja-JP" altLang="en-US"/>
+          </a:p>
+        </p:txBody>
+      </p:sp>
+      <p:sp>
+        <p:nvSpPr>
           <p:cNvPr id="2" name="Shape 0"/>
           <p:cNvSpPr/>
           <p:nvPr/>
@@ -3702,7 +3649,7 @@
         <p:spPr>
           <a:xfrm>
             <a:off x="368300" y="1422400"/>
-            <a:ext cx="3200400" cy="3289300"/>
+            <a:ext cx="3200400" cy="571500"/>
           </a:xfrm>
           <a:prstGeom prst="roundRect">
             <a:avLst>
@@ -3742,7 +3689,7 @@
         </p:nvSpPr>
         <p:spPr>
           <a:xfrm>
-            <a:off x="546100" y="1574800"/>
+            <a:off x="546100" y="1549400"/>
             <a:ext cx="2832100" cy="317500"/>
           </a:xfrm>
           <a:prstGeom prst="rect">
@@ -3752,7 +3699,7 @@
           <a:ln/>
         </p:spPr>
         <p:txBody>
-          <a:bodyPr wrap="square" lIns="0" tIns="0" rIns="0" bIns="0" rtlCol="0" anchor="ctr"/>
+          <a:bodyPr wrap="square" lIns="0" tIns="0" rIns="0" bIns="0" rtlCol="0" anchor="ctr" anchorCtr="0"/>
           <a:lstStyle/>
           <a:p>
             <a:pPr marL="0" indent="0" algn="l">
@@ -3772,48 +3719,14 @@
       </p:sp>
       <p:sp>
         <p:nvSpPr>
-          <p:cNvPr id="39" name="Shape 37"/>
-          <p:cNvSpPr/>
-          <p:nvPr/>
-        </p:nvSpPr>
-        <p:spPr>
-          <a:xfrm>
-            <a:off x="546100" y="1968500"/>
-            <a:ext cx="2832100" cy="1003300"/>
-          </a:xfrm>
-          <a:prstGeom prst="roundRect">
-            <a:avLst>
-              <a:gd name="adj" fmla="val 6364"/>
-            </a:avLst>
-          </a:prstGeom>
-          <a:solidFill>
-            <a:srgbClr val="FFF8E1"/>
-          </a:solidFill>
-          <a:ln w="12700">
-            <a:solidFill>
-              <a:srgbClr val="F0C040"/>
-            </a:solidFill>
-            <a:prstDash val="solid"/>
-          </a:ln>
-        </p:spPr>
-        <p:txBody>
-          <a:bodyPr/>
-          <a:lstStyle/>
-          <a:p>
-            <a:endParaRPr lang="ja-JP" altLang="en-US"/>
-          </a:p>
-        </p:txBody>
-      </p:sp>
-      <p:sp>
-        <p:nvSpPr>
-          <p:cNvPr id="40" name="Text 38"/>
-          <p:cNvSpPr/>
-          <p:nvPr/>
-        </p:nvSpPr>
-        <p:spPr>
-          <a:xfrm>
-            <a:off x="660400" y="2044700"/>
-            <a:ext cx="2616200" cy="863600"/>
+          <p:cNvPr id="42" name="Text 40"/>
+          <p:cNvSpPr/>
+          <p:nvPr/>
+        </p:nvSpPr>
+        <p:spPr>
+          <a:xfrm>
+            <a:off x="546100" y="2222500"/>
+            <a:ext cx="2832100" cy="317500"/>
           </a:xfrm>
           <a:prstGeom prst="rect">
             <a:avLst/>
@@ -3822,75 +3735,7 @@
           <a:ln/>
         </p:spPr>
         <p:txBody>
-          <a:bodyPr wrap="square" lIns="0" tIns="0" rIns="0" bIns="0" rtlCol="0" anchor="t"/>
-          <a:lstStyle/>
-          <a:p>
-            <a:pPr marL="0" indent="0" algn="l">
-              <a:lnSpc>
-                <a:spcPct val="140000"/>
-              </a:lnSpc>
-              <a:buNone/>
-            </a:pPr>
-            <a:r>
-              <a:rPr lang="en-US" sz="1050" i="1" dirty="0">
-                <a:solidFill>
-                  <a:srgbClr val="5A4800"/>
-                </a:solidFill>
-              </a:rPr>
-              <a:t>ジャンル・舞台・目的を3〜4文で</a:t>
-            </a:r>
-          </a:p>
-        </p:txBody>
-      </p:sp>
-      <p:sp>
-        <p:nvSpPr>
-          <p:cNvPr id="41" name="Shape 39"/>
-          <p:cNvSpPr/>
-          <p:nvPr/>
-        </p:nvSpPr>
-        <p:spPr>
-          <a:xfrm>
-            <a:off x="548640" y="3090672"/>
-            <a:ext cx="3657600" cy="0"/>
-          </a:xfrm>
-          <a:prstGeom prst="line">
-            <a:avLst/>
-          </a:prstGeom>
-          <a:noFill/>
-          <a:ln w="8890">
-            <a:solidFill>
-              <a:srgbClr val="DDE0E6"/>
-            </a:solidFill>
-            <a:prstDash val="solid"/>
-          </a:ln>
-        </p:spPr>
-        <p:txBody>
-          <a:bodyPr/>
-          <a:lstStyle/>
-          <a:p>
-            <a:endParaRPr lang="ja-JP" altLang="en-US"/>
-          </a:p>
-        </p:txBody>
-      </p:sp>
-      <p:sp>
-        <p:nvSpPr>
-          <p:cNvPr id="42" name="Text 40"/>
-          <p:cNvSpPr/>
-          <p:nvPr/>
-        </p:nvSpPr>
-        <p:spPr>
-          <a:xfrm>
-            <a:off x="546100" y="3200400"/>
-            <a:ext cx="2832100" cy="292100"/>
-          </a:xfrm>
-          <a:prstGeom prst="rect">
-            <a:avLst/>
-          </a:prstGeom>
-          <a:noFill/>
-          <a:ln/>
-        </p:spPr>
-        <p:txBody>
-          <a:bodyPr wrap="square" lIns="0" tIns="0" rIns="0" bIns="0" rtlCol="0" anchor="ctr"/>
+          <a:bodyPr wrap="square" lIns="0" tIns="0" rIns="0" bIns="0" rtlCol="0" anchor="ctr" anchorCtr="0"/>
           <a:lstStyle/>
           <a:p>
             <a:pPr marL="0" indent="0" algn="l">
@@ -3910,244 +3755,193 @@
       </p:sp>
       <p:sp>
         <p:nvSpPr>
-          <p:cNvPr id="43" name="Shape 41"/>
-          <p:cNvSpPr/>
-          <p:nvPr/>
-        </p:nvSpPr>
-        <p:spPr>
-          <a:xfrm>
-            <a:off x="546100" y="3568700"/>
-            <a:ext cx="2832100" cy="965200"/>
-          </a:xfrm>
-          <a:prstGeom prst="roundRect">
-            <a:avLst>
-              <a:gd name="adj" fmla="val 6667"/>
-            </a:avLst>
-          </a:prstGeom>
-          <a:solidFill>
-            <a:srgbClr val="FFF8E1"/>
-          </a:solidFill>
-          <a:ln w="12700">
-            <a:solidFill>
-              <a:srgbClr val="F0C040"/>
-            </a:solidFill>
-            <a:prstDash val="solid"/>
-          </a:ln>
-        </p:spPr>
-        <p:txBody>
-          <a:bodyPr/>
-          <a:lstStyle/>
-          <a:p>
-            <a:endParaRPr lang="ja-JP" altLang="en-US"/>
-          </a:p>
-        </p:txBody>
-      </p:sp>
-      <p:sp>
-        <p:nvSpPr>
-          <p:cNvPr id="44" name="Text 42"/>
-          <p:cNvSpPr/>
-          <p:nvPr/>
-        </p:nvSpPr>
-        <p:spPr>
-          <a:xfrm>
-            <a:off x="660400" y="3644900"/>
-            <a:ext cx="2616200" cy="812800"/>
-          </a:xfrm>
-          <a:prstGeom prst="rect">
-            <a:avLst/>
-          </a:prstGeom>
-          <a:noFill/>
-          <a:ln/>
-        </p:spPr>
-        <p:txBody>
-          <a:bodyPr wrap="square" lIns="0" tIns="0" rIns="0" bIns="0" rtlCol="0" anchor="t"/>
-          <a:lstStyle/>
-          <a:p>
-            <a:pPr marL="0" indent="0" algn="l">
-              <a:lnSpc>
-                <a:spcPct val="140000"/>
-              </a:lnSpc>
-              <a:buNone/>
-            </a:pPr>
-            <a:r>
-              <a:rPr lang="en-US" sz="1050" i="1" dirty="0">
-                <a:solidFill>
-                  <a:srgbClr val="5A4800"/>
-                </a:solidFill>
-              </a:rPr>
-              <a:t>ジャンル / プレイ時間 / 対象 / 状況</a:t>
-            </a:r>
-          </a:p>
-        </p:txBody>
-      </p:sp>
-      <p:sp>
-        <p:nvSpPr>
-          <p:cNvPr id="45" name="Shape 43"/>
-          <p:cNvSpPr/>
-          <p:nvPr/>
-        </p:nvSpPr>
-        <p:spPr>
+          <p:cNvPr id="46" name="Shape 44"/>
+          <p:cNvSpPr/>
+          <p:nvPr/>
+        </p:nvSpPr>
+        <p:spPr>
+          <a:xfrm>
+            <a:off x="6720840" y="1485900"/>
+            <a:ext cx="0" cy="3213100"/>
+          </a:xfrm>
+          <a:prstGeom prst="line">
+            <a:avLst/>
+          </a:prstGeom>
+          <a:noFill/>
+          <a:ln w="8890">
+            <a:solidFill>
+              <a:srgbClr val="B0BAC9"/>
+            </a:solidFill>
+            <a:prstDash val="dash"/>
+          </a:ln>
+        </p:spPr>
+        <p:txBody>
+          <a:bodyPr/>
+          <a:lstStyle/>
+          <a:p>
+            <a:endParaRPr lang="ja-JP" altLang="en-US"/>
+          </a:p>
+        </p:txBody>
+      </p:sp>
+      <p:sp>
+        <p:nvSpPr>
+          <p:cNvPr id="47" name="Shape 45"/>
+          <p:cNvSpPr/>
+          <p:nvPr/>
+        </p:nvSpPr>
+        <p:spPr>
+          <a:xfrm>
+            <a:off x="4754880" y="3092450"/>
+            <a:ext cx="3931920" cy="0"/>
+          </a:xfrm>
+          <a:prstGeom prst="line">
+            <a:avLst/>
+          </a:prstGeom>
+          <a:noFill/>
+          <a:ln w="8890">
+            <a:solidFill>
+              <a:srgbClr val="B0BAC9"/>
+            </a:solidFill>
+            <a:prstDash val="dash"/>
+          </a:ln>
+        </p:spPr>
+        <p:txBody>
+          <a:bodyPr/>
+          <a:lstStyle/>
+          <a:p>
+            <a:endParaRPr lang="ja-JP" altLang="en-US"/>
+          </a:p>
+        </p:txBody>
+      </p:sp>
+      <p:grpSp>
+        <p:nvGrpSpPr>
+          <p:cNvPr id="50" name="グループ化 49">
+            <a:extLst>
+              <a:ext uri="{FF2B5EF4-FFF2-40B4-BE49-F238E27FC236}">
+                <a16:creationId xmlns:a16="http://schemas.microsoft.com/office/drawing/2014/main" id="{615FB107-0F65-2BD2-9469-DF2EA547864D}"/>
+              </a:ext>
+            </a:extLst>
+          </p:cNvPr>
+          <p:cNvGrpSpPr/>
+          <p:nvPr/>
+        </p:nvGrpSpPr>
+        <p:grpSpPr>
           <a:xfrm>
             <a:off x="3746500" y="1422400"/>
-            <a:ext cx="5029200" cy="3289300"/>
-          </a:xfrm>
-          <a:prstGeom prst="roundRect">
-            <a:avLst>
-              <a:gd name="adj" fmla="val 2222"/>
-            </a:avLst>
-          </a:prstGeom>
-          <a:solidFill>
-            <a:srgbClr val="E8EBF0"/>
-          </a:solidFill>
-          <a:ln w="19050">
-            <a:solidFill>
-              <a:srgbClr val="B0BAC9"/>
-            </a:solidFill>
-            <a:prstDash val="dash"/>
-          </a:ln>
-        </p:spPr>
-        <p:txBody>
-          <a:bodyPr/>
-          <a:lstStyle/>
-          <a:p>
-            <a:endParaRPr lang="ja-JP" altLang="en-US"/>
-          </a:p>
-        </p:txBody>
-      </p:sp>
-      <p:sp>
-        <p:nvSpPr>
-          <p:cNvPr id="46" name="Shape 44"/>
-          <p:cNvSpPr/>
-          <p:nvPr/>
-        </p:nvSpPr>
-        <p:spPr>
-          <a:xfrm>
-            <a:off x="6720840" y="1508760"/>
-            <a:ext cx="0" cy="3108960"/>
-          </a:xfrm>
-          <a:prstGeom prst="line">
-            <a:avLst/>
-          </a:prstGeom>
-          <a:noFill/>
-          <a:ln w="8890">
-            <a:solidFill>
-              <a:srgbClr val="B0BAC9"/>
-            </a:solidFill>
-            <a:prstDash val="dash"/>
-          </a:ln>
-        </p:spPr>
-        <p:txBody>
-          <a:bodyPr/>
-          <a:lstStyle/>
-          <a:p>
-            <a:endParaRPr lang="ja-JP" altLang="en-US"/>
-          </a:p>
-        </p:txBody>
-      </p:sp>
-      <p:sp>
-        <p:nvSpPr>
-          <p:cNvPr id="47" name="Shape 45"/>
-          <p:cNvSpPr/>
-          <p:nvPr/>
-        </p:nvSpPr>
-        <p:spPr>
-          <a:xfrm>
-            <a:off x="4754880" y="3063240"/>
-            <a:ext cx="3931920" cy="0"/>
-          </a:xfrm>
-          <a:prstGeom prst="line">
-            <a:avLst/>
-          </a:prstGeom>
-          <a:noFill/>
-          <a:ln w="8890">
-            <a:solidFill>
-              <a:srgbClr val="B0BAC9"/>
-            </a:solidFill>
-            <a:prstDash val="dash"/>
-          </a:ln>
-        </p:spPr>
-        <p:txBody>
-          <a:bodyPr/>
-          <a:lstStyle/>
-          <a:p>
-            <a:endParaRPr lang="ja-JP" altLang="en-US"/>
-          </a:p>
-        </p:txBody>
-      </p:sp>
-      <p:sp>
-        <p:nvSpPr>
-          <p:cNvPr id="48" name="Text 46"/>
-          <p:cNvSpPr/>
-          <p:nvPr/>
-        </p:nvSpPr>
-        <p:spPr>
-          <a:xfrm>
-            <a:off x="3746500" y="2743200"/>
-            <a:ext cx="5029200" cy="279400"/>
-          </a:xfrm>
-          <a:prstGeom prst="rect">
-            <a:avLst/>
-          </a:prstGeom>
-          <a:noFill/>
-          <a:ln/>
-        </p:spPr>
-        <p:txBody>
-          <a:bodyPr wrap="square" lIns="0" tIns="0" rIns="0" bIns="0" rtlCol="0" anchor="ctr"/>
-          <a:lstStyle/>
-          <a:p>
-            <a:pPr marL="0" indent="0" algn="ctr">
-              <a:buNone/>
-            </a:pPr>
-            <a:r>
-              <a:rPr lang="en-US" sz="1000" b="1" kern="0" spc="200" dirty="0">
-                <a:solidFill>
-                  <a:srgbClr val="B0BAC9"/>
-                </a:solidFill>
-              </a:rPr>
-              <a:t>[ IMAGE ]</a:t>
-            </a:r>
-            <a:endParaRPr lang="en-US" sz="1000" dirty="0"/>
-          </a:p>
-        </p:txBody>
-      </p:sp>
-      <p:sp>
-        <p:nvSpPr>
-          <p:cNvPr id="49" name="Text 47"/>
-          <p:cNvSpPr/>
-          <p:nvPr/>
-        </p:nvSpPr>
-        <p:spPr>
-          <a:xfrm>
-            <a:off x="3835400" y="3048000"/>
-            <a:ext cx="4851400" cy="1384300"/>
-          </a:xfrm>
-          <a:prstGeom prst="rect">
-            <a:avLst/>
-          </a:prstGeom>
-          <a:noFill/>
-          <a:ln/>
-        </p:spPr>
-        <p:txBody>
-          <a:bodyPr wrap="square" lIns="0" tIns="0" rIns="0" bIns="0" rtlCol="0" anchor="t"/>
-          <a:lstStyle/>
-          <a:p>
-            <a:pPr marL="0" indent="0" algn="ctr">
-              <a:lnSpc>
-                <a:spcPct val="135000"/>
-              </a:lnSpc>
-              <a:buNone/>
-            </a:pPr>
-            <a:r>
-              <a:rPr lang="en-US" sz="950" dirty="0">
-                <a:solidFill>
-                  <a:srgbClr val="8A909E"/>
-                </a:solidFill>
-              </a:rPr>
-              <a:t>ゲームプレイ画面のスクリーンショット</a:t>
-            </a:r>
-          </a:p>
-        </p:txBody>
-      </p:sp>
+            <a:ext cx="5029200" cy="3340100"/>
+            <a:chOff x="3746500" y="1828800"/>
+            <a:chExt cx="5029200" cy="2882900"/>
+          </a:xfrm>
+        </p:grpSpPr>
+        <p:sp>
+          <p:nvSpPr>
+            <p:cNvPr id="45" name="Shape 43"/>
+            <p:cNvSpPr/>
+            <p:nvPr/>
+          </p:nvSpPr>
+          <p:spPr>
+            <a:xfrm>
+              <a:off x="3746500" y="1828800"/>
+              <a:ext cx="5029200" cy="2882900"/>
+            </a:xfrm>
+            <a:prstGeom prst="roundRect">
+              <a:avLst>
+                <a:gd name="adj" fmla="val 2222"/>
+              </a:avLst>
+            </a:prstGeom>
+            <a:solidFill>
+              <a:srgbClr val="E8EBF0"/>
+            </a:solidFill>
+            <a:ln w="19050">
+              <a:solidFill>
+                <a:srgbClr val="B0BAC9"/>
+              </a:solidFill>
+              <a:prstDash val="dash"/>
+            </a:ln>
+          </p:spPr>
+          <p:txBody>
+            <a:bodyPr/>
+            <a:lstStyle/>
+            <a:p>
+              <a:endParaRPr lang="ja-JP" altLang="en-US"/>
+            </a:p>
+          </p:txBody>
+        </p:sp>
+        <p:sp>
+          <p:nvSpPr>
+            <p:cNvPr id="48" name="Text 46"/>
+            <p:cNvSpPr/>
+            <p:nvPr/>
+          </p:nvSpPr>
+          <p:spPr>
+            <a:xfrm>
+              <a:off x="3746500" y="2743200"/>
+              <a:ext cx="5029200" cy="279400"/>
+            </a:xfrm>
+            <a:prstGeom prst="rect">
+              <a:avLst/>
+            </a:prstGeom>
+            <a:noFill/>
+            <a:ln/>
+          </p:spPr>
+          <p:txBody>
+            <a:bodyPr wrap="square" lIns="0" tIns="0" rIns="0" bIns="0" rtlCol="0" anchor="ctr"/>
+            <a:lstStyle/>
+            <a:p>
+              <a:pPr marL="0" indent="0" algn="ctr">
+                <a:buNone/>
+              </a:pPr>
+              <a:r>
+                <a:rPr lang="en-US" sz="1000" b="1" kern="0" spc="200" dirty="0">
+                  <a:solidFill>
+                    <a:srgbClr val="B0BAC9"/>
+                  </a:solidFill>
+                </a:rPr>
+                <a:t>[ IMAGE ]</a:t>
+              </a:r>
+              <a:endParaRPr lang="en-US" sz="1000" dirty="0"/>
+            </a:p>
+          </p:txBody>
+        </p:sp>
+        <p:sp>
+          <p:nvSpPr>
+            <p:cNvPr id="49" name="Text 47"/>
+            <p:cNvSpPr/>
+            <p:nvPr/>
+          </p:nvSpPr>
+          <p:spPr>
+            <a:xfrm>
+              <a:off x="3835400" y="3048000"/>
+              <a:ext cx="4851400" cy="1384300"/>
+            </a:xfrm>
+            <a:prstGeom prst="rect">
+              <a:avLst/>
+            </a:prstGeom>
+            <a:noFill/>
+            <a:ln/>
+          </p:spPr>
+          <p:txBody>
+            <a:bodyPr wrap="square" lIns="0" tIns="0" rIns="0" bIns="0" rtlCol="0" anchor="t"/>
+            <a:lstStyle/>
+            <a:p>
+              <a:pPr marL="0" indent="0" algn="ctr">
+                <a:lnSpc>
+                  <a:spcPct val="135000"/>
+                </a:lnSpc>
+                <a:buNone/>
+              </a:pPr>
+              <a:r>
+                <a:rPr lang="en-US" sz="950" dirty="0">
+                  <a:solidFill>
+                    <a:srgbClr val="8A909E"/>
+                  </a:solidFill>
+                </a:rPr>
+                <a:t>ゲームプレイ画面のスクリーンショット</a:t>
+              </a:r>
+            </a:p>
+          </p:txBody>
+        </p:sp>
+      </p:grpSp>
     </p:spTree>
     <p:extLst>
       <p:ext uri="{BB962C8B-B14F-4D97-AF65-F5344CB8AC3E}">
@@ -4162,6 +3956,1898 @@
 </file>
 
 <file path=ppt/slides/slide3.xml><?xml version="1.0" encoding="utf-8"?>
+<p:sld xmlns:a="http://schemas.openxmlformats.org/drawingml/2006/main" xmlns:r="http://schemas.openxmlformats.org/officeDocument/2006/relationships" xmlns:p="http://schemas.openxmlformats.org/presentationml/2006/main">
+  <p:cSld>
+    <p:bg>
+      <p:bgPr>
+        <a:solidFill>
+          <a:srgbClr val="F4F5F7"/>
+        </a:solidFill>
+        <a:effectLst/>
+      </p:bgPr>
+    </p:bg>
+    <p:spTree>
+      <p:nvGrpSpPr>
+        <p:cNvPr id="1" name="">
+          <a:extLst>
+            <a:ext uri="{FF2B5EF4-FFF2-40B4-BE49-F238E27FC236}">
+              <a16:creationId xmlns:a16="http://schemas.microsoft.com/office/drawing/2014/main" id="{D95F8C4E-F75D-2937-6293-9F5C74C1CC24}"/>
+            </a:ext>
+          </a:extLst>
+        </p:cNvPr>
+        <p:cNvGrpSpPr/>
+        <p:nvPr/>
+      </p:nvGrpSpPr>
+      <p:grpSpPr>
+        <a:xfrm>
+          <a:off x="0" y="0"/>
+          <a:ext cx="0" cy="0"/>
+          <a:chOff x="0" y="0"/>
+          <a:chExt cx="0" cy="0"/>
+        </a:xfrm>
+      </p:grpSpPr>
+      <p:sp>
+        <p:nvSpPr>
+          <p:cNvPr id="2" name="Shape 0">
+            <a:extLst>
+              <a:ext uri="{FF2B5EF4-FFF2-40B4-BE49-F238E27FC236}">
+                <a16:creationId xmlns:a16="http://schemas.microsoft.com/office/drawing/2014/main" id="{12BAA6A0-74BF-7971-7434-5130A1BD9B35}"/>
+              </a:ext>
+            </a:extLst>
+          </p:cNvPr>
+          <p:cNvSpPr/>
+          <p:nvPr/>
+        </p:nvSpPr>
+        <p:spPr>
+          <a:xfrm>
+            <a:off x="0" y="457200"/>
+            <a:ext cx="9144000" cy="0"/>
+          </a:xfrm>
+          <a:prstGeom prst="line">
+            <a:avLst/>
+          </a:prstGeom>
+          <a:noFill/>
+          <a:ln w="6350">
+            <a:solidFill>
+              <a:srgbClr val="DDE0E6"/>
+            </a:solidFill>
+            <a:prstDash val="solid"/>
+          </a:ln>
+        </p:spPr>
+        <p:txBody>
+          <a:bodyPr/>
+          <a:lstStyle/>
+          <a:p>
+            <a:endParaRPr lang="ja-JP" altLang="en-US"/>
+          </a:p>
+        </p:txBody>
+      </p:sp>
+      <p:sp>
+        <p:nvSpPr>
+          <p:cNvPr id="3" name="Shape 1">
+            <a:extLst>
+              <a:ext uri="{FF2B5EF4-FFF2-40B4-BE49-F238E27FC236}">
+                <a16:creationId xmlns:a16="http://schemas.microsoft.com/office/drawing/2014/main" id="{C536E2F0-74DE-5546-65FE-451479D023B1}"/>
+              </a:ext>
+            </a:extLst>
+          </p:cNvPr>
+          <p:cNvSpPr/>
+          <p:nvPr/>
+        </p:nvSpPr>
+        <p:spPr>
+          <a:xfrm>
+            <a:off x="0" y="914400"/>
+            <a:ext cx="9144000" cy="0"/>
+          </a:xfrm>
+          <a:prstGeom prst="line">
+            <a:avLst/>
+          </a:prstGeom>
+          <a:noFill/>
+          <a:ln w="6350">
+            <a:solidFill>
+              <a:srgbClr val="DDE0E6"/>
+            </a:solidFill>
+            <a:prstDash val="solid"/>
+          </a:ln>
+        </p:spPr>
+        <p:txBody>
+          <a:bodyPr/>
+          <a:lstStyle/>
+          <a:p>
+            <a:endParaRPr lang="ja-JP" altLang="en-US"/>
+          </a:p>
+        </p:txBody>
+      </p:sp>
+      <p:sp>
+        <p:nvSpPr>
+          <p:cNvPr id="4" name="Shape 2">
+            <a:extLst>
+              <a:ext uri="{FF2B5EF4-FFF2-40B4-BE49-F238E27FC236}">
+                <a16:creationId xmlns:a16="http://schemas.microsoft.com/office/drawing/2014/main" id="{8D01EAB7-1FFF-B8B6-DB29-0A5638AB1284}"/>
+              </a:ext>
+            </a:extLst>
+          </p:cNvPr>
+          <p:cNvSpPr/>
+          <p:nvPr/>
+        </p:nvSpPr>
+        <p:spPr>
+          <a:xfrm>
+            <a:off x="0" y="1371600"/>
+            <a:ext cx="9144000" cy="0"/>
+          </a:xfrm>
+          <a:prstGeom prst="line">
+            <a:avLst/>
+          </a:prstGeom>
+          <a:noFill/>
+          <a:ln w="6350">
+            <a:solidFill>
+              <a:srgbClr val="DDE0E6"/>
+            </a:solidFill>
+            <a:prstDash val="solid"/>
+          </a:ln>
+        </p:spPr>
+        <p:txBody>
+          <a:bodyPr/>
+          <a:lstStyle/>
+          <a:p>
+            <a:endParaRPr lang="ja-JP" altLang="en-US"/>
+          </a:p>
+        </p:txBody>
+      </p:sp>
+      <p:sp>
+        <p:nvSpPr>
+          <p:cNvPr id="5" name="Shape 3">
+            <a:extLst>
+              <a:ext uri="{FF2B5EF4-FFF2-40B4-BE49-F238E27FC236}">
+                <a16:creationId xmlns:a16="http://schemas.microsoft.com/office/drawing/2014/main" id="{90AD364C-1C12-3954-8BD8-21FF6E783749}"/>
+              </a:ext>
+            </a:extLst>
+          </p:cNvPr>
+          <p:cNvSpPr/>
+          <p:nvPr/>
+        </p:nvSpPr>
+        <p:spPr>
+          <a:xfrm>
+            <a:off x="0" y="1828800"/>
+            <a:ext cx="9144000" cy="0"/>
+          </a:xfrm>
+          <a:prstGeom prst="line">
+            <a:avLst/>
+          </a:prstGeom>
+          <a:noFill/>
+          <a:ln w="6350">
+            <a:solidFill>
+              <a:srgbClr val="DDE0E6"/>
+            </a:solidFill>
+            <a:prstDash val="solid"/>
+          </a:ln>
+        </p:spPr>
+        <p:txBody>
+          <a:bodyPr/>
+          <a:lstStyle/>
+          <a:p>
+            <a:endParaRPr lang="ja-JP" altLang="en-US"/>
+          </a:p>
+        </p:txBody>
+      </p:sp>
+      <p:sp>
+        <p:nvSpPr>
+          <p:cNvPr id="6" name="Shape 4">
+            <a:extLst>
+              <a:ext uri="{FF2B5EF4-FFF2-40B4-BE49-F238E27FC236}">
+                <a16:creationId xmlns:a16="http://schemas.microsoft.com/office/drawing/2014/main" id="{A36C9897-8D1D-6C13-5BC0-0048DEC51EC6}"/>
+              </a:ext>
+            </a:extLst>
+          </p:cNvPr>
+          <p:cNvSpPr/>
+          <p:nvPr/>
+        </p:nvSpPr>
+        <p:spPr>
+          <a:xfrm>
+            <a:off x="0" y="2286000"/>
+            <a:ext cx="9144000" cy="0"/>
+          </a:xfrm>
+          <a:prstGeom prst="line">
+            <a:avLst/>
+          </a:prstGeom>
+          <a:noFill/>
+          <a:ln w="6350">
+            <a:solidFill>
+              <a:srgbClr val="DDE0E6"/>
+            </a:solidFill>
+            <a:prstDash val="solid"/>
+          </a:ln>
+        </p:spPr>
+        <p:txBody>
+          <a:bodyPr/>
+          <a:lstStyle/>
+          <a:p>
+            <a:endParaRPr lang="ja-JP" altLang="en-US"/>
+          </a:p>
+        </p:txBody>
+      </p:sp>
+      <p:sp>
+        <p:nvSpPr>
+          <p:cNvPr id="7" name="Shape 5">
+            <a:extLst>
+              <a:ext uri="{FF2B5EF4-FFF2-40B4-BE49-F238E27FC236}">
+                <a16:creationId xmlns:a16="http://schemas.microsoft.com/office/drawing/2014/main" id="{0A331670-2EB1-B8C0-2EE8-5C3BAF175FBE}"/>
+              </a:ext>
+            </a:extLst>
+          </p:cNvPr>
+          <p:cNvSpPr/>
+          <p:nvPr/>
+        </p:nvSpPr>
+        <p:spPr>
+          <a:xfrm>
+            <a:off x="0" y="2743200"/>
+            <a:ext cx="9144000" cy="0"/>
+          </a:xfrm>
+          <a:prstGeom prst="line">
+            <a:avLst/>
+          </a:prstGeom>
+          <a:noFill/>
+          <a:ln w="6350">
+            <a:solidFill>
+              <a:srgbClr val="DDE0E6"/>
+            </a:solidFill>
+            <a:prstDash val="solid"/>
+          </a:ln>
+        </p:spPr>
+        <p:txBody>
+          <a:bodyPr/>
+          <a:lstStyle/>
+          <a:p>
+            <a:endParaRPr lang="ja-JP" altLang="en-US"/>
+          </a:p>
+        </p:txBody>
+      </p:sp>
+      <p:sp>
+        <p:nvSpPr>
+          <p:cNvPr id="8" name="Shape 6">
+            <a:extLst>
+              <a:ext uri="{FF2B5EF4-FFF2-40B4-BE49-F238E27FC236}">
+                <a16:creationId xmlns:a16="http://schemas.microsoft.com/office/drawing/2014/main" id="{D99FD7D2-96A6-51C7-7A28-D23C42CCE85E}"/>
+              </a:ext>
+            </a:extLst>
+          </p:cNvPr>
+          <p:cNvSpPr/>
+          <p:nvPr/>
+        </p:nvSpPr>
+        <p:spPr>
+          <a:xfrm>
+            <a:off x="0" y="3200400"/>
+            <a:ext cx="9144000" cy="0"/>
+          </a:xfrm>
+          <a:prstGeom prst="line">
+            <a:avLst/>
+          </a:prstGeom>
+          <a:noFill/>
+          <a:ln w="6350">
+            <a:solidFill>
+              <a:srgbClr val="DDE0E6"/>
+            </a:solidFill>
+            <a:prstDash val="solid"/>
+          </a:ln>
+        </p:spPr>
+        <p:txBody>
+          <a:bodyPr/>
+          <a:lstStyle/>
+          <a:p>
+            <a:endParaRPr lang="ja-JP" altLang="en-US"/>
+          </a:p>
+        </p:txBody>
+      </p:sp>
+      <p:sp>
+        <p:nvSpPr>
+          <p:cNvPr id="9" name="Shape 7">
+            <a:extLst>
+              <a:ext uri="{FF2B5EF4-FFF2-40B4-BE49-F238E27FC236}">
+                <a16:creationId xmlns:a16="http://schemas.microsoft.com/office/drawing/2014/main" id="{4197F945-8AF6-8AD4-C5BD-59BBCAD90A5D}"/>
+              </a:ext>
+            </a:extLst>
+          </p:cNvPr>
+          <p:cNvSpPr/>
+          <p:nvPr/>
+        </p:nvSpPr>
+        <p:spPr>
+          <a:xfrm>
+            <a:off x="0" y="3657600"/>
+            <a:ext cx="9144000" cy="0"/>
+          </a:xfrm>
+          <a:prstGeom prst="line">
+            <a:avLst/>
+          </a:prstGeom>
+          <a:noFill/>
+          <a:ln w="6350">
+            <a:solidFill>
+              <a:srgbClr val="DDE0E6"/>
+            </a:solidFill>
+            <a:prstDash val="solid"/>
+          </a:ln>
+        </p:spPr>
+        <p:txBody>
+          <a:bodyPr/>
+          <a:lstStyle/>
+          <a:p>
+            <a:endParaRPr lang="ja-JP" altLang="en-US"/>
+          </a:p>
+        </p:txBody>
+      </p:sp>
+      <p:sp>
+        <p:nvSpPr>
+          <p:cNvPr id="10" name="Shape 8">
+            <a:extLst>
+              <a:ext uri="{FF2B5EF4-FFF2-40B4-BE49-F238E27FC236}">
+                <a16:creationId xmlns:a16="http://schemas.microsoft.com/office/drawing/2014/main" id="{A0964321-4166-2C42-BD2F-37D5442137D5}"/>
+              </a:ext>
+            </a:extLst>
+          </p:cNvPr>
+          <p:cNvSpPr/>
+          <p:nvPr/>
+        </p:nvSpPr>
+        <p:spPr>
+          <a:xfrm>
+            <a:off x="0" y="4114800"/>
+            <a:ext cx="9144000" cy="0"/>
+          </a:xfrm>
+          <a:prstGeom prst="line">
+            <a:avLst/>
+          </a:prstGeom>
+          <a:noFill/>
+          <a:ln w="6350">
+            <a:solidFill>
+              <a:srgbClr val="DDE0E6"/>
+            </a:solidFill>
+            <a:prstDash val="solid"/>
+          </a:ln>
+        </p:spPr>
+        <p:txBody>
+          <a:bodyPr/>
+          <a:lstStyle/>
+          <a:p>
+            <a:endParaRPr lang="ja-JP" altLang="en-US"/>
+          </a:p>
+        </p:txBody>
+      </p:sp>
+      <p:sp>
+        <p:nvSpPr>
+          <p:cNvPr id="11" name="Shape 9">
+            <a:extLst>
+              <a:ext uri="{FF2B5EF4-FFF2-40B4-BE49-F238E27FC236}">
+                <a16:creationId xmlns:a16="http://schemas.microsoft.com/office/drawing/2014/main" id="{FD892E38-FA70-52F6-43C1-1A3BC3FF0694}"/>
+              </a:ext>
+            </a:extLst>
+          </p:cNvPr>
+          <p:cNvSpPr/>
+          <p:nvPr/>
+        </p:nvSpPr>
+        <p:spPr>
+          <a:xfrm>
+            <a:off x="0" y="4572000"/>
+            <a:ext cx="9144000" cy="0"/>
+          </a:xfrm>
+          <a:prstGeom prst="line">
+            <a:avLst/>
+          </a:prstGeom>
+          <a:noFill/>
+          <a:ln w="6350">
+            <a:solidFill>
+              <a:srgbClr val="DDE0E6"/>
+            </a:solidFill>
+            <a:prstDash val="solid"/>
+          </a:ln>
+        </p:spPr>
+        <p:txBody>
+          <a:bodyPr/>
+          <a:lstStyle/>
+          <a:p>
+            <a:endParaRPr lang="ja-JP" altLang="en-US"/>
+          </a:p>
+        </p:txBody>
+      </p:sp>
+      <p:sp>
+        <p:nvSpPr>
+          <p:cNvPr id="12" name="Shape 10">
+            <a:extLst>
+              <a:ext uri="{FF2B5EF4-FFF2-40B4-BE49-F238E27FC236}">
+                <a16:creationId xmlns:a16="http://schemas.microsoft.com/office/drawing/2014/main" id="{D9742708-F7F0-66E9-7D26-7485EB21D170}"/>
+              </a:ext>
+            </a:extLst>
+          </p:cNvPr>
+          <p:cNvSpPr/>
+          <p:nvPr/>
+        </p:nvSpPr>
+        <p:spPr>
+          <a:xfrm>
+            <a:off x="0" y="5029200"/>
+            <a:ext cx="9144000" cy="0"/>
+          </a:xfrm>
+          <a:prstGeom prst="line">
+            <a:avLst/>
+          </a:prstGeom>
+          <a:noFill/>
+          <a:ln w="6350">
+            <a:solidFill>
+              <a:srgbClr val="DDE0E6"/>
+            </a:solidFill>
+            <a:prstDash val="solid"/>
+          </a:ln>
+        </p:spPr>
+        <p:txBody>
+          <a:bodyPr/>
+          <a:lstStyle/>
+          <a:p>
+            <a:endParaRPr lang="ja-JP" altLang="en-US"/>
+          </a:p>
+        </p:txBody>
+      </p:sp>
+      <p:sp>
+        <p:nvSpPr>
+          <p:cNvPr id="13" name="Shape 11">
+            <a:extLst>
+              <a:ext uri="{FF2B5EF4-FFF2-40B4-BE49-F238E27FC236}">
+                <a16:creationId xmlns:a16="http://schemas.microsoft.com/office/drawing/2014/main" id="{9EB5510A-3936-B3C8-307B-73E0794936F4}"/>
+              </a:ext>
+            </a:extLst>
+          </p:cNvPr>
+          <p:cNvSpPr/>
+          <p:nvPr/>
+        </p:nvSpPr>
+        <p:spPr>
+          <a:xfrm>
+            <a:off x="457200" y="0"/>
+            <a:ext cx="0" cy="5143500"/>
+          </a:xfrm>
+          <a:prstGeom prst="line">
+            <a:avLst/>
+          </a:prstGeom>
+          <a:noFill/>
+          <a:ln w="6350">
+            <a:solidFill>
+              <a:srgbClr val="DDE0E6"/>
+            </a:solidFill>
+            <a:prstDash val="solid"/>
+          </a:ln>
+        </p:spPr>
+        <p:txBody>
+          <a:bodyPr/>
+          <a:lstStyle/>
+          <a:p>
+            <a:endParaRPr lang="ja-JP" altLang="en-US"/>
+          </a:p>
+        </p:txBody>
+      </p:sp>
+      <p:sp>
+        <p:nvSpPr>
+          <p:cNvPr id="14" name="Shape 12">
+            <a:extLst>
+              <a:ext uri="{FF2B5EF4-FFF2-40B4-BE49-F238E27FC236}">
+                <a16:creationId xmlns:a16="http://schemas.microsoft.com/office/drawing/2014/main" id="{BF3D3827-4696-3563-2D2E-825CBDE06F02}"/>
+              </a:ext>
+            </a:extLst>
+          </p:cNvPr>
+          <p:cNvSpPr/>
+          <p:nvPr/>
+        </p:nvSpPr>
+        <p:spPr>
+          <a:xfrm>
+            <a:off x="914400" y="0"/>
+            <a:ext cx="0" cy="5143500"/>
+          </a:xfrm>
+          <a:prstGeom prst="line">
+            <a:avLst/>
+          </a:prstGeom>
+          <a:noFill/>
+          <a:ln w="6350">
+            <a:solidFill>
+              <a:srgbClr val="DDE0E6"/>
+            </a:solidFill>
+            <a:prstDash val="solid"/>
+          </a:ln>
+        </p:spPr>
+        <p:txBody>
+          <a:bodyPr/>
+          <a:lstStyle/>
+          <a:p>
+            <a:endParaRPr lang="ja-JP" altLang="en-US"/>
+          </a:p>
+        </p:txBody>
+      </p:sp>
+      <p:sp>
+        <p:nvSpPr>
+          <p:cNvPr id="15" name="Shape 13">
+            <a:extLst>
+              <a:ext uri="{FF2B5EF4-FFF2-40B4-BE49-F238E27FC236}">
+                <a16:creationId xmlns:a16="http://schemas.microsoft.com/office/drawing/2014/main" id="{AA15EF27-E88E-0419-388A-577349730957}"/>
+              </a:ext>
+            </a:extLst>
+          </p:cNvPr>
+          <p:cNvSpPr/>
+          <p:nvPr/>
+        </p:nvSpPr>
+        <p:spPr>
+          <a:xfrm>
+            <a:off x="1371600" y="0"/>
+            <a:ext cx="0" cy="5143500"/>
+          </a:xfrm>
+          <a:prstGeom prst="line">
+            <a:avLst/>
+          </a:prstGeom>
+          <a:noFill/>
+          <a:ln w="6350">
+            <a:solidFill>
+              <a:srgbClr val="DDE0E6"/>
+            </a:solidFill>
+            <a:prstDash val="solid"/>
+          </a:ln>
+        </p:spPr>
+        <p:txBody>
+          <a:bodyPr/>
+          <a:lstStyle/>
+          <a:p>
+            <a:endParaRPr lang="ja-JP" altLang="en-US"/>
+          </a:p>
+        </p:txBody>
+      </p:sp>
+      <p:sp>
+        <p:nvSpPr>
+          <p:cNvPr id="16" name="Shape 14">
+            <a:extLst>
+              <a:ext uri="{FF2B5EF4-FFF2-40B4-BE49-F238E27FC236}">
+                <a16:creationId xmlns:a16="http://schemas.microsoft.com/office/drawing/2014/main" id="{4CFB3C15-A0BD-AD41-EC6C-A17E88C09840}"/>
+              </a:ext>
+            </a:extLst>
+          </p:cNvPr>
+          <p:cNvSpPr/>
+          <p:nvPr/>
+        </p:nvSpPr>
+        <p:spPr>
+          <a:xfrm>
+            <a:off x="1828800" y="0"/>
+            <a:ext cx="0" cy="5143500"/>
+          </a:xfrm>
+          <a:prstGeom prst="line">
+            <a:avLst/>
+          </a:prstGeom>
+          <a:noFill/>
+          <a:ln w="6350">
+            <a:solidFill>
+              <a:srgbClr val="DDE0E6"/>
+            </a:solidFill>
+            <a:prstDash val="solid"/>
+          </a:ln>
+        </p:spPr>
+        <p:txBody>
+          <a:bodyPr/>
+          <a:lstStyle/>
+          <a:p>
+            <a:endParaRPr lang="ja-JP" altLang="en-US"/>
+          </a:p>
+        </p:txBody>
+      </p:sp>
+      <p:sp>
+        <p:nvSpPr>
+          <p:cNvPr id="17" name="Shape 15">
+            <a:extLst>
+              <a:ext uri="{FF2B5EF4-FFF2-40B4-BE49-F238E27FC236}">
+                <a16:creationId xmlns:a16="http://schemas.microsoft.com/office/drawing/2014/main" id="{8020EA41-2DF5-468F-8016-3215817F7F4F}"/>
+              </a:ext>
+            </a:extLst>
+          </p:cNvPr>
+          <p:cNvSpPr/>
+          <p:nvPr/>
+        </p:nvSpPr>
+        <p:spPr>
+          <a:xfrm>
+            <a:off x="2286000" y="0"/>
+            <a:ext cx="0" cy="5143500"/>
+          </a:xfrm>
+          <a:prstGeom prst="line">
+            <a:avLst/>
+          </a:prstGeom>
+          <a:noFill/>
+          <a:ln w="6350">
+            <a:solidFill>
+              <a:srgbClr val="DDE0E6"/>
+            </a:solidFill>
+            <a:prstDash val="solid"/>
+          </a:ln>
+        </p:spPr>
+        <p:txBody>
+          <a:bodyPr/>
+          <a:lstStyle/>
+          <a:p>
+            <a:endParaRPr lang="ja-JP" altLang="en-US"/>
+          </a:p>
+        </p:txBody>
+      </p:sp>
+      <p:sp>
+        <p:nvSpPr>
+          <p:cNvPr id="18" name="Shape 16">
+            <a:extLst>
+              <a:ext uri="{FF2B5EF4-FFF2-40B4-BE49-F238E27FC236}">
+                <a16:creationId xmlns:a16="http://schemas.microsoft.com/office/drawing/2014/main" id="{1034C9C2-579E-0461-FD92-79AB56199667}"/>
+              </a:ext>
+            </a:extLst>
+          </p:cNvPr>
+          <p:cNvSpPr/>
+          <p:nvPr/>
+        </p:nvSpPr>
+        <p:spPr>
+          <a:xfrm>
+            <a:off x="2743200" y="0"/>
+            <a:ext cx="0" cy="5143500"/>
+          </a:xfrm>
+          <a:prstGeom prst="line">
+            <a:avLst/>
+          </a:prstGeom>
+          <a:noFill/>
+          <a:ln w="6350">
+            <a:solidFill>
+              <a:srgbClr val="DDE0E6"/>
+            </a:solidFill>
+            <a:prstDash val="solid"/>
+          </a:ln>
+        </p:spPr>
+        <p:txBody>
+          <a:bodyPr/>
+          <a:lstStyle/>
+          <a:p>
+            <a:endParaRPr lang="ja-JP" altLang="en-US"/>
+          </a:p>
+        </p:txBody>
+      </p:sp>
+      <p:sp>
+        <p:nvSpPr>
+          <p:cNvPr id="19" name="Shape 17">
+            <a:extLst>
+              <a:ext uri="{FF2B5EF4-FFF2-40B4-BE49-F238E27FC236}">
+                <a16:creationId xmlns:a16="http://schemas.microsoft.com/office/drawing/2014/main" id="{5C40E537-9030-30D6-B65D-0F4AC22E3A3C}"/>
+              </a:ext>
+            </a:extLst>
+          </p:cNvPr>
+          <p:cNvSpPr/>
+          <p:nvPr/>
+        </p:nvSpPr>
+        <p:spPr>
+          <a:xfrm>
+            <a:off x="3200400" y="0"/>
+            <a:ext cx="0" cy="5143500"/>
+          </a:xfrm>
+          <a:prstGeom prst="line">
+            <a:avLst/>
+          </a:prstGeom>
+          <a:noFill/>
+          <a:ln w="6350">
+            <a:solidFill>
+              <a:srgbClr val="DDE0E6"/>
+            </a:solidFill>
+            <a:prstDash val="solid"/>
+          </a:ln>
+        </p:spPr>
+        <p:txBody>
+          <a:bodyPr/>
+          <a:lstStyle/>
+          <a:p>
+            <a:endParaRPr lang="ja-JP" altLang="en-US"/>
+          </a:p>
+        </p:txBody>
+      </p:sp>
+      <p:sp>
+        <p:nvSpPr>
+          <p:cNvPr id="20" name="Shape 18">
+            <a:extLst>
+              <a:ext uri="{FF2B5EF4-FFF2-40B4-BE49-F238E27FC236}">
+                <a16:creationId xmlns:a16="http://schemas.microsoft.com/office/drawing/2014/main" id="{EA92D2A0-5750-0AC7-2C7B-8542FAE533A7}"/>
+              </a:ext>
+            </a:extLst>
+          </p:cNvPr>
+          <p:cNvSpPr/>
+          <p:nvPr/>
+        </p:nvSpPr>
+        <p:spPr>
+          <a:xfrm>
+            <a:off x="3657600" y="0"/>
+            <a:ext cx="0" cy="5143500"/>
+          </a:xfrm>
+          <a:prstGeom prst="line">
+            <a:avLst/>
+          </a:prstGeom>
+          <a:noFill/>
+          <a:ln w="6350">
+            <a:solidFill>
+              <a:srgbClr val="DDE0E6"/>
+            </a:solidFill>
+            <a:prstDash val="solid"/>
+          </a:ln>
+        </p:spPr>
+        <p:txBody>
+          <a:bodyPr/>
+          <a:lstStyle/>
+          <a:p>
+            <a:endParaRPr lang="ja-JP" altLang="en-US"/>
+          </a:p>
+        </p:txBody>
+      </p:sp>
+      <p:sp>
+        <p:nvSpPr>
+          <p:cNvPr id="21" name="Shape 19">
+            <a:extLst>
+              <a:ext uri="{FF2B5EF4-FFF2-40B4-BE49-F238E27FC236}">
+                <a16:creationId xmlns:a16="http://schemas.microsoft.com/office/drawing/2014/main" id="{D85C34C4-253A-A593-A725-B4A847E9285C}"/>
+              </a:ext>
+            </a:extLst>
+          </p:cNvPr>
+          <p:cNvSpPr/>
+          <p:nvPr/>
+        </p:nvSpPr>
+        <p:spPr>
+          <a:xfrm>
+            <a:off x="4114800" y="0"/>
+            <a:ext cx="0" cy="5143500"/>
+          </a:xfrm>
+          <a:prstGeom prst="line">
+            <a:avLst/>
+          </a:prstGeom>
+          <a:noFill/>
+          <a:ln w="6350">
+            <a:solidFill>
+              <a:srgbClr val="DDE0E6"/>
+            </a:solidFill>
+            <a:prstDash val="solid"/>
+          </a:ln>
+        </p:spPr>
+        <p:txBody>
+          <a:bodyPr/>
+          <a:lstStyle/>
+          <a:p>
+            <a:endParaRPr lang="ja-JP" altLang="en-US"/>
+          </a:p>
+        </p:txBody>
+      </p:sp>
+      <p:sp>
+        <p:nvSpPr>
+          <p:cNvPr id="22" name="Shape 20">
+            <a:extLst>
+              <a:ext uri="{FF2B5EF4-FFF2-40B4-BE49-F238E27FC236}">
+                <a16:creationId xmlns:a16="http://schemas.microsoft.com/office/drawing/2014/main" id="{B9991E52-8123-7D3E-A2E7-44A5593FD04B}"/>
+              </a:ext>
+            </a:extLst>
+          </p:cNvPr>
+          <p:cNvSpPr/>
+          <p:nvPr/>
+        </p:nvSpPr>
+        <p:spPr>
+          <a:xfrm>
+            <a:off x="4572000" y="0"/>
+            <a:ext cx="0" cy="5143500"/>
+          </a:xfrm>
+          <a:prstGeom prst="line">
+            <a:avLst/>
+          </a:prstGeom>
+          <a:noFill/>
+          <a:ln w="6350">
+            <a:solidFill>
+              <a:srgbClr val="DDE0E6"/>
+            </a:solidFill>
+            <a:prstDash val="solid"/>
+          </a:ln>
+        </p:spPr>
+        <p:txBody>
+          <a:bodyPr/>
+          <a:lstStyle/>
+          <a:p>
+            <a:endParaRPr lang="ja-JP" altLang="en-US"/>
+          </a:p>
+        </p:txBody>
+      </p:sp>
+      <p:sp>
+        <p:nvSpPr>
+          <p:cNvPr id="23" name="Shape 21">
+            <a:extLst>
+              <a:ext uri="{FF2B5EF4-FFF2-40B4-BE49-F238E27FC236}">
+                <a16:creationId xmlns:a16="http://schemas.microsoft.com/office/drawing/2014/main" id="{F1622A4C-1B58-709F-F75F-BFF7341C6994}"/>
+              </a:ext>
+            </a:extLst>
+          </p:cNvPr>
+          <p:cNvSpPr/>
+          <p:nvPr/>
+        </p:nvSpPr>
+        <p:spPr>
+          <a:xfrm>
+            <a:off x="5029200" y="0"/>
+            <a:ext cx="0" cy="5143500"/>
+          </a:xfrm>
+          <a:prstGeom prst="line">
+            <a:avLst/>
+          </a:prstGeom>
+          <a:noFill/>
+          <a:ln w="6350">
+            <a:solidFill>
+              <a:srgbClr val="DDE0E6"/>
+            </a:solidFill>
+            <a:prstDash val="solid"/>
+          </a:ln>
+        </p:spPr>
+        <p:txBody>
+          <a:bodyPr/>
+          <a:lstStyle/>
+          <a:p>
+            <a:endParaRPr lang="ja-JP" altLang="en-US"/>
+          </a:p>
+        </p:txBody>
+      </p:sp>
+      <p:sp>
+        <p:nvSpPr>
+          <p:cNvPr id="24" name="Shape 22">
+            <a:extLst>
+              <a:ext uri="{FF2B5EF4-FFF2-40B4-BE49-F238E27FC236}">
+                <a16:creationId xmlns:a16="http://schemas.microsoft.com/office/drawing/2014/main" id="{E90F2963-9614-8D6B-64D1-41D4CAF8F9EB}"/>
+              </a:ext>
+            </a:extLst>
+          </p:cNvPr>
+          <p:cNvSpPr/>
+          <p:nvPr/>
+        </p:nvSpPr>
+        <p:spPr>
+          <a:xfrm>
+            <a:off x="5486400" y="0"/>
+            <a:ext cx="0" cy="5143500"/>
+          </a:xfrm>
+          <a:prstGeom prst="line">
+            <a:avLst/>
+          </a:prstGeom>
+          <a:noFill/>
+          <a:ln w="6350">
+            <a:solidFill>
+              <a:srgbClr val="DDE0E6"/>
+            </a:solidFill>
+            <a:prstDash val="solid"/>
+          </a:ln>
+        </p:spPr>
+        <p:txBody>
+          <a:bodyPr/>
+          <a:lstStyle/>
+          <a:p>
+            <a:endParaRPr lang="ja-JP" altLang="en-US"/>
+          </a:p>
+        </p:txBody>
+      </p:sp>
+      <p:sp>
+        <p:nvSpPr>
+          <p:cNvPr id="25" name="Shape 23">
+            <a:extLst>
+              <a:ext uri="{FF2B5EF4-FFF2-40B4-BE49-F238E27FC236}">
+                <a16:creationId xmlns:a16="http://schemas.microsoft.com/office/drawing/2014/main" id="{69D183A1-E76D-5B61-66D3-A02887A904D3}"/>
+              </a:ext>
+            </a:extLst>
+          </p:cNvPr>
+          <p:cNvSpPr/>
+          <p:nvPr/>
+        </p:nvSpPr>
+        <p:spPr>
+          <a:xfrm>
+            <a:off x="5943600" y="0"/>
+            <a:ext cx="0" cy="5143500"/>
+          </a:xfrm>
+          <a:prstGeom prst="line">
+            <a:avLst/>
+          </a:prstGeom>
+          <a:noFill/>
+          <a:ln w="6350">
+            <a:solidFill>
+              <a:srgbClr val="DDE0E6"/>
+            </a:solidFill>
+            <a:prstDash val="solid"/>
+          </a:ln>
+        </p:spPr>
+        <p:txBody>
+          <a:bodyPr/>
+          <a:lstStyle/>
+          <a:p>
+            <a:endParaRPr lang="ja-JP" altLang="en-US"/>
+          </a:p>
+        </p:txBody>
+      </p:sp>
+      <p:sp>
+        <p:nvSpPr>
+          <p:cNvPr id="26" name="Shape 24">
+            <a:extLst>
+              <a:ext uri="{FF2B5EF4-FFF2-40B4-BE49-F238E27FC236}">
+                <a16:creationId xmlns:a16="http://schemas.microsoft.com/office/drawing/2014/main" id="{02905343-4BB8-939F-B0EB-AAA6640175EE}"/>
+              </a:ext>
+            </a:extLst>
+          </p:cNvPr>
+          <p:cNvSpPr/>
+          <p:nvPr/>
+        </p:nvSpPr>
+        <p:spPr>
+          <a:xfrm>
+            <a:off x="6400800" y="0"/>
+            <a:ext cx="0" cy="5143500"/>
+          </a:xfrm>
+          <a:prstGeom prst="line">
+            <a:avLst/>
+          </a:prstGeom>
+          <a:noFill/>
+          <a:ln w="6350">
+            <a:solidFill>
+              <a:srgbClr val="DDE0E6"/>
+            </a:solidFill>
+            <a:prstDash val="solid"/>
+          </a:ln>
+        </p:spPr>
+        <p:txBody>
+          <a:bodyPr/>
+          <a:lstStyle/>
+          <a:p>
+            <a:endParaRPr lang="ja-JP" altLang="en-US"/>
+          </a:p>
+        </p:txBody>
+      </p:sp>
+      <p:sp>
+        <p:nvSpPr>
+          <p:cNvPr id="27" name="Shape 25">
+            <a:extLst>
+              <a:ext uri="{FF2B5EF4-FFF2-40B4-BE49-F238E27FC236}">
+                <a16:creationId xmlns:a16="http://schemas.microsoft.com/office/drawing/2014/main" id="{9B95786A-D211-1026-26BA-12D60A9ABC3B}"/>
+              </a:ext>
+            </a:extLst>
+          </p:cNvPr>
+          <p:cNvSpPr/>
+          <p:nvPr/>
+        </p:nvSpPr>
+        <p:spPr>
+          <a:xfrm>
+            <a:off x="6858000" y="0"/>
+            <a:ext cx="0" cy="5143500"/>
+          </a:xfrm>
+          <a:prstGeom prst="line">
+            <a:avLst/>
+          </a:prstGeom>
+          <a:noFill/>
+          <a:ln w="6350">
+            <a:solidFill>
+              <a:srgbClr val="DDE0E6"/>
+            </a:solidFill>
+            <a:prstDash val="solid"/>
+          </a:ln>
+        </p:spPr>
+        <p:txBody>
+          <a:bodyPr/>
+          <a:lstStyle/>
+          <a:p>
+            <a:endParaRPr lang="ja-JP" altLang="en-US"/>
+          </a:p>
+        </p:txBody>
+      </p:sp>
+      <p:sp>
+        <p:nvSpPr>
+          <p:cNvPr id="28" name="Shape 26">
+            <a:extLst>
+              <a:ext uri="{FF2B5EF4-FFF2-40B4-BE49-F238E27FC236}">
+                <a16:creationId xmlns:a16="http://schemas.microsoft.com/office/drawing/2014/main" id="{07037C83-286A-E77C-DAD9-E95FD17FC9FF}"/>
+              </a:ext>
+            </a:extLst>
+          </p:cNvPr>
+          <p:cNvSpPr/>
+          <p:nvPr/>
+        </p:nvSpPr>
+        <p:spPr>
+          <a:xfrm>
+            <a:off x="7315200" y="0"/>
+            <a:ext cx="0" cy="5143500"/>
+          </a:xfrm>
+          <a:prstGeom prst="line">
+            <a:avLst/>
+          </a:prstGeom>
+          <a:noFill/>
+          <a:ln w="6350">
+            <a:solidFill>
+              <a:srgbClr val="DDE0E6"/>
+            </a:solidFill>
+            <a:prstDash val="solid"/>
+          </a:ln>
+        </p:spPr>
+        <p:txBody>
+          <a:bodyPr/>
+          <a:lstStyle/>
+          <a:p>
+            <a:endParaRPr lang="ja-JP" altLang="en-US"/>
+          </a:p>
+        </p:txBody>
+      </p:sp>
+      <p:sp>
+        <p:nvSpPr>
+          <p:cNvPr id="29" name="Shape 27">
+            <a:extLst>
+              <a:ext uri="{FF2B5EF4-FFF2-40B4-BE49-F238E27FC236}">
+                <a16:creationId xmlns:a16="http://schemas.microsoft.com/office/drawing/2014/main" id="{E86A383D-0700-0EDC-C8CC-029A68A9EC8C}"/>
+              </a:ext>
+            </a:extLst>
+          </p:cNvPr>
+          <p:cNvSpPr/>
+          <p:nvPr/>
+        </p:nvSpPr>
+        <p:spPr>
+          <a:xfrm>
+            <a:off x="7772400" y="0"/>
+            <a:ext cx="0" cy="5143500"/>
+          </a:xfrm>
+          <a:prstGeom prst="line">
+            <a:avLst/>
+          </a:prstGeom>
+          <a:noFill/>
+          <a:ln w="6350">
+            <a:solidFill>
+              <a:srgbClr val="DDE0E6"/>
+            </a:solidFill>
+            <a:prstDash val="solid"/>
+          </a:ln>
+        </p:spPr>
+        <p:txBody>
+          <a:bodyPr/>
+          <a:lstStyle/>
+          <a:p>
+            <a:endParaRPr lang="ja-JP" altLang="en-US"/>
+          </a:p>
+        </p:txBody>
+      </p:sp>
+      <p:sp>
+        <p:nvSpPr>
+          <p:cNvPr id="30" name="Shape 28">
+            <a:extLst>
+              <a:ext uri="{FF2B5EF4-FFF2-40B4-BE49-F238E27FC236}">
+                <a16:creationId xmlns:a16="http://schemas.microsoft.com/office/drawing/2014/main" id="{728EC3B4-D5ED-4D39-68CA-2E1FEADD8DCE}"/>
+              </a:ext>
+            </a:extLst>
+          </p:cNvPr>
+          <p:cNvSpPr/>
+          <p:nvPr/>
+        </p:nvSpPr>
+        <p:spPr>
+          <a:xfrm>
+            <a:off x="8229600" y="0"/>
+            <a:ext cx="0" cy="5143500"/>
+          </a:xfrm>
+          <a:prstGeom prst="line">
+            <a:avLst/>
+          </a:prstGeom>
+          <a:noFill/>
+          <a:ln w="6350">
+            <a:solidFill>
+              <a:srgbClr val="DDE0E6"/>
+            </a:solidFill>
+            <a:prstDash val="solid"/>
+          </a:ln>
+        </p:spPr>
+        <p:txBody>
+          <a:bodyPr/>
+          <a:lstStyle/>
+          <a:p>
+            <a:endParaRPr lang="ja-JP" altLang="en-US"/>
+          </a:p>
+        </p:txBody>
+      </p:sp>
+      <p:sp>
+        <p:nvSpPr>
+          <p:cNvPr id="31" name="Shape 29">
+            <a:extLst>
+              <a:ext uri="{FF2B5EF4-FFF2-40B4-BE49-F238E27FC236}">
+                <a16:creationId xmlns:a16="http://schemas.microsoft.com/office/drawing/2014/main" id="{391D8ADA-97B5-A4DB-CC6A-836ECF32F374}"/>
+              </a:ext>
+            </a:extLst>
+          </p:cNvPr>
+          <p:cNvSpPr/>
+          <p:nvPr/>
+        </p:nvSpPr>
+        <p:spPr>
+          <a:xfrm>
+            <a:off x="8686800" y="0"/>
+            <a:ext cx="0" cy="5143500"/>
+          </a:xfrm>
+          <a:prstGeom prst="line">
+            <a:avLst/>
+          </a:prstGeom>
+          <a:noFill/>
+          <a:ln w="6350">
+            <a:solidFill>
+              <a:srgbClr val="DDE0E6"/>
+            </a:solidFill>
+            <a:prstDash val="solid"/>
+          </a:ln>
+        </p:spPr>
+        <p:txBody>
+          <a:bodyPr/>
+          <a:lstStyle/>
+          <a:p>
+            <a:endParaRPr lang="ja-JP" altLang="en-US"/>
+          </a:p>
+        </p:txBody>
+      </p:sp>
+      <p:sp>
+        <p:nvSpPr>
+          <p:cNvPr id="32" name="Shape 30">
+            <a:extLst>
+              <a:ext uri="{FF2B5EF4-FFF2-40B4-BE49-F238E27FC236}">
+                <a16:creationId xmlns:a16="http://schemas.microsoft.com/office/drawing/2014/main" id="{9D34E589-6ECE-4FAC-9DA5-C855AE5B290E}"/>
+              </a:ext>
+            </a:extLst>
+          </p:cNvPr>
+          <p:cNvSpPr/>
+          <p:nvPr/>
+        </p:nvSpPr>
+        <p:spPr>
+          <a:xfrm>
+            <a:off x="8750300" y="4914900"/>
+            <a:ext cx="365760" cy="228600"/>
+          </a:xfrm>
+          <a:prstGeom prst="rect">
+            <a:avLst/>
+          </a:prstGeom>
+          <a:solidFill>
+            <a:srgbClr val="00C2A8"/>
+          </a:solidFill>
+          <a:ln w="12700">
+            <a:solidFill>
+              <a:srgbClr val="00C2A8"/>
+            </a:solidFill>
+            <a:prstDash val="solid"/>
+          </a:ln>
+        </p:spPr>
+        <p:txBody>
+          <a:bodyPr/>
+          <a:lstStyle/>
+          <a:p>
+            <a:endParaRPr lang="ja-JP" altLang="en-US"/>
+          </a:p>
+        </p:txBody>
+      </p:sp>
+      <p:sp>
+        <p:nvSpPr>
+          <p:cNvPr id="33" name="Text 31">
+            <a:extLst>
+              <a:ext uri="{FF2B5EF4-FFF2-40B4-BE49-F238E27FC236}">
+                <a16:creationId xmlns:a16="http://schemas.microsoft.com/office/drawing/2014/main" id="{964F3096-9882-1BA0-1C12-BCCE79566414}"/>
+              </a:ext>
+            </a:extLst>
+          </p:cNvPr>
+          <p:cNvSpPr/>
+          <p:nvPr/>
+        </p:nvSpPr>
+        <p:spPr>
+          <a:xfrm>
+            <a:off x="8750300" y="4914900"/>
+            <a:ext cx="365760" cy="228600"/>
+          </a:xfrm>
+          <a:prstGeom prst="rect">
+            <a:avLst/>
+          </a:prstGeom>
+          <a:noFill/>
+          <a:ln/>
+        </p:spPr>
+        <p:txBody>
+          <a:bodyPr wrap="square" lIns="0" tIns="0" rIns="0" bIns="0" rtlCol="0" anchor="ctr"/>
+          <a:lstStyle/>
+          <a:p>
+            <a:pPr marL="0" indent="0" algn="ctr">
+              <a:buNone/>
+            </a:pPr>
+            <a:r>
+              <a:rPr lang="en-US" sz="900" b="1" dirty="0">
+                <a:solidFill>
+                  <a:srgbClr val="FFFFFF"/>
+                </a:solidFill>
+              </a:rPr>
+              <a:t>4</a:t>
+            </a:r>
+            <a:endParaRPr lang="en-US" sz="900" dirty="0"/>
+          </a:p>
+        </p:txBody>
+      </p:sp>
+      <p:sp>
+        <p:nvSpPr>
+          <p:cNvPr id="34" name="Text 32">
+            <a:extLst>
+              <a:ext uri="{FF2B5EF4-FFF2-40B4-BE49-F238E27FC236}">
+                <a16:creationId xmlns:a16="http://schemas.microsoft.com/office/drawing/2014/main" id="{C1A359DA-7C9D-6489-0E32-3DD0D5830094}"/>
+              </a:ext>
+            </a:extLst>
+          </p:cNvPr>
+          <p:cNvSpPr/>
+          <p:nvPr/>
+        </p:nvSpPr>
+        <p:spPr>
+          <a:xfrm>
+            <a:off x="457200" y="320040"/>
+            <a:ext cx="8229600" cy="201168"/>
+          </a:xfrm>
+          <a:prstGeom prst="rect">
+            <a:avLst/>
+          </a:prstGeom>
+          <a:noFill/>
+          <a:ln/>
+        </p:spPr>
+        <p:txBody>
+          <a:bodyPr wrap="square" lIns="0" tIns="0" rIns="0" bIns="0" rtlCol="0" anchor="ctr"/>
+          <a:lstStyle/>
+          <a:p>
+            <a:r>
+              <a:rPr lang="en-US" sz="800" b="1" kern="0" spc="300" dirty="0">
+                <a:solidFill>
+                  <a:srgbClr val="00C2A8"/>
+                </a:solidFill>
+              </a:rPr>
+              <a:t>GAME FEATURES</a:t>
+            </a:r>
+            <a:endParaRPr lang="en-US" sz="800" dirty="0"/>
+          </a:p>
+        </p:txBody>
+      </p:sp>
+      <p:sp>
+        <p:nvSpPr>
+          <p:cNvPr id="35" name="Text 33">
+            <a:extLst>
+              <a:ext uri="{FF2B5EF4-FFF2-40B4-BE49-F238E27FC236}">
+                <a16:creationId xmlns:a16="http://schemas.microsoft.com/office/drawing/2014/main" id="{C143E098-5D1F-7B64-6D65-4EA1DE072B52}"/>
+              </a:ext>
+            </a:extLst>
+          </p:cNvPr>
+          <p:cNvSpPr/>
+          <p:nvPr/>
+        </p:nvSpPr>
+        <p:spPr>
+          <a:xfrm>
+            <a:off x="457200" y="438912"/>
+            <a:ext cx="8229600" cy="685800"/>
+          </a:xfrm>
+          <a:prstGeom prst="rect">
+            <a:avLst/>
+          </a:prstGeom>
+          <a:noFill/>
+          <a:ln/>
+        </p:spPr>
+        <p:txBody>
+          <a:bodyPr wrap="square" lIns="0" tIns="0" rIns="0" bIns="0" rtlCol="0" anchor="ctr"/>
+          <a:lstStyle/>
+          <a:p>
+            <a:pPr marL="0" indent="0" algn="l">
+              <a:buNone/>
+            </a:pPr>
+            <a:r>
+              <a:rPr lang="ja-JP" altLang="en-US" sz="3200" b="1" dirty="0">
+                <a:latin typeface="Arial" panose="020B0604020202020204" pitchFamily="34" charset="0"/>
+                <a:cs typeface="Arial" panose="020B0604020202020204" pitchFamily="34" charset="0"/>
+              </a:rPr>
+              <a:t>最大の特徴</a:t>
+            </a:r>
+            <a:endParaRPr lang="en-US" sz="3200" b="1" dirty="0">
+              <a:latin typeface="Arial" panose="020B0604020202020204" pitchFamily="34" charset="0"/>
+              <a:cs typeface="Arial" panose="020B0604020202020204" pitchFamily="34" charset="0"/>
+            </a:endParaRPr>
+          </a:p>
+        </p:txBody>
+      </p:sp>
+      <p:sp>
+        <p:nvSpPr>
+          <p:cNvPr id="36" name="Shape 34">
+            <a:extLst>
+              <a:ext uri="{FF2B5EF4-FFF2-40B4-BE49-F238E27FC236}">
+                <a16:creationId xmlns:a16="http://schemas.microsoft.com/office/drawing/2014/main" id="{F86E7E4D-D06F-19EF-E43F-B36B9685877E}"/>
+              </a:ext>
+            </a:extLst>
+          </p:cNvPr>
+          <p:cNvSpPr/>
+          <p:nvPr/>
+        </p:nvSpPr>
+        <p:spPr>
+          <a:xfrm>
+            <a:off x="434528" y="1028699"/>
+            <a:ext cx="8229600" cy="0"/>
+          </a:xfrm>
+          <a:prstGeom prst="line">
+            <a:avLst/>
+          </a:prstGeom>
+          <a:noFill/>
+          <a:ln w="12700">
+            <a:solidFill>
+              <a:srgbClr val="DDE0E6"/>
+            </a:solidFill>
+            <a:prstDash val="solid"/>
+          </a:ln>
+        </p:spPr>
+        <p:txBody>
+          <a:bodyPr/>
+          <a:lstStyle/>
+          <a:p>
+            <a:endParaRPr lang="ja-JP" altLang="en-US"/>
+          </a:p>
+        </p:txBody>
+      </p:sp>
+      <p:sp>
+        <p:nvSpPr>
+          <p:cNvPr id="37" name="Shape 35">
+            <a:extLst>
+              <a:ext uri="{FF2B5EF4-FFF2-40B4-BE49-F238E27FC236}">
+                <a16:creationId xmlns:a16="http://schemas.microsoft.com/office/drawing/2014/main" id="{1A071541-43B8-D98F-997C-376A903D3E27}"/>
+              </a:ext>
+            </a:extLst>
+          </p:cNvPr>
+          <p:cNvSpPr/>
+          <p:nvPr/>
+        </p:nvSpPr>
+        <p:spPr>
+          <a:xfrm>
+            <a:off x="368298" y="1422400"/>
+            <a:ext cx="4082587" cy="571500"/>
+          </a:xfrm>
+          <a:prstGeom prst="roundRect">
+            <a:avLst>
+              <a:gd name="adj" fmla="val 7407"/>
+            </a:avLst>
+          </a:prstGeom>
+          <a:solidFill>
+            <a:srgbClr val="FFFFFF"/>
+          </a:solidFill>
+          <a:ln w="12700">
+            <a:solidFill>
+              <a:srgbClr val="DDE0E6"/>
+            </a:solidFill>
+            <a:prstDash val="solid"/>
+          </a:ln>
+          <a:effectLst>
+            <a:outerShdw blurRad="101600" dist="25400" dir="2700000" algn="bl" rotWithShape="0">
+              <a:srgbClr val="000000">
+                <a:alpha val="8000"/>
+              </a:srgbClr>
+            </a:outerShdw>
+          </a:effectLst>
+        </p:spPr>
+        <p:txBody>
+          <a:bodyPr/>
+          <a:lstStyle/>
+          <a:p>
+            <a:endParaRPr lang="ja-JP" altLang="en-US"/>
+          </a:p>
+        </p:txBody>
+      </p:sp>
+      <p:sp>
+        <p:nvSpPr>
+          <p:cNvPr id="46" name="Shape 44">
+            <a:extLst>
+              <a:ext uri="{FF2B5EF4-FFF2-40B4-BE49-F238E27FC236}">
+                <a16:creationId xmlns:a16="http://schemas.microsoft.com/office/drawing/2014/main" id="{F9554F3E-2287-D9EE-618C-B508B9F4C5DB}"/>
+              </a:ext>
+            </a:extLst>
+          </p:cNvPr>
+          <p:cNvSpPr/>
+          <p:nvPr/>
+        </p:nvSpPr>
+        <p:spPr>
+          <a:xfrm>
+            <a:off x="6720840" y="2880360"/>
+            <a:ext cx="0" cy="1737360"/>
+          </a:xfrm>
+          <a:prstGeom prst="line">
+            <a:avLst/>
+          </a:prstGeom>
+          <a:noFill/>
+          <a:ln w="8890">
+            <a:solidFill>
+              <a:srgbClr val="B0BAC9"/>
+            </a:solidFill>
+            <a:prstDash val="dash"/>
+          </a:ln>
+        </p:spPr>
+        <p:txBody>
+          <a:bodyPr/>
+          <a:lstStyle/>
+          <a:p>
+            <a:endParaRPr lang="ja-JP" altLang="en-US"/>
+          </a:p>
+        </p:txBody>
+      </p:sp>
+      <p:sp>
+        <p:nvSpPr>
+          <p:cNvPr id="47" name="Shape 45">
+            <a:extLst>
+              <a:ext uri="{FF2B5EF4-FFF2-40B4-BE49-F238E27FC236}">
+                <a16:creationId xmlns:a16="http://schemas.microsoft.com/office/drawing/2014/main" id="{CD5AC532-9043-E6E6-EDE2-9730635D77DB}"/>
+              </a:ext>
+            </a:extLst>
+          </p:cNvPr>
+          <p:cNvSpPr/>
+          <p:nvPr/>
+        </p:nvSpPr>
+        <p:spPr>
+          <a:xfrm>
+            <a:off x="4754880" y="3749040"/>
+            <a:ext cx="3931920" cy="0"/>
+          </a:xfrm>
+          <a:prstGeom prst="line">
+            <a:avLst/>
+          </a:prstGeom>
+          <a:noFill/>
+          <a:ln w="8890">
+            <a:solidFill>
+              <a:srgbClr val="B0BAC9"/>
+            </a:solidFill>
+            <a:prstDash val="dash"/>
+          </a:ln>
+        </p:spPr>
+        <p:txBody>
+          <a:bodyPr/>
+          <a:lstStyle/>
+          <a:p>
+            <a:endParaRPr lang="ja-JP" altLang="en-US"/>
+          </a:p>
+        </p:txBody>
+      </p:sp>
+      <p:grpSp>
+        <p:nvGrpSpPr>
+          <p:cNvPr id="50" name="グループ化 49">
+            <a:extLst>
+              <a:ext uri="{FF2B5EF4-FFF2-40B4-BE49-F238E27FC236}">
+                <a16:creationId xmlns:a16="http://schemas.microsoft.com/office/drawing/2014/main" id="{25B17614-9333-95EC-D3A7-8926439FABC7}"/>
+              </a:ext>
+            </a:extLst>
+          </p:cNvPr>
+          <p:cNvGrpSpPr/>
+          <p:nvPr/>
+        </p:nvGrpSpPr>
+        <p:grpSpPr>
+          <a:xfrm>
+            <a:off x="368302" y="2095500"/>
+            <a:ext cx="4066539" cy="2667000"/>
+            <a:chOff x="3746500" y="2794000"/>
+            <a:chExt cx="5029200" cy="1917700"/>
+          </a:xfrm>
+        </p:grpSpPr>
+        <p:sp>
+          <p:nvSpPr>
+            <p:cNvPr id="45" name="Shape 43">
+              <a:extLst>
+                <a:ext uri="{FF2B5EF4-FFF2-40B4-BE49-F238E27FC236}">
+                  <a16:creationId xmlns:a16="http://schemas.microsoft.com/office/drawing/2014/main" id="{6B766114-A599-2CC5-8349-C4C97FA9E1CA}"/>
+                </a:ext>
+              </a:extLst>
+            </p:cNvPr>
+            <p:cNvSpPr/>
+            <p:nvPr/>
+          </p:nvSpPr>
+          <p:spPr>
+            <a:xfrm>
+              <a:off x="3746500" y="2794000"/>
+              <a:ext cx="5029200" cy="1917700"/>
+            </a:xfrm>
+            <a:prstGeom prst="roundRect">
+              <a:avLst>
+                <a:gd name="adj" fmla="val 3810"/>
+              </a:avLst>
+            </a:prstGeom>
+            <a:solidFill>
+              <a:srgbClr val="E8EBF0"/>
+            </a:solidFill>
+            <a:ln w="19050">
+              <a:solidFill>
+                <a:srgbClr val="B0BAC9"/>
+              </a:solidFill>
+              <a:prstDash val="dash"/>
+            </a:ln>
+          </p:spPr>
+          <p:txBody>
+            <a:bodyPr/>
+            <a:lstStyle/>
+            <a:p>
+              <a:endParaRPr lang="ja-JP" altLang="en-US"/>
+            </a:p>
+          </p:txBody>
+        </p:sp>
+        <p:sp>
+          <p:nvSpPr>
+            <p:cNvPr id="48" name="Text 46">
+              <a:extLst>
+                <a:ext uri="{FF2B5EF4-FFF2-40B4-BE49-F238E27FC236}">
+                  <a16:creationId xmlns:a16="http://schemas.microsoft.com/office/drawing/2014/main" id="{A2DA7214-8F2D-84DB-8DDA-BAB74DC6181E}"/>
+                </a:ext>
+              </a:extLst>
+            </p:cNvPr>
+            <p:cNvSpPr/>
+            <p:nvPr/>
+          </p:nvSpPr>
+          <p:spPr>
+            <a:xfrm>
+              <a:off x="3746500" y="3429000"/>
+              <a:ext cx="5029200" cy="279400"/>
+            </a:xfrm>
+            <a:prstGeom prst="rect">
+              <a:avLst/>
+            </a:prstGeom>
+            <a:noFill/>
+            <a:ln/>
+          </p:spPr>
+          <p:txBody>
+            <a:bodyPr wrap="square" lIns="0" tIns="0" rIns="0" bIns="0" rtlCol="0" anchor="ctr"/>
+            <a:lstStyle/>
+            <a:p>
+              <a:pPr algn="ctr"/>
+              <a:r>
+                <a:rPr lang="en-US" altLang="ja-JP" sz="1000" b="1" kern="0" spc="200" dirty="0">
+                  <a:solidFill>
+                    <a:srgbClr val="B0BAC9"/>
+                  </a:solidFill>
+                </a:rPr>
+                <a:t>[ VIDEO ]</a:t>
+              </a:r>
+              <a:endParaRPr lang="en-US" altLang="ja-JP" sz="1000" dirty="0"/>
+            </a:p>
+          </p:txBody>
+        </p:sp>
+        <p:sp>
+          <p:nvSpPr>
+            <p:cNvPr id="49" name="Text 47">
+              <a:extLst>
+                <a:ext uri="{FF2B5EF4-FFF2-40B4-BE49-F238E27FC236}">
+                  <a16:creationId xmlns:a16="http://schemas.microsoft.com/office/drawing/2014/main" id="{13146C16-6691-3270-17B7-C32A3B46AAD9}"/>
+                </a:ext>
+              </a:extLst>
+            </p:cNvPr>
+            <p:cNvSpPr/>
+            <p:nvPr/>
+          </p:nvSpPr>
+          <p:spPr>
+            <a:xfrm>
+              <a:off x="3835400" y="3733800"/>
+              <a:ext cx="4851400" cy="812800"/>
+            </a:xfrm>
+            <a:prstGeom prst="rect">
+              <a:avLst/>
+            </a:prstGeom>
+            <a:noFill/>
+            <a:ln/>
+          </p:spPr>
+          <p:txBody>
+            <a:bodyPr wrap="square" lIns="0" tIns="0" rIns="0" bIns="0" rtlCol="0" anchor="t"/>
+            <a:lstStyle/>
+            <a:p>
+              <a:pPr marL="0" indent="0" algn="ctr">
+                <a:lnSpc>
+                  <a:spcPct val="135000"/>
+                </a:lnSpc>
+                <a:buNone/>
+              </a:pPr>
+              <a:r>
+                <a:rPr lang="ja-JP" altLang="en-US" sz="950" dirty="0">
+                  <a:solidFill>
+                    <a:srgbClr val="8A909E"/>
+                  </a:solidFill>
+                </a:rPr>
+                <a:t>反射を利用したパズル・戦闘</a:t>
+              </a:r>
+              <a:endParaRPr lang="en-US" sz="950" dirty="0">
+                <a:solidFill>
+                  <a:srgbClr val="8A909E"/>
+                </a:solidFill>
+              </a:endParaRPr>
+            </a:p>
+          </p:txBody>
+        </p:sp>
+      </p:grpSp>
+      <p:sp>
+        <p:nvSpPr>
+          <p:cNvPr id="51" name="Shape 35">
+            <a:extLst>
+              <a:ext uri="{FF2B5EF4-FFF2-40B4-BE49-F238E27FC236}">
+                <a16:creationId xmlns:a16="http://schemas.microsoft.com/office/drawing/2014/main" id="{28C85677-B454-15BA-1B52-C570D45F26DA}"/>
+              </a:ext>
+            </a:extLst>
+          </p:cNvPr>
+          <p:cNvSpPr/>
+          <p:nvPr/>
+        </p:nvSpPr>
+        <p:spPr>
+          <a:xfrm>
+            <a:off x="4693114" y="1422400"/>
+            <a:ext cx="4082586" cy="571500"/>
+          </a:xfrm>
+          <a:prstGeom prst="roundRect">
+            <a:avLst>
+              <a:gd name="adj" fmla="val 7407"/>
+            </a:avLst>
+          </a:prstGeom>
+          <a:solidFill>
+            <a:srgbClr val="FFFFFF"/>
+          </a:solidFill>
+          <a:ln w="12700">
+            <a:solidFill>
+              <a:srgbClr val="DDE0E6"/>
+            </a:solidFill>
+            <a:prstDash val="solid"/>
+          </a:ln>
+          <a:effectLst>
+            <a:outerShdw blurRad="101600" dist="25400" dir="2700000" algn="bl" rotWithShape="0">
+              <a:srgbClr val="000000">
+                <a:alpha val="8000"/>
+              </a:srgbClr>
+            </a:outerShdw>
+          </a:effectLst>
+        </p:spPr>
+        <p:txBody>
+          <a:bodyPr/>
+          <a:lstStyle/>
+          <a:p>
+            <a:endParaRPr lang="ja-JP" altLang="en-US"/>
+          </a:p>
+        </p:txBody>
+      </p:sp>
+      <p:grpSp>
+        <p:nvGrpSpPr>
+          <p:cNvPr id="52" name="グループ化 51">
+            <a:extLst>
+              <a:ext uri="{FF2B5EF4-FFF2-40B4-BE49-F238E27FC236}">
+                <a16:creationId xmlns:a16="http://schemas.microsoft.com/office/drawing/2014/main" id="{90056953-662A-C796-9512-73466FF91A3A}"/>
+              </a:ext>
+            </a:extLst>
+          </p:cNvPr>
+          <p:cNvGrpSpPr/>
+          <p:nvPr/>
+        </p:nvGrpSpPr>
+        <p:grpSpPr>
+          <a:xfrm>
+            <a:off x="4693114" y="2095500"/>
+            <a:ext cx="4082585" cy="2667000"/>
+            <a:chOff x="3746500" y="2794000"/>
+            <a:chExt cx="5029200" cy="1917700"/>
+          </a:xfrm>
+        </p:grpSpPr>
+        <p:sp>
+          <p:nvSpPr>
+            <p:cNvPr id="53" name="Shape 43">
+              <a:extLst>
+                <a:ext uri="{FF2B5EF4-FFF2-40B4-BE49-F238E27FC236}">
+                  <a16:creationId xmlns:a16="http://schemas.microsoft.com/office/drawing/2014/main" id="{5D7FEDC7-A2DA-0DBF-AF56-BEFC50397004}"/>
+                </a:ext>
+              </a:extLst>
+            </p:cNvPr>
+            <p:cNvSpPr/>
+            <p:nvPr/>
+          </p:nvSpPr>
+          <p:spPr>
+            <a:xfrm>
+              <a:off x="3746500" y="2794000"/>
+              <a:ext cx="5029200" cy="1917700"/>
+            </a:xfrm>
+            <a:prstGeom prst="roundRect">
+              <a:avLst>
+                <a:gd name="adj" fmla="val 3810"/>
+              </a:avLst>
+            </a:prstGeom>
+            <a:solidFill>
+              <a:srgbClr val="E8EBF0"/>
+            </a:solidFill>
+            <a:ln w="19050">
+              <a:solidFill>
+                <a:srgbClr val="B0BAC9"/>
+              </a:solidFill>
+              <a:prstDash val="dash"/>
+            </a:ln>
+          </p:spPr>
+          <p:txBody>
+            <a:bodyPr/>
+            <a:lstStyle/>
+            <a:p>
+              <a:endParaRPr lang="ja-JP" altLang="en-US"/>
+            </a:p>
+          </p:txBody>
+        </p:sp>
+        <p:sp>
+          <p:nvSpPr>
+            <p:cNvPr id="54" name="Text 46">
+              <a:extLst>
+                <a:ext uri="{FF2B5EF4-FFF2-40B4-BE49-F238E27FC236}">
+                  <a16:creationId xmlns:a16="http://schemas.microsoft.com/office/drawing/2014/main" id="{94FFF368-3AC7-8C45-BA5C-D41415AFF957}"/>
+                </a:ext>
+              </a:extLst>
+            </p:cNvPr>
+            <p:cNvSpPr/>
+            <p:nvPr/>
+          </p:nvSpPr>
+          <p:spPr>
+            <a:xfrm>
+              <a:off x="3746500" y="3429000"/>
+              <a:ext cx="5029200" cy="279400"/>
+            </a:xfrm>
+            <a:prstGeom prst="rect">
+              <a:avLst/>
+            </a:prstGeom>
+            <a:noFill/>
+            <a:ln/>
+          </p:spPr>
+          <p:txBody>
+            <a:bodyPr wrap="square" lIns="0" tIns="0" rIns="0" bIns="0" rtlCol="0" anchor="ctr"/>
+            <a:lstStyle/>
+            <a:p>
+              <a:pPr algn="ctr"/>
+              <a:r>
+                <a:rPr lang="en-US" altLang="ja-JP" sz="1000" b="1" kern="0" spc="200" dirty="0">
+                  <a:solidFill>
+                    <a:srgbClr val="B0BAC9"/>
+                  </a:solidFill>
+                </a:rPr>
+                <a:t>[ VIDEO ]</a:t>
+              </a:r>
+              <a:endParaRPr lang="en-US" altLang="ja-JP" sz="1000" dirty="0"/>
+            </a:p>
+          </p:txBody>
+        </p:sp>
+        <p:sp>
+          <p:nvSpPr>
+            <p:cNvPr id="55" name="Text 47">
+              <a:extLst>
+                <a:ext uri="{FF2B5EF4-FFF2-40B4-BE49-F238E27FC236}">
+                  <a16:creationId xmlns:a16="http://schemas.microsoft.com/office/drawing/2014/main" id="{DD0EDFC5-19DC-1BEE-FDF9-7BD4EA329A9B}"/>
+                </a:ext>
+              </a:extLst>
+            </p:cNvPr>
+            <p:cNvSpPr/>
+            <p:nvPr/>
+          </p:nvSpPr>
+          <p:spPr>
+            <a:xfrm>
+              <a:off x="3835400" y="3733800"/>
+              <a:ext cx="4851400" cy="812800"/>
+            </a:xfrm>
+            <a:prstGeom prst="rect">
+              <a:avLst/>
+            </a:prstGeom>
+            <a:noFill/>
+            <a:ln/>
+          </p:spPr>
+          <p:txBody>
+            <a:bodyPr wrap="square" lIns="0" tIns="0" rIns="0" bIns="0" rtlCol="0" anchor="t"/>
+            <a:lstStyle/>
+            <a:p>
+              <a:pPr marL="0" indent="0" algn="ctr">
+                <a:lnSpc>
+                  <a:spcPct val="135000"/>
+                </a:lnSpc>
+                <a:buNone/>
+              </a:pPr>
+              <a:r>
+                <a:rPr lang="ja-JP" altLang="en-US" sz="950" dirty="0">
+                  <a:solidFill>
+                    <a:srgbClr val="8A909E"/>
+                  </a:solidFill>
+                </a:rPr>
+                <a:t>戦車の操作感をキー説明付きで</a:t>
+              </a:r>
+              <a:r>
+                <a:rPr lang="en-US" altLang="ja-JP" sz="950" dirty="0">
+                  <a:solidFill>
+                    <a:srgbClr val="8A909E"/>
+                  </a:solidFill>
+                </a:rPr>
+                <a:t>(</a:t>
+              </a:r>
+              <a:r>
+                <a:rPr lang="ja-JP" altLang="en-US" sz="950" dirty="0">
+                  <a:solidFill>
+                    <a:srgbClr val="8A909E"/>
+                  </a:solidFill>
+                </a:rPr>
+                <a:t>どのキーを押しているか</a:t>
+              </a:r>
+              <a:r>
+                <a:rPr lang="en-US" altLang="ja-JP" sz="950" dirty="0">
+                  <a:solidFill>
+                    <a:srgbClr val="8A909E"/>
+                  </a:solidFill>
+                </a:rPr>
+                <a:t>)</a:t>
+              </a:r>
+            </a:p>
+          </p:txBody>
+        </p:sp>
+      </p:grpSp>
+      <p:sp>
+        <p:nvSpPr>
+          <p:cNvPr id="57" name="Text 36">
+            <a:extLst>
+              <a:ext uri="{FF2B5EF4-FFF2-40B4-BE49-F238E27FC236}">
+                <a16:creationId xmlns:a16="http://schemas.microsoft.com/office/drawing/2014/main" id="{629829E6-3658-C007-6E7C-35CF6AC475AA}"/>
+              </a:ext>
+            </a:extLst>
+          </p:cNvPr>
+          <p:cNvSpPr/>
+          <p:nvPr/>
+        </p:nvSpPr>
+        <p:spPr>
+          <a:xfrm>
+            <a:off x="546100" y="1549400"/>
+            <a:ext cx="2832100" cy="317500"/>
+          </a:xfrm>
+          <a:prstGeom prst="rect">
+            <a:avLst/>
+          </a:prstGeom>
+          <a:noFill/>
+          <a:ln/>
+        </p:spPr>
+        <p:txBody>
+          <a:bodyPr wrap="square" lIns="0" tIns="0" rIns="0" bIns="0" rtlCol="0" anchor="ctr"/>
+          <a:lstStyle/>
+          <a:p>
+            <a:pPr marL="0" indent="0" algn="l">
+              <a:buNone/>
+            </a:pPr>
+            <a:r>
+              <a:rPr lang="ja-JP" altLang="en-US" sz="1400" b="1" dirty="0">
+                <a:solidFill>
+                  <a:srgbClr val="1A1D23"/>
+                </a:solidFill>
+              </a:rPr>
+              <a:t>反射</a:t>
+            </a:r>
+            <a:endParaRPr lang="en-US" sz="1400" dirty="0"/>
+          </a:p>
+        </p:txBody>
+      </p:sp>
+      <p:sp>
+        <p:nvSpPr>
+          <p:cNvPr id="59" name="Text 36">
+            <a:extLst>
+              <a:ext uri="{FF2B5EF4-FFF2-40B4-BE49-F238E27FC236}">
+                <a16:creationId xmlns:a16="http://schemas.microsoft.com/office/drawing/2014/main" id="{8E59DD65-D621-AFA9-CD25-655B392CF11F}"/>
+              </a:ext>
+            </a:extLst>
+          </p:cNvPr>
+          <p:cNvSpPr/>
+          <p:nvPr/>
+        </p:nvSpPr>
+        <p:spPr>
+          <a:xfrm>
+            <a:off x="4819183" y="1549400"/>
+            <a:ext cx="2832100" cy="317500"/>
+          </a:xfrm>
+          <a:prstGeom prst="rect">
+            <a:avLst/>
+          </a:prstGeom>
+          <a:noFill/>
+          <a:ln/>
+        </p:spPr>
+        <p:txBody>
+          <a:bodyPr wrap="square" lIns="0" tIns="0" rIns="0" bIns="0" rtlCol="0" anchor="ctr"/>
+          <a:lstStyle/>
+          <a:p>
+            <a:pPr marL="0" indent="0" algn="l">
+              <a:buNone/>
+            </a:pPr>
+            <a:r>
+              <a:rPr lang="ja-JP" altLang="en-US" sz="1400" b="1" dirty="0">
+                <a:solidFill>
+                  <a:srgbClr val="1A1D23"/>
+                </a:solidFill>
+              </a:rPr>
+              <a:t>戦車</a:t>
+            </a:r>
+            <a:endParaRPr lang="en-US" sz="1400" dirty="0"/>
+          </a:p>
+        </p:txBody>
+      </p:sp>
+    </p:spTree>
+    <p:extLst>
+      <p:ext uri="{BB962C8B-B14F-4D97-AF65-F5344CB8AC3E}">
+        <p14:creationId xmlns:p14="http://schemas.microsoft.com/office/powerpoint/2010/main" val="2139781052"/>
+      </p:ext>
+    </p:extLst>
+  </p:cSld>
+  <p:clrMapOvr>
+    <a:masterClrMapping/>
+  </p:clrMapOvr>
+</p:sld>
+</file>
+
+<file path=ppt/slides/slide4.xml><?xml version="1.0" encoding="utf-8"?>
 <p:sld xmlns:a="http://schemas.openxmlformats.org/drawingml/2006/main" xmlns:r="http://schemas.openxmlformats.org/officeDocument/2006/relationships" xmlns:p="http://schemas.openxmlformats.org/presentationml/2006/main">
   <p:cSld name="Slide 3">
     <p:bg>
@@ -5268,7 +6954,7 @@
         <p:spPr>
           <a:xfrm>
             <a:off x="368300" y="1422400"/>
-            <a:ext cx="3200400" cy="1511300"/>
+            <a:ext cx="3200400" cy="571500"/>
           </a:xfrm>
           <a:prstGeom prst="roundRect">
             <a:avLst>
@@ -5308,7 +6994,7 @@
         </p:nvSpPr>
         <p:spPr>
           <a:xfrm>
-            <a:off x="546100" y="1536700"/>
+            <a:off x="546100" y="1549400"/>
             <a:ext cx="2832100" cy="317500"/>
           </a:xfrm>
           <a:prstGeom prst="rect">
@@ -5318,7 +7004,7 @@
           <a:ln/>
         </p:spPr>
         <p:txBody>
-          <a:bodyPr wrap="square" lIns="0" tIns="0" rIns="0" bIns="0" rtlCol="0" anchor="ctr"/>
+          <a:bodyPr wrap="square" lIns="0" tIns="0" rIns="0" bIns="0" rtlCol="0" anchor="ctr" anchorCtr="0"/>
           <a:lstStyle/>
           <a:p>
             <a:pPr marL="0" indent="0" algn="l">
@@ -5338,86 +7024,14 @@
       </p:sp>
       <p:sp>
         <p:nvSpPr>
-          <p:cNvPr id="39" name="Shape 37"/>
-          <p:cNvSpPr/>
-          <p:nvPr/>
-        </p:nvSpPr>
-        <p:spPr>
-          <a:xfrm>
-            <a:off x="546100" y="1917700"/>
-            <a:ext cx="2832100" cy="863600"/>
-          </a:xfrm>
-          <a:prstGeom prst="roundRect">
-            <a:avLst>
-              <a:gd name="adj" fmla="val 7368"/>
-            </a:avLst>
-          </a:prstGeom>
-          <a:solidFill>
-            <a:srgbClr val="FFF8E1"/>
-          </a:solidFill>
-          <a:ln w="12700">
-            <a:solidFill>
-              <a:srgbClr val="F0C040"/>
-            </a:solidFill>
-            <a:prstDash val="solid"/>
-          </a:ln>
-        </p:spPr>
-        <p:txBody>
-          <a:bodyPr/>
-          <a:lstStyle/>
-          <a:p>
-            <a:endParaRPr lang="ja-JP" altLang="en-US"/>
-          </a:p>
-        </p:txBody>
-      </p:sp>
-      <p:sp>
-        <p:nvSpPr>
-          <p:cNvPr id="40" name="Text 38"/>
-          <p:cNvSpPr/>
-          <p:nvPr/>
-        </p:nvSpPr>
-        <p:spPr>
-          <a:xfrm>
-            <a:off x="660400" y="1993900"/>
-            <a:ext cx="2616200" cy="723900"/>
-          </a:xfrm>
-          <a:prstGeom prst="rect">
-            <a:avLst/>
-          </a:prstGeom>
-          <a:noFill/>
-          <a:ln/>
-        </p:spPr>
-        <p:txBody>
-          <a:bodyPr wrap="square" lIns="0" tIns="0" rIns="0" bIns="0" rtlCol="0" anchor="t"/>
-          <a:lstStyle/>
-          <a:p>
-            <a:pPr marL="0" indent="0" algn="l">
-              <a:lnSpc>
-                <a:spcPct val="140000"/>
-              </a:lnSpc>
-              <a:buNone/>
-            </a:pPr>
-            <a:r>
-              <a:rPr lang="en-US" sz="1050" i="1" dirty="0">
-                <a:solidFill>
-                  <a:srgbClr val="5A4800"/>
-                </a:solidFill>
-              </a:rPr>
-              <a:t>車体・砲台の独立操作 / 慣性の特徴</a:t>
-            </a:r>
-          </a:p>
-        </p:txBody>
-      </p:sp>
-      <p:sp>
-        <p:nvSpPr>
           <p:cNvPr id="41" name="Shape 39"/>
           <p:cNvSpPr/>
           <p:nvPr/>
         </p:nvSpPr>
         <p:spPr>
           <a:xfrm>
-            <a:off x="368300" y="3060700"/>
-            <a:ext cx="3200400" cy="1651000"/>
+            <a:off x="368300" y="2095500"/>
+            <a:ext cx="3200400" cy="571500"/>
           </a:xfrm>
           <a:prstGeom prst="roundRect">
             <a:avLst>
@@ -5457,7 +7071,7 @@
         </p:nvSpPr>
         <p:spPr>
           <a:xfrm>
-            <a:off x="546100" y="3187700"/>
+            <a:off x="546100" y="2222500"/>
             <a:ext cx="2832100" cy="317500"/>
           </a:xfrm>
           <a:prstGeom prst="rect">
@@ -5467,7 +7081,7 @@
           <a:ln/>
         </p:spPr>
         <p:txBody>
-          <a:bodyPr wrap="square" lIns="0" tIns="0" rIns="0" bIns="0" rtlCol="0" anchor="ctr"/>
+          <a:bodyPr wrap="square" lIns="0" tIns="0" rIns="0" bIns="0" rtlCol="0" anchor="ctr" anchorCtr="0"/>
           <a:lstStyle/>
           <a:p>
             <a:pPr marL="0" indent="0" algn="l">
@@ -5487,78 +7101,6 @@
       </p:sp>
       <p:sp>
         <p:nvSpPr>
-          <p:cNvPr id="43" name="Shape 41"/>
-          <p:cNvSpPr/>
-          <p:nvPr/>
-        </p:nvSpPr>
-        <p:spPr>
-          <a:xfrm>
-            <a:off x="546100" y="3568700"/>
-            <a:ext cx="2832100" cy="1003300"/>
-          </a:xfrm>
-          <a:prstGeom prst="roundRect">
-            <a:avLst>
-              <a:gd name="adj" fmla="val 6364"/>
-            </a:avLst>
-          </a:prstGeom>
-          <a:solidFill>
-            <a:srgbClr val="FFF8E1"/>
-          </a:solidFill>
-          <a:ln w="12700">
-            <a:solidFill>
-              <a:srgbClr val="F0C040"/>
-            </a:solidFill>
-            <a:prstDash val="solid"/>
-          </a:ln>
-        </p:spPr>
-        <p:txBody>
-          <a:bodyPr/>
-          <a:lstStyle/>
-          <a:p>
-            <a:endParaRPr lang="ja-JP" altLang="en-US"/>
-          </a:p>
-        </p:txBody>
-      </p:sp>
-      <p:sp>
-        <p:nvSpPr>
-          <p:cNvPr id="44" name="Text 42"/>
-          <p:cNvSpPr/>
-          <p:nvPr/>
-        </p:nvSpPr>
-        <p:spPr>
-          <a:xfrm>
-            <a:off x="660400" y="3644900"/>
-            <a:ext cx="2616200" cy="863600"/>
-          </a:xfrm>
-          <a:prstGeom prst="rect">
-            <a:avLst/>
-          </a:prstGeom>
-          <a:noFill/>
-          <a:ln/>
-        </p:spPr>
-        <p:txBody>
-          <a:bodyPr wrap="square" lIns="0" tIns="0" rIns="0" bIns="0" rtlCol="0" anchor="t"/>
-          <a:lstStyle/>
-          <a:p>
-            <a:pPr marL="0" indent="0" algn="l">
-              <a:lnSpc>
-                <a:spcPct val="140000"/>
-              </a:lnSpc>
-              <a:buNone/>
-            </a:pPr>
-            <a:r>
-              <a:rPr lang="en-US" sz="1050" i="1" dirty="0">
-                <a:solidFill>
-                  <a:srgbClr val="5A4800"/>
-                </a:solidFill>
-              </a:rPr>
-              <a:t>属性弾・爆発・被弾のビジュアル演出</a:t>
-            </a:r>
-          </a:p>
-        </p:txBody>
-      </p:sp>
-      <p:sp>
-        <p:nvSpPr>
           <p:cNvPr id="45" name="Shape 43"/>
           <p:cNvSpPr/>
           <p:nvPr/>
@@ -5566,7 +7108,7 @@
         <p:spPr>
           <a:xfrm>
             <a:off x="3746500" y="1422400"/>
-            <a:ext cx="5029200" cy="1511300"/>
+            <a:ext cx="5029200" cy="571500"/>
           </a:xfrm>
           <a:prstGeom prst="roundRect">
             <a:avLst>
@@ -5599,8 +7141,8 @@
         </p:nvSpPr>
         <p:spPr>
           <a:xfrm>
-            <a:off x="6720840" y="1508760"/>
-            <a:ext cx="0" cy="1325880"/>
+            <a:off x="6720840" y="1485900"/>
+            <a:ext cx="0" cy="444500"/>
           </a:xfrm>
           <a:prstGeom prst="line">
             <a:avLst/>
@@ -5629,7 +7171,7 @@
         </p:nvSpPr>
         <p:spPr>
           <a:xfrm>
-            <a:off x="4754880" y="2171700"/>
+            <a:off x="4754880" y="1708150"/>
             <a:ext cx="3931920" cy="0"/>
           </a:xfrm>
           <a:prstGeom prst="line">
@@ -5659,7 +7201,7 @@
         </p:nvSpPr>
         <p:spPr>
           <a:xfrm>
-            <a:off x="3746500" y="1854200"/>
+            <a:off x="3746500" y="1485900"/>
             <a:ext cx="5029200" cy="279400"/>
           </a:xfrm>
           <a:prstGeom prst="rect">
@@ -5672,16 +7214,14 @@
           <a:bodyPr wrap="square" lIns="0" tIns="0" rIns="0" bIns="0" rtlCol="0" anchor="ctr"/>
           <a:lstStyle/>
           <a:p>
-            <a:pPr marL="0" indent="0" algn="ctr">
-              <a:buNone/>
-            </a:pPr>
+            <a:pPr algn="ctr"/>
             <a:r>
               <a:rPr lang="en-US" sz="1000" b="1" kern="0" spc="200" dirty="0">
                 <a:solidFill>
                   <a:srgbClr val="B0BAC9"/>
                 </a:solidFill>
               </a:rPr>
-              <a:t>[ IMAGE ]</a:t>
+              <a:t>[ VIDEO ]</a:t>
             </a:r>
             <a:endParaRPr lang="en-US" sz="1000" dirty="0"/>
           </a:p>
@@ -5695,8 +7235,8 @@
         </p:nvSpPr>
         <p:spPr>
           <a:xfrm>
-            <a:off x="3835400" y="2159000"/>
-            <a:ext cx="4851400" cy="635000"/>
+            <a:off x="3835400" y="1727200"/>
+            <a:ext cx="4851400" cy="203200"/>
           </a:xfrm>
           <a:prstGeom prst="rect">
             <a:avLst/>
@@ -5715,13 +7255,26 @@
               <a:buNone/>
             </a:pPr>
             <a:r>
-              <a:rPr lang="en-US" sz="950" dirty="0">
+              <a:rPr lang="en-US" sz="950" dirty="0" err="1">
                 <a:solidFill>
                   <a:srgbClr val="8A909E"/>
                 </a:solidFill>
               </a:rPr>
-              <a:t>操作シーンのスクリーンショット</a:t>
+              <a:t>操作シーンの</a:t>
             </a:r>
+            <a:r>
+              <a:rPr lang="ja-JP" altLang="en-US" sz="950" dirty="0">
+                <a:solidFill>
+                  <a:srgbClr val="8A909E"/>
+                </a:solidFill>
+              </a:rPr>
+              <a:t>短い映像</a:t>
+            </a:r>
+            <a:endParaRPr lang="en-US" sz="950" dirty="0">
+              <a:solidFill>
+                <a:srgbClr val="8A909E"/>
+              </a:solidFill>
+            </a:endParaRPr>
           </a:p>
         </p:txBody>
       </p:sp>
@@ -5733,8 +7286,8 @@
         </p:nvSpPr>
         <p:spPr>
           <a:xfrm>
-            <a:off x="3746500" y="3060700"/>
-            <a:ext cx="5029200" cy="1651000"/>
+            <a:off x="3746500" y="2095500"/>
+            <a:ext cx="5029200" cy="571500"/>
           </a:xfrm>
           <a:prstGeom prst="roundRect">
             <a:avLst>
@@ -5767,8 +7320,8 @@
         </p:nvSpPr>
         <p:spPr>
           <a:xfrm>
-            <a:off x="6720840" y="3154680"/>
-            <a:ext cx="0" cy="1463040"/>
+            <a:off x="6720840" y="2159000"/>
+            <a:ext cx="0" cy="444500"/>
           </a:xfrm>
           <a:prstGeom prst="line">
             <a:avLst/>
@@ -5797,7 +7350,7 @@
         </p:nvSpPr>
         <p:spPr>
           <a:xfrm>
-            <a:off x="4754880" y="3886200"/>
+            <a:off x="4754880" y="2381250"/>
             <a:ext cx="3931920" cy="0"/>
           </a:xfrm>
           <a:prstGeom prst="line">
@@ -5827,7 +7380,7 @@
         </p:nvSpPr>
         <p:spPr>
           <a:xfrm>
-            <a:off x="3746500" y="3568700"/>
+            <a:off x="3746500" y="2159000"/>
             <a:ext cx="5029200" cy="279400"/>
           </a:xfrm>
           <a:prstGeom prst="rect">
@@ -5840,16 +7393,14 @@
           <a:bodyPr wrap="square" lIns="0" tIns="0" rIns="0" bIns="0" rtlCol="0" anchor="ctr"/>
           <a:lstStyle/>
           <a:p>
-            <a:pPr marL="0" indent="0" algn="ctr">
-              <a:buNone/>
-            </a:pPr>
+            <a:pPr algn="ctr"/>
             <a:r>
               <a:rPr lang="en-US" sz="1000" b="1" kern="0" spc="200" dirty="0">
                 <a:solidFill>
                   <a:srgbClr val="B0BAC9"/>
                 </a:solidFill>
               </a:rPr>
-              <a:t>[ IMAGE ]</a:t>
+              <a:t>[ VIDEO ]</a:t>
             </a:r>
             <a:endParaRPr lang="en-US" sz="1000" dirty="0"/>
           </a:p>
@@ -5863,8 +7414,8 @@
         </p:nvSpPr>
         <p:spPr>
           <a:xfrm>
-            <a:off x="3835400" y="3873500"/>
-            <a:ext cx="4851400" cy="685800"/>
+            <a:off x="3835400" y="2400300"/>
+            <a:ext cx="4851400" cy="203200"/>
           </a:xfrm>
           <a:prstGeom prst="rect">
             <a:avLst/>
@@ -5883,13 +7434,26 @@
               <a:buNone/>
             </a:pPr>
             <a:r>
-              <a:rPr lang="en-US" sz="950" dirty="0">
+              <a:rPr lang="en-US" sz="950" dirty="0" err="1">
                 <a:solidFill>
                   <a:srgbClr val="8A909E"/>
                 </a:solidFill>
               </a:rPr>
-              <a:t>エフェクト演出のスクリーンショット</a:t>
+              <a:t>エフェクト演出の</a:t>
             </a:r>
+            <a:r>
+              <a:rPr lang="ja-JP" altLang="en-US" sz="950" dirty="0">
+                <a:solidFill>
+                  <a:srgbClr val="8A909E"/>
+                </a:solidFill>
+              </a:rPr>
+              <a:t>短い映像</a:t>
+            </a:r>
+            <a:endParaRPr lang="en-US" sz="950" dirty="0">
+              <a:solidFill>
+                <a:srgbClr val="8A909E"/>
+              </a:solidFill>
+            </a:endParaRPr>
           </a:p>
         </p:txBody>
       </p:sp>
@@ -5906,7 +7470,7 @@
 </p:sld>
 </file>
 
-<file path=ppt/slides/slide4.xml><?xml version="1.0" encoding="utf-8"?>
+<file path=ppt/slides/slide5.xml><?xml version="1.0" encoding="utf-8"?>
 <p:sld xmlns:a="http://schemas.openxmlformats.org/drawingml/2006/main" xmlns:r="http://schemas.openxmlformats.org/officeDocument/2006/relationships" xmlns:p="http://schemas.openxmlformats.org/presentationml/2006/main">
   <p:cSld name="Slide 4">
     <p:bg>
@@ -7012,8 +8576,8 @@
         </p:nvSpPr>
         <p:spPr>
           <a:xfrm>
-            <a:off x="368300" y="1375410"/>
-            <a:ext cx="8412480" cy="1234440"/>
+            <a:off x="368300" y="1422400"/>
+            <a:ext cx="4203700" cy="571500"/>
           </a:xfrm>
           <a:prstGeom prst="roundRect">
             <a:avLst>
@@ -7053,8 +8617,8 @@
         </p:nvSpPr>
         <p:spPr>
           <a:xfrm>
-            <a:off x="548640" y="1536192"/>
-            <a:ext cx="8046720" cy="320040"/>
+            <a:off x="548640" y="1549400"/>
+            <a:ext cx="3803907" cy="317500"/>
           </a:xfrm>
           <a:prstGeom prst="rect">
             <a:avLst/>
@@ -7063,413 +8627,496 @@
           <a:ln/>
         </p:spPr>
         <p:txBody>
-          <a:bodyPr wrap="square" lIns="0" tIns="0" rIns="0" bIns="0" rtlCol="0" anchor="ctr"/>
+          <a:bodyPr wrap="square" lIns="0" tIns="0" rIns="0" bIns="0" rtlCol="0" anchor="ctr" anchorCtr="0"/>
           <a:lstStyle/>
           <a:p>
             <a:pPr marL="0" indent="0" algn="l">
               <a:buNone/>
             </a:pPr>
             <a:r>
-              <a:rPr lang="en-US" sz="1400" b="1" dirty="0">
+              <a:rPr lang="ja-JP" altLang="en-US" sz="1400" b="1" dirty="0">
                 <a:solidFill>
                   <a:srgbClr val="1A1D23"/>
                 </a:solidFill>
               </a:rPr>
-              <a:t>モジュールシステムとは</a:t>
+              <a:t>数字が強くなるではない</a:t>
             </a:r>
             <a:endParaRPr lang="en-US" sz="1400" dirty="0"/>
           </a:p>
         </p:txBody>
       </p:sp>
-      <p:sp>
-        <p:nvSpPr>
-          <p:cNvPr id="39" name="Shape 37"/>
-          <p:cNvSpPr/>
-          <p:nvPr/>
-        </p:nvSpPr>
-        <p:spPr>
-          <a:xfrm>
-            <a:off x="548640" y="1901952"/>
-            <a:ext cx="8046720" cy="621792"/>
-          </a:xfrm>
-          <a:prstGeom prst="roundRect">
-            <a:avLst>
-              <a:gd name="adj" fmla="val 10294"/>
-            </a:avLst>
-          </a:prstGeom>
-          <a:solidFill>
-            <a:srgbClr val="FFF8E1"/>
-          </a:solidFill>
-          <a:ln w="12700">
-            <a:solidFill>
-              <a:srgbClr val="F0C040"/>
-            </a:solidFill>
-            <a:prstDash val="solid"/>
-          </a:ln>
-        </p:spPr>
-        <p:txBody>
-          <a:bodyPr/>
-          <a:lstStyle/>
-          <a:p>
-            <a:endParaRPr lang="ja-JP" altLang="en-US"/>
-          </a:p>
-        </p:txBody>
-      </p:sp>
-      <p:sp>
-        <p:nvSpPr>
-          <p:cNvPr id="40" name="Text 38"/>
-          <p:cNvSpPr/>
-          <p:nvPr/>
-        </p:nvSpPr>
-        <p:spPr>
-          <a:xfrm>
-            <a:off x="658368" y="1975104"/>
-            <a:ext cx="7827264" cy="475488"/>
-          </a:xfrm>
-          <a:prstGeom prst="rect">
-            <a:avLst/>
-          </a:prstGeom>
-          <a:noFill/>
-          <a:ln/>
-        </p:spPr>
-        <p:txBody>
-          <a:bodyPr wrap="square" lIns="0" tIns="0" rIns="0" bIns="0" rtlCol="0" anchor="t"/>
-          <a:lstStyle/>
-          <a:p>
-            <a:pPr marL="0" indent="0" algn="l">
-              <a:lnSpc>
-                <a:spcPct val="140000"/>
-              </a:lnSpc>
-              <a:buNone/>
-            </a:pPr>
-            <a:r>
-              <a:rPr lang="en-US" sz="1050" i="1" dirty="0">
-                <a:solidFill>
-                  <a:srgbClr val="5A4800"/>
-                </a:solidFill>
-              </a:rPr>
-              <a:t>7スロット × 自由配置 / 重複で線形強化</a:t>
-            </a:r>
-          </a:p>
-        </p:txBody>
-      </p:sp>
-      <p:sp>
-        <p:nvSpPr>
-          <p:cNvPr id="41" name="Shape 39"/>
-          <p:cNvSpPr/>
-          <p:nvPr/>
-        </p:nvSpPr>
-        <p:spPr>
-          <a:xfrm>
-            <a:off x="368300" y="2794000"/>
-            <a:ext cx="3200400" cy="1917700"/>
-          </a:xfrm>
-          <a:prstGeom prst="roundRect">
-            <a:avLst>
-              <a:gd name="adj" fmla="val 4762"/>
-            </a:avLst>
-          </a:prstGeom>
-          <a:solidFill>
-            <a:srgbClr val="FFFFFF"/>
-          </a:solidFill>
-          <a:ln w="12700">
-            <a:solidFill>
-              <a:srgbClr val="DDE0E6"/>
-            </a:solidFill>
-            <a:prstDash val="solid"/>
-          </a:ln>
-          <a:effectLst>
-            <a:outerShdw blurRad="101600" dist="25400" dir="2700000" algn="bl" rotWithShape="0">
-              <a:srgbClr val="000000">
-                <a:alpha val="8000"/>
-              </a:srgbClr>
-            </a:outerShdw>
-          </a:effectLst>
-        </p:spPr>
-        <p:txBody>
-          <a:bodyPr/>
-          <a:lstStyle/>
-          <a:p>
-            <a:endParaRPr lang="ja-JP" altLang="en-US"/>
-          </a:p>
-        </p:txBody>
-      </p:sp>
-      <p:sp>
-        <p:nvSpPr>
-          <p:cNvPr id="42" name="Text 40"/>
-          <p:cNvSpPr/>
-          <p:nvPr/>
-        </p:nvSpPr>
-        <p:spPr>
-          <a:xfrm>
-            <a:off x="546100" y="2908300"/>
-            <a:ext cx="2832100" cy="317500"/>
-          </a:xfrm>
-          <a:prstGeom prst="rect">
-            <a:avLst/>
-          </a:prstGeom>
-          <a:noFill/>
-          <a:ln/>
-        </p:spPr>
-        <p:txBody>
-          <a:bodyPr wrap="square" lIns="0" tIns="0" rIns="0" bIns="0" rtlCol="0" anchor="ctr"/>
-          <a:lstStyle/>
-          <a:p>
-            <a:pPr marL="0" indent="0" algn="l">
-              <a:buNone/>
-            </a:pPr>
-            <a:r>
-              <a:rPr lang="en-US" sz="1400" b="1" dirty="0">
-                <a:solidFill>
-                  <a:srgbClr val="1A1D23"/>
-                </a:solidFill>
-              </a:rPr>
-              <a:t>モジュールの種類</a:t>
-            </a:r>
-            <a:endParaRPr lang="en-US" sz="1400" dirty="0"/>
-          </a:p>
-        </p:txBody>
-      </p:sp>
-      <p:sp>
-        <p:nvSpPr>
-          <p:cNvPr id="43" name="Shape 41"/>
-          <p:cNvSpPr/>
-          <p:nvPr/>
-        </p:nvSpPr>
-        <p:spPr>
-          <a:xfrm>
-            <a:off x="546100" y="3289300"/>
-            <a:ext cx="2832100" cy="1295400"/>
-          </a:xfrm>
-          <a:prstGeom prst="roundRect">
-            <a:avLst>
-              <a:gd name="adj" fmla="val 4930"/>
-            </a:avLst>
-          </a:prstGeom>
-          <a:solidFill>
-            <a:srgbClr val="FFF8E1"/>
-          </a:solidFill>
-          <a:ln w="12700">
-            <a:solidFill>
-              <a:srgbClr val="F0C040"/>
-            </a:solidFill>
-            <a:prstDash val="solid"/>
-          </a:ln>
-        </p:spPr>
-        <p:txBody>
-          <a:bodyPr/>
-          <a:lstStyle/>
-          <a:p>
-            <a:endParaRPr lang="ja-JP" altLang="en-US"/>
-          </a:p>
-        </p:txBody>
-      </p:sp>
-      <p:sp>
-        <p:nvSpPr>
-          <p:cNvPr id="44" name="Text 42"/>
-          <p:cNvSpPr/>
-          <p:nvPr/>
-        </p:nvSpPr>
-        <p:spPr>
-          <a:xfrm>
-            <a:off x="660400" y="3365500"/>
-            <a:ext cx="2616200" cy="1155700"/>
-          </a:xfrm>
-          <a:prstGeom prst="rect">
-            <a:avLst/>
-          </a:prstGeom>
-          <a:noFill/>
-          <a:ln/>
-        </p:spPr>
-        <p:txBody>
-          <a:bodyPr wrap="square" lIns="0" tIns="0" rIns="0" bIns="0" rtlCol="0" anchor="t"/>
-          <a:lstStyle/>
-          <a:p>
-            <a:pPr marL="0" indent="0" algn="l">
-              <a:lnSpc>
-                <a:spcPct val="140000"/>
-              </a:lnSpc>
-              <a:buNone/>
-            </a:pPr>
-            <a:r>
-              <a:rPr lang="en-US" sz="1050" i="1" dirty="0">
-                <a:solidFill>
-                  <a:srgbClr val="5A4800"/>
-                </a:solidFill>
-              </a:rPr>
-              <a:t>速度UP / 攻撃強化 / 防御 / 特殊効果…</a:t>
-            </a:r>
-          </a:p>
-        </p:txBody>
-      </p:sp>
-      <p:sp>
-        <p:nvSpPr>
-          <p:cNvPr id="45" name="Shape 43"/>
-          <p:cNvSpPr/>
-          <p:nvPr/>
-        </p:nvSpPr>
-        <p:spPr>
-          <a:xfrm>
-            <a:off x="3746500" y="2794000"/>
-            <a:ext cx="5029200" cy="1917700"/>
-          </a:xfrm>
-          <a:prstGeom prst="roundRect">
-            <a:avLst>
-              <a:gd name="adj" fmla="val 3810"/>
-            </a:avLst>
-          </a:prstGeom>
-          <a:solidFill>
-            <a:srgbClr val="E8EBF0"/>
-          </a:solidFill>
-          <a:ln w="19050">
-            <a:solidFill>
-              <a:srgbClr val="B0BAC9"/>
-            </a:solidFill>
-            <a:prstDash val="dash"/>
-          </a:ln>
-        </p:spPr>
-        <p:txBody>
-          <a:bodyPr/>
-          <a:lstStyle/>
-          <a:p>
-            <a:endParaRPr lang="ja-JP" altLang="en-US"/>
-          </a:p>
-        </p:txBody>
-      </p:sp>
-      <p:sp>
-        <p:nvSpPr>
-          <p:cNvPr id="46" name="Shape 44"/>
-          <p:cNvSpPr/>
-          <p:nvPr/>
-        </p:nvSpPr>
-        <p:spPr>
-          <a:xfrm>
-            <a:off x="6720840" y="2880360"/>
-            <a:ext cx="0" cy="1737360"/>
-          </a:xfrm>
-          <a:prstGeom prst="line">
-            <a:avLst/>
-          </a:prstGeom>
-          <a:noFill/>
-          <a:ln w="8890">
-            <a:solidFill>
-              <a:srgbClr val="B0BAC9"/>
-            </a:solidFill>
-            <a:prstDash val="dash"/>
-          </a:ln>
-        </p:spPr>
-        <p:txBody>
-          <a:bodyPr/>
-          <a:lstStyle/>
-          <a:p>
-            <a:endParaRPr lang="ja-JP" altLang="en-US"/>
-          </a:p>
-        </p:txBody>
-      </p:sp>
-      <p:sp>
-        <p:nvSpPr>
-          <p:cNvPr id="47" name="Shape 45"/>
-          <p:cNvSpPr/>
-          <p:nvPr/>
-        </p:nvSpPr>
-        <p:spPr>
-          <a:xfrm>
-            <a:off x="4754880" y="3749040"/>
-            <a:ext cx="3931920" cy="0"/>
-          </a:xfrm>
-          <a:prstGeom prst="line">
-            <a:avLst/>
-          </a:prstGeom>
-          <a:noFill/>
-          <a:ln w="8890">
-            <a:solidFill>
-              <a:srgbClr val="B0BAC9"/>
-            </a:solidFill>
-            <a:prstDash val="dash"/>
-          </a:ln>
-        </p:spPr>
-        <p:txBody>
-          <a:bodyPr/>
-          <a:lstStyle/>
-          <a:p>
-            <a:endParaRPr lang="ja-JP" altLang="en-US"/>
-          </a:p>
-        </p:txBody>
-      </p:sp>
-      <p:sp>
-        <p:nvSpPr>
-          <p:cNvPr id="48" name="Text 46"/>
-          <p:cNvSpPr/>
-          <p:nvPr/>
-        </p:nvSpPr>
-        <p:spPr>
-          <a:xfrm>
-            <a:off x="3746500" y="3429000"/>
-            <a:ext cx="5029200" cy="279400"/>
-          </a:xfrm>
-          <a:prstGeom prst="rect">
-            <a:avLst/>
-          </a:prstGeom>
-          <a:noFill/>
-          <a:ln/>
-        </p:spPr>
-        <p:txBody>
-          <a:bodyPr wrap="square" lIns="0" tIns="0" rIns="0" bIns="0" rtlCol="0" anchor="ctr"/>
-          <a:lstStyle/>
-          <a:p>
-            <a:pPr marL="0" indent="0" algn="ctr">
-              <a:buNone/>
-            </a:pPr>
-            <a:r>
-              <a:rPr lang="en-US" sz="1000" b="1" kern="0" spc="200" dirty="0">
-                <a:solidFill>
-                  <a:srgbClr val="B0BAC9"/>
-                </a:solidFill>
-              </a:rPr>
-              <a:t>[ IMAGE ]</a:t>
-            </a:r>
-            <a:endParaRPr lang="en-US" sz="1000" dirty="0"/>
-          </a:p>
-        </p:txBody>
-      </p:sp>
-      <p:sp>
-        <p:nvSpPr>
-          <p:cNvPr id="49" name="Text 47"/>
-          <p:cNvSpPr/>
-          <p:nvPr/>
-        </p:nvSpPr>
-        <p:spPr>
-          <a:xfrm>
-            <a:off x="3835400" y="3733800"/>
-            <a:ext cx="4851400" cy="812800"/>
-          </a:xfrm>
-          <a:prstGeom prst="rect">
-            <a:avLst/>
-          </a:prstGeom>
-          <a:noFill/>
-          <a:ln/>
-        </p:spPr>
-        <p:txBody>
-          <a:bodyPr wrap="square" lIns="0" tIns="0" rIns="0" bIns="0" rtlCol="0" anchor="t"/>
-          <a:lstStyle/>
-          <a:p>
-            <a:pPr marL="0" indent="0" algn="ctr">
-              <a:lnSpc>
-                <a:spcPct val="135000"/>
-              </a:lnSpc>
-              <a:buNone/>
-            </a:pPr>
-            <a:r>
-              <a:rPr lang="en-US" sz="950" dirty="0">
+      <p:grpSp>
+        <p:nvGrpSpPr>
+          <p:cNvPr id="53" name="グループ化 52">
+            <a:extLst>
+              <a:ext uri="{FF2B5EF4-FFF2-40B4-BE49-F238E27FC236}">
+                <a16:creationId xmlns:a16="http://schemas.microsoft.com/office/drawing/2014/main" id="{AF7A5210-439A-1593-A0D3-5975E5666B31}"/>
+              </a:ext>
+            </a:extLst>
+          </p:cNvPr>
+          <p:cNvGrpSpPr/>
+          <p:nvPr/>
+        </p:nvGrpSpPr>
+        <p:grpSpPr>
+          <a:xfrm>
+            <a:off x="365761" y="2095500"/>
+            <a:ext cx="4206237" cy="2667000"/>
+            <a:chOff x="3746500" y="2794000"/>
+            <a:chExt cx="5029200" cy="1917700"/>
+          </a:xfrm>
+        </p:grpSpPr>
+        <p:sp>
+          <p:nvSpPr>
+            <p:cNvPr id="45" name="Shape 43"/>
+            <p:cNvSpPr/>
+            <p:nvPr/>
+          </p:nvSpPr>
+          <p:spPr>
+            <a:xfrm>
+              <a:off x="3746500" y="2794000"/>
+              <a:ext cx="5029200" cy="1917700"/>
+            </a:xfrm>
+            <a:prstGeom prst="roundRect">
+              <a:avLst>
+                <a:gd name="adj" fmla="val 3810"/>
+              </a:avLst>
+            </a:prstGeom>
+            <a:solidFill>
+              <a:srgbClr val="E8EBF0"/>
+            </a:solidFill>
+            <a:ln w="19050">
+              <a:solidFill>
+                <a:srgbClr val="B0BAC9"/>
+              </a:solidFill>
+              <a:prstDash val="dash"/>
+            </a:ln>
+          </p:spPr>
+          <p:txBody>
+            <a:bodyPr/>
+            <a:lstStyle/>
+            <a:p>
+              <a:endParaRPr lang="ja-JP" altLang="en-US"/>
+            </a:p>
+          </p:txBody>
+        </p:sp>
+        <p:sp>
+          <p:nvSpPr>
+            <p:cNvPr id="48" name="Text 46"/>
+            <p:cNvSpPr/>
+            <p:nvPr/>
+          </p:nvSpPr>
+          <p:spPr>
+            <a:xfrm>
+              <a:off x="3746500" y="3429000"/>
+              <a:ext cx="5029200" cy="279400"/>
+            </a:xfrm>
+            <a:prstGeom prst="rect">
+              <a:avLst/>
+            </a:prstGeom>
+            <a:noFill/>
+            <a:ln/>
+          </p:spPr>
+          <p:txBody>
+            <a:bodyPr wrap="square" lIns="0" tIns="0" rIns="0" bIns="0" rtlCol="0" anchor="ctr"/>
+            <a:lstStyle/>
+            <a:p>
+              <a:pPr marL="0" indent="0" algn="ctr">
+                <a:buNone/>
+              </a:pPr>
+              <a:r>
+                <a:rPr lang="en-US" sz="1000" b="1" kern="0" spc="200" dirty="0">
+                  <a:solidFill>
+                    <a:srgbClr val="B0BAC9"/>
+                  </a:solidFill>
+                </a:rPr>
+                <a:t>[ IMAGE ]</a:t>
+              </a:r>
+              <a:endParaRPr lang="en-US" sz="1000" dirty="0"/>
+            </a:p>
+          </p:txBody>
+        </p:sp>
+        <p:sp>
+          <p:nvSpPr>
+            <p:cNvPr id="49" name="Text 47"/>
+            <p:cNvSpPr/>
+            <p:nvPr/>
+          </p:nvSpPr>
+          <p:spPr>
+            <a:xfrm>
+              <a:off x="3835400" y="3733800"/>
+              <a:ext cx="4851400" cy="812800"/>
+            </a:xfrm>
+            <a:prstGeom prst="rect">
+              <a:avLst/>
+            </a:prstGeom>
+            <a:noFill/>
+            <a:ln/>
+          </p:spPr>
+          <p:txBody>
+            <a:bodyPr wrap="square" lIns="0" tIns="0" rIns="0" bIns="0" rtlCol="0" anchor="t"/>
+            <a:lstStyle/>
+            <a:p>
+              <a:pPr algn="ctr">
+                <a:lnSpc>
+                  <a:spcPct val="135000"/>
+                </a:lnSpc>
+              </a:pPr>
+              <a:r>
+                <a:rPr lang="ja-JP" altLang="en-US" sz="950" dirty="0">
+                  <a:solidFill>
+                    <a:srgbClr val="8A909E"/>
+                  </a:solidFill>
+                </a:rPr>
+                <a:t>モジュールで生まれる効果の例</a:t>
+              </a:r>
+              <a:r>
+                <a:rPr lang="en-US" altLang="ja-JP" sz="950" dirty="0">
+                  <a:solidFill>
+                    <a:srgbClr val="8A909E"/>
+                  </a:solidFill>
+                </a:rPr>
+                <a:t>1</a:t>
+              </a:r>
+              <a:r>
+                <a:rPr lang="en-US" sz="950" dirty="0">
+                  <a:solidFill>
+                    <a:srgbClr val="8A909E"/>
+                  </a:solidFill>
+                </a:rPr>
+                <a:t> </a:t>
+              </a:r>
+            </a:p>
+          </p:txBody>
+        </p:sp>
+      </p:grpSp>
+      <p:grpSp>
+        <p:nvGrpSpPr>
+          <p:cNvPr id="54" name="グループ化 53">
+            <a:extLst>
+              <a:ext uri="{FF2B5EF4-FFF2-40B4-BE49-F238E27FC236}">
+                <a16:creationId xmlns:a16="http://schemas.microsoft.com/office/drawing/2014/main" id="{113056BD-90CF-C2E5-A89C-15014F79C1DA}"/>
+              </a:ext>
+            </a:extLst>
+          </p:cNvPr>
+          <p:cNvGrpSpPr/>
+          <p:nvPr/>
+        </p:nvGrpSpPr>
+        <p:grpSpPr>
+          <a:xfrm>
+            <a:off x="4660898" y="2095500"/>
+            <a:ext cx="4206237" cy="2667000"/>
+            <a:chOff x="3746500" y="2794000"/>
+            <a:chExt cx="5029200" cy="1917700"/>
+          </a:xfrm>
+        </p:grpSpPr>
+        <p:sp>
+          <p:nvSpPr>
+            <p:cNvPr id="55" name="Shape 43">
+              <a:extLst>
+                <a:ext uri="{FF2B5EF4-FFF2-40B4-BE49-F238E27FC236}">
+                  <a16:creationId xmlns:a16="http://schemas.microsoft.com/office/drawing/2014/main" id="{DCDBB948-A045-1C9E-0BAA-0E344A650297}"/>
+                </a:ext>
+              </a:extLst>
+            </p:cNvPr>
+            <p:cNvSpPr/>
+            <p:nvPr/>
+          </p:nvSpPr>
+          <p:spPr>
+            <a:xfrm>
+              <a:off x="3746500" y="2794000"/>
+              <a:ext cx="5029200" cy="1917700"/>
+            </a:xfrm>
+            <a:prstGeom prst="roundRect">
+              <a:avLst>
+                <a:gd name="adj" fmla="val 3810"/>
+              </a:avLst>
+            </a:prstGeom>
+            <a:solidFill>
+              <a:srgbClr val="E8EBF0"/>
+            </a:solidFill>
+            <a:ln w="19050">
+              <a:solidFill>
+                <a:srgbClr val="B0BAC9"/>
+              </a:solidFill>
+              <a:prstDash val="dash"/>
+            </a:ln>
+          </p:spPr>
+          <p:txBody>
+            <a:bodyPr/>
+            <a:lstStyle/>
+            <a:p>
+              <a:endParaRPr lang="ja-JP" altLang="en-US"/>
+            </a:p>
+          </p:txBody>
+        </p:sp>
+        <p:sp>
+          <p:nvSpPr>
+            <p:cNvPr id="56" name="Text 46">
+              <a:extLst>
+                <a:ext uri="{FF2B5EF4-FFF2-40B4-BE49-F238E27FC236}">
+                  <a16:creationId xmlns:a16="http://schemas.microsoft.com/office/drawing/2014/main" id="{7927C265-9DA5-3AD7-10AC-D46B3FE33FDD}"/>
+                </a:ext>
+              </a:extLst>
+            </p:cNvPr>
+            <p:cNvSpPr/>
+            <p:nvPr/>
+          </p:nvSpPr>
+          <p:spPr>
+            <a:xfrm>
+              <a:off x="3746500" y="3429000"/>
+              <a:ext cx="5029200" cy="279400"/>
+            </a:xfrm>
+            <a:prstGeom prst="rect">
+              <a:avLst/>
+            </a:prstGeom>
+            <a:noFill/>
+            <a:ln/>
+          </p:spPr>
+          <p:txBody>
+            <a:bodyPr wrap="square" lIns="0" tIns="0" rIns="0" bIns="0" rtlCol="0" anchor="ctr"/>
+            <a:lstStyle/>
+            <a:p>
+              <a:pPr marL="0" indent="0" algn="ctr">
+                <a:buNone/>
+              </a:pPr>
+              <a:r>
+                <a:rPr lang="en-US" sz="1000" b="1" kern="0" spc="200" dirty="0">
+                  <a:solidFill>
+                    <a:srgbClr val="B0BAC9"/>
+                  </a:solidFill>
+                </a:rPr>
+                <a:t>[ IMAGE ]</a:t>
+              </a:r>
+              <a:endParaRPr lang="en-US" sz="1000" dirty="0"/>
+            </a:p>
+          </p:txBody>
+        </p:sp>
+        <p:sp>
+          <p:nvSpPr>
+            <p:cNvPr id="57" name="Text 47">
+              <a:extLst>
+                <a:ext uri="{FF2B5EF4-FFF2-40B4-BE49-F238E27FC236}">
+                  <a16:creationId xmlns:a16="http://schemas.microsoft.com/office/drawing/2014/main" id="{35FA96CE-8817-ADE1-768B-A8486971E95A}"/>
+                </a:ext>
+              </a:extLst>
+            </p:cNvPr>
+            <p:cNvSpPr/>
+            <p:nvPr/>
+          </p:nvSpPr>
+          <p:spPr>
+            <a:xfrm>
+              <a:off x="3835400" y="3733800"/>
+              <a:ext cx="4851400" cy="812800"/>
+            </a:xfrm>
+            <a:prstGeom prst="rect">
+              <a:avLst/>
+            </a:prstGeom>
+            <a:noFill/>
+            <a:ln/>
+          </p:spPr>
+          <p:txBody>
+            <a:bodyPr wrap="square" lIns="0" tIns="0" rIns="0" bIns="0" rtlCol="0" anchor="t"/>
+            <a:lstStyle/>
+            <a:p>
+              <a:pPr marL="0" indent="0" algn="ctr">
+                <a:lnSpc>
+                  <a:spcPct val="135000"/>
+                </a:lnSpc>
+                <a:buNone/>
+              </a:pPr>
+              <a:r>
+                <a:rPr lang="ja-JP" altLang="en-US" sz="950" dirty="0">
+                  <a:solidFill>
+                    <a:srgbClr val="8A909E"/>
+                  </a:solidFill>
+                </a:rPr>
+                <a:t>モジュールで生まれる効果の例</a:t>
+              </a:r>
+              <a:r>
+                <a:rPr lang="en-US" altLang="ja-JP" sz="950" dirty="0">
+                  <a:solidFill>
+                    <a:srgbClr val="8A909E"/>
+                  </a:solidFill>
+                </a:rPr>
+                <a:t>2</a:t>
+              </a:r>
+              <a:endParaRPr lang="en-US" sz="950" dirty="0">
                 <a:solidFill>
                   <a:srgbClr val="8A909E"/>
                 </a:solidFill>
-              </a:rPr>
-              <a:t>モジュール選択UI / カスタマイズ画面</a:t>
-            </a:r>
-          </a:p>
-        </p:txBody>
-      </p:sp>
+              </a:endParaRPr>
+            </a:p>
+          </p:txBody>
+        </p:sp>
+      </p:grpSp>
+      <p:grpSp>
+        <p:nvGrpSpPr>
+          <p:cNvPr id="58" name="グループ化 57">
+            <a:extLst>
+              <a:ext uri="{FF2B5EF4-FFF2-40B4-BE49-F238E27FC236}">
+                <a16:creationId xmlns:a16="http://schemas.microsoft.com/office/drawing/2014/main" id="{13BA98FF-1450-A875-96F9-CC56BF9E1A21}"/>
+              </a:ext>
+            </a:extLst>
+          </p:cNvPr>
+          <p:cNvGrpSpPr/>
+          <p:nvPr/>
+        </p:nvGrpSpPr>
+        <p:grpSpPr>
+          <a:xfrm>
+            <a:off x="4645155" y="1422400"/>
+            <a:ext cx="4206237" cy="571500"/>
+            <a:chOff x="3746500" y="2794000"/>
+            <a:chExt cx="5029200" cy="1917700"/>
+          </a:xfrm>
+        </p:grpSpPr>
+        <p:sp>
+          <p:nvSpPr>
+            <p:cNvPr id="59" name="Shape 43">
+              <a:extLst>
+                <a:ext uri="{FF2B5EF4-FFF2-40B4-BE49-F238E27FC236}">
+                  <a16:creationId xmlns:a16="http://schemas.microsoft.com/office/drawing/2014/main" id="{BCC78719-80B2-EA7A-021C-B23656E6D0FF}"/>
+                </a:ext>
+              </a:extLst>
+            </p:cNvPr>
+            <p:cNvSpPr/>
+            <p:nvPr/>
+          </p:nvSpPr>
+          <p:spPr>
+            <a:xfrm>
+              <a:off x="3746500" y="2794000"/>
+              <a:ext cx="5029200" cy="1917700"/>
+            </a:xfrm>
+            <a:prstGeom prst="roundRect">
+              <a:avLst>
+                <a:gd name="adj" fmla="val 3810"/>
+              </a:avLst>
+            </a:prstGeom>
+            <a:solidFill>
+              <a:srgbClr val="E8EBF0"/>
+            </a:solidFill>
+            <a:ln w="19050">
+              <a:solidFill>
+                <a:srgbClr val="B0BAC9"/>
+              </a:solidFill>
+              <a:prstDash val="dash"/>
+            </a:ln>
+          </p:spPr>
+          <p:txBody>
+            <a:bodyPr/>
+            <a:lstStyle/>
+            <a:p>
+              <a:endParaRPr lang="ja-JP" altLang="en-US"/>
+            </a:p>
+          </p:txBody>
+        </p:sp>
+        <p:sp>
+          <p:nvSpPr>
+            <p:cNvPr id="60" name="Text 46">
+              <a:extLst>
+                <a:ext uri="{FF2B5EF4-FFF2-40B4-BE49-F238E27FC236}">
+                  <a16:creationId xmlns:a16="http://schemas.microsoft.com/office/drawing/2014/main" id="{E5680920-655A-7CBF-5092-55EE785F5BA4}"/>
+                </a:ext>
+              </a:extLst>
+            </p:cNvPr>
+            <p:cNvSpPr/>
+            <p:nvPr/>
+          </p:nvSpPr>
+          <p:spPr>
+            <a:xfrm>
+              <a:off x="3746500" y="3429000"/>
+              <a:ext cx="5029200" cy="279400"/>
+            </a:xfrm>
+            <a:prstGeom prst="rect">
+              <a:avLst/>
+            </a:prstGeom>
+            <a:noFill/>
+            <a:ln/>
+          </p:spPr>
+          <p:txBody>
+            <a:bodyPr wrap="square" lIns="0" tIns="0" rIns="0" bIns="0" rtlCol="0" anchor="ctr"/>
+            <a:lstStyle/>
+            <a:p>
+              <a:pPr marL="0" indent="0" algn="ctr">
+                <a:buNone/>
+              </a:pPr>
+              <a:r>
+                <a:rPr lang="en-US" sz="1000" b="1" kern="0" spc="200" dirty="0">
+                  <a:solidFill>
+                    <a:srgbClr val="B0BAC9"/>
+                  </a:solidFill>
+                </a:rPr>
+                <a:t>[ IMAGE ]</a:t>
+              </a:r>
+              <a:endParaRPr lang="en-US" sz="1000" dirty="0"/>
+            </a:p>
+          </p:txBody>
+        </p:sp>
+        <p:sp>
+          <p:nvSpPr>
+            <p:cNvPr id="61" name="Text 47">
+              <a:extLst>
+                <a:ext uri="{FF2B5EF4-FFF2-40B4-BE49-F238E27FC236}">
+                  <a16:creationId xmlns:a16="http://schemas.microsoft.com/office/drawing/2014/main" id="{04BB1B76-CEBB-8AB5-302F-B1C8BED3BE05}"/>
+                </a:ext>
+              </a:extLst>
+            </p:cNvPr>
+            <p:cNvSpPr/>
+            <p:nvPr/>
+          </p:nvSpPr>
+          <p:spPr>
+            <a:xfrm>
+              <a:off x="3835400" y="3733800"/>
+              <a:ext cx="4851400" cy="812800"/>
+            </a:xfrm>
+            <a:prstGeom prst="rect">
+              <a:avLst/>
+            </a:prstGeom>
+            <a:noFill/>
+            <a:ln/>
+          </p:spPr>
+          <p:txBody>
+            <a:bodyPr wrap="square" lIns="0" tIns="0" rIns="0" bIns="0" rtlCol="0" anchor="t"/>
+            <a:lstStyle/>
+            <a:p>
+              <a:pPr marL="0" indent="0" algn="ctr">
+                <a:lnSpc>
+                  <a:spcPct val="135000"/>
+                </a:lnSpc>
+                <a:buNone/>
+              </a:pPr>
+              <a:r>
+                <a:rPr lang="ja-JP" altLang="en-US" sz="950" dirty="0">
+                  <a:solidFill>
+                    <a:srgbClr val="8A909E"/>
+                  </a:solidFill>
+                </a:rPr>
+                <a:t>モジュール選択画面</a:t>
+              </a:r>
+              <a:r>
+                <a:rPr lang="en-US" altLang="ja-JP" sz="950" dirty="0">
+                  <a:solidFill>
+                    <a:srgbClr val="8A909E"/>
+                  </a:solidFill>
+                </a:rPr>
+                <a:t> / </a:t>
+              </a:r>
+              <a:r>
+                <a:rPr lang="ja-JP" altLang="en-US" sz="950" dirty="0">
+                  <a:solidFill>
+                    <a:srgbClr val="8A909E"/>
+                  </a:solidFill>
+                </a:rPr>
+                <a:t>モジュール装備</a:t>
+              </a:r>
+              <a:endParaRPr lang="en-US" sz="950" dirty="0">
+                <a:solidFill>
+                  <a:srgbClr val="8A909E"/>
+                </a:solidFill>
+              </a:endParaRPr>
+            </a:p>
+          </p:txBody>
+        </p:sp>
+      </p:grpSp>
     </p:spTree>
     <p:extLst>
       <p:ext uri="{BB962C8B-B14F-4D97-AF65-F5344CB8AC3E}">
@@ -7483,7 +9130,7 @@
 </p:sld>
 </file>
 
-<file path=ppt/slides/slide5.xml><?xml version="1.0" encoding="utf-8"?>
+<file path=ppt/slides/slide6.xml><?xml version="1.0" encoding="utf-8"?>
 <p:sld xmlns:a="http://schemas.openxmlformats.org/drawingml/2006/main" xmlns:r="http://schemas.openxmlformats.org/officeDocument/2006/relationships" xmlns:p="http://schemas.openxmlformats.org/presentationml/2006/main">
   <p:cSld name="Slide 5">
     <p:bg>
@@ -8739,7 +10386,7 @@
         </p:nvSpPr>
         <p:spPr>
           <a:xfrm>
-            <a:off x="502920" y="2578608"/>
+            <a:off x="502920" y="2921000"/>
             <a:ext cx="2377440" cy="0"/>
           </a:xfrm>
           <a:prstGeom prst="line">
@@ -8758,78 +10405,6 @@
           <a:lstStyle/>
           <a:p>
             <a:endParaRPr lang="ja-JP" altLang="en-US"/>
-          </a:p>
-        </p:txBody>
-      </p:sp>
-      <p:sp>
-        <p:nvSpPr>
-          <p:cNvPr id="42" name="Shape 40"/>
-          <p:cNvSpPr/>
-          <p:nvPr/>
-        </p:nvSpPr>
-        <p:spPr>
-          <a:xfrm>
-            <a:off x="508000" y="2692400"/>
-            <a:ext cx="2425700" cy="762000"/>
-          </a:xfrm>
-          <a:prstGeom prst="roundRect">
-            <a:avLst>
-              <a:gd name="adj" fmla="val 3415"/>
-            </a:avLst>
-          </a:prstGeom>
-          <a:solidFill>
-            <a:srgbClr val="FFF8E1"/>
-          </a:solidFill>
-          <a:ln w="12700">
-            <a:solidFill>
-              <a:srgbClr val="F0C040"/>
-            </a:solidFill>
-            <a:prstDash val="solid"/>
-          </a:ln>
-        </p:spPr>
-        <p:txBody>
-          <a:bodyPr/>
-          <a:lstStyle/>
-          <a:p>
-            <a:endParaRPr lang="ja-JP" altLang="en-US"/>
-          </a:p>
-        </p:txBody>
-      </p:sp>
-      <p:sp>
-        <p:nvSpPr>
-          <p:cNvPr id="43" name="Text 41"/>
-          <p:cNvSpPr/>
-          <p:nvPr/>
-        </p:nvSpPr>
-        <p:spPr>
-          <a:xfrm>
-            <a:off x="609600" y="2768600"/>
-            <a:ext cx="2209800" cy="609600"/>
-          </a:xfrm>
-          <a:prstGeom prst="rect">
-            <a:avLst/>
-          </a:prstGeom>
-          <a:noFill/>
-          <a:ln/>
-        </p:spPr>
-        <p:txBody>
-          <a:bodyPr wrap="square" lIns="0" tIns="0" rIns="0" bIns="0" rtlCol="0" anchor="t"/>
-          <a:lstStyle/>
-          <a:p>
-            <a:pPr marL="0" indent="0" algn="l">
-              <a:lnSpc>
-                <a:spcPct val="140000"/>
-              </a:lnSpc>
-              <a:buNone/>
-            </a:pPr>
-            <a:r>
-              <a:rPr lang="en-US" sz="1050" i="1" dirty="0">
-                <a:solidFill>
-                  <a:srgbClr val="5A4800"/>
-                </a:solidFill>
-              </a:rPr>
-              <a:t>直感操作 × 属性弾の戦術</a:t>
-            </a:r>
           </a:p>
         </p:txBody>
       </p:sp>
@@ -8991,7 +10566,7 @@
         </p:nvSpPr>
         <p:spPr>
           <a:xfrm>
-            <a:off x="3383280" y="2578608"/>
+            <a:off x="3383280" y="2921000"/>
             <a:ext cx="2377440" cy="0"/>
           </a:xfrm>
           <a:prstGeom prst="line">
@@ -9010,78 +10585,6 @@
           <a:lstStyle/>
           <a:p>
             <a:endParaRPr lang="ja-JP" altLang="en-US"/>
-          </a:p>
-        </p:txBody>
-      </p:sp>
-      <p:sp>
-        <p:nvSpPr>
-          <p:cNvPr id="49" name="Shape 47"/>
-          <p:cNvSpPr/>
-          <p:nvPr/>
-        </p:nvSpPr>
-        <p:spPr>
-          <a:xfrm>
-            <a:off x="3378200" y="2692400"/>
-            <a:ext cx="2425700" cy="762000"/>
-          </a:xfrm>
-          <a:prstGeom prst="roundRect">
-            <a:avLst>
-              <a:gd name="adj" fmla="val 3415"/>
-            </a:avLst>
-          </a:prstGeom>
-          <a:solidFill>
-            <a:srgbClr val="FFF8E1"/>
-          </a:solidFill>
-          <a:ln w="12700">
-            <a:solidFill>
-              <a:srgbClr val="F0C040"/>
-            </a:solidFill>
-            <a:prstDash val="solid"/>
-          </a:ln>
-        </p:spPr>
-        <p:txBody>
-          <a:bodyPr/>
-          <a:lstStyle/>
-          <a:p>
-            <a:endParaRPr lang="ja-JP" altLang="en-US"/>
-          </a:p>
-        </p:txBody>
-      </p:sp>
-      <p:sp>
-        <p:nvSpPr>
-          <p:cNvPr id="50" name="Text 48"/>
-          <p:cNvSpPr/>
-          <p:nvPr/>
-        </p:nvSpPr>
-        <p:spPr>
-          <a:xfrm>
-            <a:off x="3492500" y="2768600"/>
-            <a:ext cx="2209800" cy="609600"/>
-          </a:xfrm>
-          <a:prstGeom prst="rect">
-            <a:avLst/>
-          </a:prstGeom>
-          <a:noFill/>
-          <a:ln/>
-        </p:spPr>
-        <p:txBody>
-          <a:bodyPr wrap="square" lIns="0" tIns="0" rIns="0" bIns="0" rtlCol="0" anchor="t"/>
-          <a:lstStyle/>
-          <a:p>
-            <a:pPr marL="0" indent="0" algn="l">
-              <a:lnSpc>
-                <a:spcPct val="140000"/>
-              </a:lnSpc>
-              <a:buNone/>
-            </a:pPr>
-            <a:r>
-              <a:rPr lang="en-US" sz="1050" i="1" dirty="0">
-                <a:solidFill>
-                  <a:srgbClr val="5A4800"/>
-                </a:solidFill>
-              </a:rPr>
-              <a:t>モジュールで無限のビルド</a:t>
-            </a:r>
           </a:p>
         </p:txBody>
       </p:sp>
@@ -9243,7 +10746,7 @@
         </p:nvSpPr>
         <p:spPr>
           <a:xfrm>
-            <a:off x="6263640" y="2578608"/>
+            <a:off x="6263640" y="2921000"/>
             <a:ext cx="2377440" cy="0"/>
           </a:xfrm>
           <a:prstGeom prst="line">
@@ -9267,86 +10770,14 @@
       </p:sp>
       <p:sp>
         <p:nvSpPr>
-          <p:cNvPr id="56" name="Shape 54"/>
-          <p:cNvSpPr/>
-          <p:nvPr/>
-        </p:nvSpPr>
-        <p:spPr>
-          <a:xfrm>
-            <a:off x="6261100" y="2692400"/>
-            <a:ext cx="2425700" cy="762000"/>
-          </a:xfrm>
-          <a:prstGeom prst="roundRect">
-            <a:avLst>
-              <a:gd name="adj" fmla="val 3415"/>
-            </a:avLst>
-          </a:prstGeom>
-          <a:solidFill>
-            <a:srgbClr val="FFF8E1"/>
-          </a:solidFill>
-          <a:ln w="12700">
-            <a:solidFill>
-              <a:srgbClr val="F0C040"/>
-            </a:solidFill>
-            <a:prstDash val="solid"/>
-          </a:ln>
-        </p:spPr>
-        <p:txBody>
-          <a:bodyPr/>
-          <a:lstStyle/>
-          <a:p>
-            <a:endParaRPr lang="ja-JP" altLang="en-US"/>
-          </a:p>
-        </p:txBody>
-      </p:sp>
-      <p:sp>
-        <p:nvSpPr>
-          <p:cNvPr id="57" name="Text 55"/>
-          <p:cNvSpPr/>
-          <p:nvPr/>
-        </p:nvSpPr>
-        <p:spPr>
-          <a:xfrm>
-            <a:off x="6375400" y="2768600"/>
-            <a:ext cx="2209800" cy="609600"/>
-          </a:xfrm>
-          <a:prstGeom prst="rect">
-            <a:avLst/>
-          </a:prstGeom>
-          <a:noFill/>
-          <a:ln/>
-        </p:spPr>
-        <p:txBody>
-          <a:bodyPr wrap="square" lIns="0" tIns="0" rIns="0" bIns="0" rtlCol="0" anchor="t"/>
-          <a:lstStyle/>
-          <a:p>
-            <a:pPr marL="0" indent="0" algn="l">
-              <a:lnSpc>
-                <a:spcPct val="140000"/>
-              </a:lnSpc>
-              <a:buNone/>
-            </a:pPr>
-            <a:r>
-              <a:rPr lang="en-US" sz="1050" i="1" dirty="0">
-                <a:solidFill>
-                  <a:srgbClr val="5A4800"/>
-                </a:solidFill>
-              </a:rPr>
-              <a:t>短時間 × ローグライクの中毒性</a:t>
-            </a:r>
-          </a:p>
-        </p:txBody>
-      </p:sp>
-      <p:sp>
-        <p:nvSpPr>
           <p:cNvPr id="101" name="Image 101"/>
           <p:cNvSpPr/>
           <p:nvPr/>
         </p:nvSpPr>
         <p:spPr>
           <a:xfrm>
-            <a:off x="508000" y="3556000"/>
-            <a:ext cx="2425700" cy="1041400"/>
+            <a:off x="508000" y="3048000"/>
+            <a:ext cx="2425700" cy="1524000"/>
           </a:xfrm>
           <a:prstGeom prst="roundRect">
             <a:avLst>
@@ -9388,8 +10819,8 @@
         </p:nvSpPr>
         <p:spPr>
           <a:xfrm>
-            <a:off x="3378200" y="3556000"/>
-            <a:ext cx="2425700" cy="1041400"/>
+            <a:off x="3378200" y="3048000"/>
+            <a:ext cx="2425700" cy="1524000"/>
           </a:xfrm>
           <a:prstGeom prst="roundRect">
             <a:avLst>
@@ -9431,8 +10862,8 @@
         </p:nvSpPr>
         <p:spPr>
           <a:xfrm>
-            <a:off x="6261100" y="3556000"/>
-            <a:ext cx="2425700" cy="1041400"/>
+            <a:off x="6261100" y="3048000"/>
+            <a:ext cx="2425700" cy="1524000"/>
           </a:xfrm>
           <a:prstGeom prst="roundRect">
             <a:avLst>
@@ -9479,7 +10910,7 @@
 </p:sld>
 </file>
 
-<file path=ppt/slides/slide6.xml><?xml version="1.0" encoding="utf-8"?>
+<file path=ppt/slides/slide7.xml><?xml version="1.0" encoding="utf-8"?>
 <p:sld xmlns:a="http://schemas.openxmlformats.org/drawingml/2006/main" xmlns:r="http://schemas.openxmlformats.org/officeDocument/2006/relationships" xmlns:p="http://schemas.openxmlformats.org/presentationml/2006/main">
   <p:cSld name="Slide 6">
     <p:bg>
@@ -10585,8 +12016,8 @@
         </p:nvSpPr>
         <p:spPr>
           <a:xfrm>
-            <a:off x="365760" y="1417320"/>
-            <a:ext cx="8412480" cy="1371600"/>
+            <a:off x="365760" y="1422400"/>
+            <a:ext cx="8412480" cy="571500"/>
           </a:xfrm>
           <a:prstGeom prst="roundRect">
             <a:avLst>
@@ -10626,8 +12057,8 @@
         </p:nvSpPr>
         <p:spPr>
           <a:xfrm>
-            <a:off x="548640" y="1536192"/>
-            <a:ext cx="8046720" cy="320040"/>
+            <a:off x="548640" y="1549400"/>
+            <a:ext cx="8046720" cy="317500"/>
           </a:xfrm>
           <a:prstGeom prst="rect">
             <a:avLst/>
@@ -10636,7 +12067,7 @@
           <a:ln/>
         </p:spPr>
         <p:txBody>
-          <a:bodyPr wrap="square" lIns="0" tIns="0" rIns="0" bIns="0" rtlCol="0" anchor="ctr"/>
+          <a:bodyPr wrap="square" lIns="0" tIns="0" rIns="0" bIns="0" rtlCol="0" anchor="ctr" anchorCtr="0"/>
           <a:lstStyle/>
           <a:p>
             <a:pPr marL="0" indent="0" algn="l">
@@ -10656,86 +12087,14 @@
       </p:sp>
       <p:sp>
         <p:nvSpPr>
-          <p:cNvPr id="39" name="Shape 37"/>
-          <p:cNvSpPr/>
-          <p:nvPr/>
-        </p:nvSpPr>
-        <p:spPr>
-          <a:xfrm>
-            <a:off x="548640" y="1920240"/>
-            <a:ext cx="8046720" cy="749808"/>
-          </a:xfrm>
-          <a:prstGeom prst="roundRect">
-            <a:avLst>
-              <a:gd name="adj" fmla="val 8537"/>
-            </a:avLst>
-          </a:prstGeom>
-          <a:solidFill>
-            <a:srgbClr val="FFF8E1"/>
-          </a:solidFill>
-          <a:ln w="12700">
-            <a:solidFill>
-              <a:srgbClr val="F0C040"/>
-            </a:solidFill>
-            <a:prstDash val="solid"/>
-          </a:ln>
-        </p:spPr>
-        <p:txBody>
-          <a:bodyPr/>
-          <a:lstStyle/>
-          <a:p>
-            <a:endParaRPr lang="ja-JP" altLang="en-US"/>
-          </a:p>
-        </p:txBody>
-      </p:sp>
-      <p:sp>
-        <p:nvSpPr>
-          <p:cNvPr id="40" name="Text 38"/>
-          <p:cNvSpPr/>
-          <p:nvPr/>
-        </p:nvSpPr>
-        <p:spPr>
-          <a:xfrm>
-            <a:off x="658368" y="1993392"/>
-            <a:ext cx="7827264" cy="603504"/>
-          </a:xfrm>
-          <a:prstGeom prst="rect">
-            <a:avLst/>
-          </a:prstGeom>
-          <a:noFill/>
-          <a:ln/>
-        </p:spPr>
-        <p:txBody>
-          <a:bodyPr wrap="square" lIns="0" tIns="0" rIns="0" bIns="0" rtlCol="0" anchor="t"/>
-          <a:lstStyle/>
-          <a:p>
-            <a:pPr marL="0" indent="0" algn="l">
-              <a:lnSpc>
-                <a:spcPct val="140000"/>
-              </a:lnSpc>
-              <a:buNone/>
-            </a:pPr>
-            <a:r>
-              <a:rPr lang="en-US" sz="1050" i="1" dirty="0">
-                <a:solidFill>
-                  <a:srgbClr val="5A4800"/>
-                </a:solidFill>
-              </a:rPr>
-              <a:t>TGSで届けたい体験・熱量を1〜2文で</a:t>
-            </a:r>
-          </a:p>
-        </p:txBody>
-      </p:sp>
-      <p:sp>
-        <p:nvSpPr>
           <p:cNvPr id="41" name="Shape 39"/>
           <p:cNvSpPr/>
           <p:nvPr/>
         </p:nvSpPr>
         <p:spPr>
           <a:xfrm>
-            <a:off x="368300" y="2921000"/>
-            <a:ext cx="3200400" cy="1739900"/>
+            <a:off x="368300" y="2095500"/>
+            <a:ext cx="3200400" cy="571500"/>
           </a:xfrm>
           <a:prstGeom prst="roundRect">
             <a:avLst>
@@ -10775,7 +12134,7 @@
         </p:nvSpPr>
         <p:spPr>
           <a:xfrm>
-            <a:off x="546100" y="3048000"/>
+            <a:off x="546100" y="2222500"/>
             <a:ext cx="2832100" cy="317500"/>
           </a:xfrm>
           <a:prstGeom prst="rect">
@@ -10785,7 +12144,7 @@
           <a:ln/>
         </p:spPr>
         <p:txBody>
-          <a:bodyPr wrap="square" lIns="0" tIns="0" rIns="0" bIns="0" rtlCol="0" anchor="ctr"/>
+          <a:bodyPr wrap="square" lIns="0" tIns="0" rIns="0" bIns="0" rtlCol="0" anchor="ctr" anchorCtr="0"/>
           <a:lstStyle/>
           <a:p>
             <a:pPr marL="0" indent="0" algn="l">
@@ -10805,86 +12164,14 @@
       </p:sp>
       <p:sp>
         <p:nvSpPr>
-          <p:cNvPr id="43" name="Shape 41"/>
-          <p:cNvSpPr/>
-          <p:nvPr/>
-        </p:nvSpPr>
-        <p:spPr>
-          <a:xfrm>
-            <a:off x="546100" y="3429000"/>
-            <a:ext cx="2832100" cy="1117600"/>
-          </a:xfrm>
-          <a:prstGeom prst="roundRect">
-            <a:avLst>
-              <a:gd name="adj" fmla="val 5738"/>
-            </a:avLst>
-          </a:prstGeom>
-          <a:solidFill>
-            <a:srgbClr val="FFF8E1"/>
-          </a:solidFill>
-          <a:ln w="12700">
-            <a:solidFill>
-              <a:srgbClr val="F0C040"/>
-            </a:solidFill>
-            <a:prstDash val="solid"/>
-          </a:ln>
-        </p:spPr>
-        <p:txBody>
-          <a:bodyPr/>
-          <a:lstStyle/>
-          <a:p>
-            <a:endParaRPr lang="ja-JP" altLang="en-US"/>
-          </a:p>
-        </p:txBody>
-      </p:sp>
-      <p:sp>
-        <p:nvSpPr>
-          <p:cNvPr id="44" name="Text 42"/>
-          <p:cNvSpPr/>
-          <p:nvPr/>
-        </p:nvSpPr>
-        <p:spPr>
-          <a:xfrm>
-            <a:off x="660400" y="3505200"/>
-            <a:ext cx="2616200" cy="965200"/>
-          </a:xfrm>
-          <a:prstGeom prst="rect">
-            <a:avLst/>
-          </a:prstGeom>
-          <a:noFill/>
-          <a:ln/>
-        </p:spPr>
-        <p:txBody>
-          <a:bodyPr wrap="square" lIns="0" tIns="0" rIns="0" bIns="0" rtlCol="0" anchor="t"/>
-          <a:lstStyle/>
-          <a:p>
-            <a:pPr marL="0" indent="0" algn="l">
-              <a:lnSpc>
-                <a:spcPct val="140000"/>
-              </a:lnSpc>
-              <a:buNone/>
-            </a:pPr>
-            <a:r>
-              <a:rPr lang="en-US" sz="1050" i="1" dirty="0">
-                <a:solidFill>
-                  <a:srgbClr val="5A4800"/>
-                </a:solidFill>
-              </a:rPr>
-              <a:t>目標 / 期待する反応 / 出展後の展開</a:t>
-            </a:r>
-          </a:p>
-        </p:txBody>
-      </p:sp>
-      <p:sp>
-        <p:nvSpPr>
           <p:cNvPr id="45" name="Shape 43"/>
           <p:cNvSpPr/>
           <p:nvPr/>
         </p:nvSpPr>
         <p:spPr>
           <a:xfrm>
-            <a:off x="3746500" y="2921000"/>
-            <a:ext cx="5029200" cy="1739900"/>
+            <a:off x="3746500" y="2095500"/>
+            <a:ext cx="5029200" cy="571500"/>
           </a:xfrm>
           <a:prstGeom prst="roundRect">
             <a:avLst>
@@ -10917,8 +12204,8 @@
         </p:nvSpPr>
         <p:spPr>
           <a:xfrm>
-            <a:off x="6720840" y="3017520"/>
-            <a:ext cx="0" cy="1554480"/>
+            <a:off x="6720840" y="2159000"/>
+            <a:ext cx="0" cy="444500"/>
           </a:xfrm>
           <a:prstGeom prst="line">
             <a:avLst/>
@@ -10947,7 +12234,7 @@
         </p:nvSpPr>
         <p:spPr>
           <a:xfrm>
-            <a:off x="4754880" y="3794760"/>
+            <a:off x="4754880" y="2381250"/>
             <a:ext cx="3931920" cy="0"/>
           </a:xfrm>
           <a:prstGeom prst="line">
@@ -10977,7 +12264,7 @@
         </p:nvSpPr>
         <p:spPr>
           <a:xfrm>
-            <a:off x="3746500" y="3479800"/>
+            <a:off x="3746500" y="2159000"/>
             <a:ext cx="5029200" cy="279400"/>
           </a:xfrm>
           <a:prstGeom prst="rect">
@@ -11013,8 +12300,8 @@
         </p:nvSpPr>
         <p:spPr>
           <a:xfrm>
-            <a:off x="3835400" y="3771900"/>
-            <a:ext cx="4851400" cy="723900"/>
+            <a:off x="3835400" y="2400300"/>
+            <a:ext cx="4851400" cy="203200"/>
           </a:xfrm>
           <a:prstGeom prst="rect">
             <a:avLst/>
@@ -11033,13 +12320,34 @@
               <a:buNone/>
             </a:pPr>
             <a:r>
-              <a:rPr lang="en-US" sz="950" dirty="0">
+              <a:rPr lang="ja-JP" altLang="en-US" sz="950" dirty="0">
                 <a:solidFill>
                   <a:srgbClr val="8A909E"/>
                 </a:solidFill>
               </a:rPr>
-              <a:t>QRコード / SNS / 連絡先</a:t>
+              <a:t>プレイ動画</a:t>
             </a:r>
+            <a:r>
+              <a:rPr lang="en-US" altLang="ja-JP" sz="950" dirty="0">
+                <a:solidFill>
+                  <a:srgbClr val="8A909E"/>
+                </a:solidFill>
+              </a:rPr>
+              <a:t>URL</a:t>
+            </a:r>
+            <a:r>
+              <a:rPr lang="ja-JP" altLang="en-US" sz="950" dirty="0">
+                <a:solidFill>
+                  <a:srgbClr val="8A909E"/>
+                </a:solidFill>
+              </a:rPr>
+              <a:t>・映像</a:t>
+            </a:r>
+            <a:endParaRPr lang="en-US" sz="950" dirty="0">
+              <a:solidFill>
+                <a:srgbClr val="8A909E"/>
+              </a:solidFill>
+            </a:endParaRPr>
           </a:p>
         </p:txBody>
       </p:sp>

--- a/Assets/ProjectTanker/tank_game_template.pptx
+++ b/Assets/ProjectTanker/tank_game_template.pptx
@@ -5,7 +5,7 @@
     <p:sldMasterId id="2147483648" r:id="rId1"/>
   </p:sldMasterIdLst>
   <p:notesMasterIdLst>
-    <p:notesMasterId r:id="rId9"/>
+    <p:notesMasterId r:id="rId8"/>
   </p:notesMasterIdLst>
   <p:sldIdLst>
     <p:sldId id="271" r:id="rId2"/>
@@ -14,7 +14,6 @@
     <p:sldId id="263" r:id="rId5"/>
     <p:sldId id="264" r:id="rId6"/>
     <p:sldId id="268" r:id="rId7"/>
-    <p:sldId id="266" r:id="rId8"/>
   </p:sldIdLst>
   <p:sldSz cx="9144000" cy="5143500" type="screen16x9"/>
   <p:notesSz cx="5143500" cy="9144000"/>
@@ -753,90 +752,6 @@
             <a:fld id="{F7021451-1387-4CA6-816F-3879F97B5CBC}" type="slidenum">
               <a:rPr lang="en-US"/>
               <a:t>6</a:t>
-            </a:fld>
-            <a:endParaRPr lang="en-US"/>
-          </a:p>
-        </p:txBody>
-      </p:sp>
-    </p:spTree>
-    <p:extLst>
-      <p:ext uri="{BB962C8B-B14F-4D97-AF65-F5344CB8AC3E}">
-        <p14:creationId xmlns:p14="http://schemas.microsoft.com/office/powerpoint/2010/main" val="1024086991"/>
-      </p:ext>
-    </p:extLst>
-  </p:cSld>
-  <p:clrMapOvr>
-    <a:masterClrMapping/>
-  </p:clrMapOvr>
-</p:notes>
-</file>
-
-<file path=ppt/notesSlides/notesSlide7.xml><?xml version="1.0" encoding="utf-8"?>
-<p:notes xmlns:a="http://schemas.openxmlformats.org/drawingml/2006/main" xmlns:r="http://schemas.openxmlformats.org/officeDocument/2006/relationships" xmlns:p="http://schemas.openxmlformats.org/presentationml/2006/main">
-  <p:cSld>
-    <p:spTree>
-      <p:nvGrpSpPr>
-        <p:cNvPr id="1" name=""/>
-        <p:cNvGrpSpPr/>
-        <p:nvPr/>
-      </p:nvGrpSpPr>
-      <p:grpSpPr>
-        <a:xfrm>
-          <a:off x="0" y="0"/>
-          <a:ext cx="0" cy="0"/>
-          <a:chOff x="0" y="0"/>
-          <a:chExt cx="0" cy="0"/>
-        </a:xfrm>
-      </p:grpSpPr>
-      <p:sp>
-        <p:nvSpPr>
-          <p:cNvPr id="2" name="Slide Image Placeholder 1"/>
-          <p:cNvSpPr>
-            <a:spLocks noGrp="1" noRot="1" noChangeAspect="1"/>
-          </p:cNvSpPr>
-          <p:nvPr>
-            <p:ph type="sldImg"/>
-          </p:nvPr>
-        </p:nvSpPr>
-        <p:spPr/>
-      </p:sp>
-      <p:sp>
-        <p:nvSpPr>
-          <p:cNvPr id="3" name="Notes Placeholder 2"/>
-          <p:cNvSpPr>
-            <a:spLocks noGrp="1"/>
-          </p:cNvSpPr>
-          <p:nvPr>
-            <p:ph type="body" idx="1"/>
-          </p:nvPr>
-        </p:nvSpPr>
-        <p:spPr/>
-        <p:txBody>
-          <a:bodyPr/>
-          <a:lstStyle/>
-          <a:p>
-            <a:endParaRPr lang="en-US" dirty="0"/>
-          </a:p>
-        </p:txBody>
-      </p:sp>
-      <p:sp>
-        <p:nvSpPr>
-          <p:cNvPr id="4" name="Slide Number Placeholder 3"/>
-          <p:cNvSpPr>
-            <a:spLocks noGrp="1"/>
-          </p:cNvSpPr>
-          <p:nvPr>
-            <p:ph type="sldNum" sz="quarter" idx="10"/>
-          </p:nvPr>
-        </p:nvSpPr>
-        <p:spPr/>
-        <p:txBody>
-          <a:bodyPr/>
-          <a:lstStyle/>
-          <a:p>
-            <a:fld id="{F7021451-1387-4CA6-816F-3879F97B5CBC}" type="slidenum">
-              <a:rPr lang="en-US"/>
-              <a:t>7</a:t>
             </a:fld>
             <a:endParaRPr lang="en-US"/>
           </a:p>
@@ -2245,7 +2160,7 @@
         </p:nvSpPr>
         <p:spPr>
           <a:xfrm>
-            <a:off x="546100" y="889000"/>
+            <a:off x="501357" y="889000"/>
             <a:ext cx="3657600" cy="3556000"/>
           </a:xfrm>
           <a:prstGeom prst="roundRect">
@@ -2279,7 +2194,7 @@
         </p:nvSpPr>
         <p:spPr>
           <a:xfrm>
-            <a:off x="546100" y="889000"/>
+            <a:off x="501357" y="889000"/>
             <a:ext cx="3657600" cy="3556000"/>
           </a:xfrm>
           <a:prstGeom prst="rect">
@@ -2327,66 +2242,6 @@
             <a:srgbClr val="E8EBF0"/>
           </a:solidFill>
           <a:ln w="19050">
-            <a:solidFill>
-              <a:srgbClr val="B0BAC9"/>
-            </a:solidFill>
-            <a:prstDash val="dash"/>
-          </a:ln>
-        </p:spPr>
-        <p:txBody>
-          <a:bodyPr/>
-          <a:lstStyle/>
-          <a:p>
-            <a:endParaRPr lang="ja-JP" altLang="en-US"/>
-          </a:p>
-        </p:txBody>
-      </p:sp>
-      <p:sp>
-        <p:nvSpPr>
-          <p:cNvPr id="45" name="Shape 43"/>
-          <p:cNvSpPr/>
-          <p:nvPr/>
-        </p:nvSpPr>
-        <p:spPr>
-          <a:xfrm>
-            <a:off x="7200900" y="411480"/>
-            <a:ext cx="0" cy="4297680"/>
-          </a:xfrm>
-          <a:prstGeom prst="line">
-            <a:avLst/>
-          </a:prstGeom>
-          <a:noFill/>
-          <a:ln w="8890">
-            <a:solidFill>
-              <a:srgbClr val="B0BAC9"/>
-            </a:solidFill>
-            <a:prstDash val="dash"/>
-          </a:ln>
-        </p:spPr>
-        <p:txBody>
-          <a:bodyPr/>
-          <a:lstStyle/>
-          <a:p>
-            <a:endParaRPr lang="ja-JP" altLang="en-US"/>
-          </a:p>
-        </p:txBody>
-      </p:sp>
-      <p:sp>
-        <p:nvSpPr>
-          <p:cNvPr id="46" name="Shape 44"/>
-          <p:cNvSpPr/>
-          <p:nvPr/>
-        </p:nvSpPr>
-        <p:spPr>
-          <a:xfrm>
-            <a:off x="5669280" y="2560320"/>
-            <a:ext cx="3063240" cy="0"/>
-          </a:xfrm>
-          <a:prstGeom prst="line">
-            <a:avLst/>
-          </a:prstGeom>
-          <a:noFill/>
-          <a:ln w="8890">
             <a:solidFill>
               <a:srgbClr val="B0BAC9"/>
             </a:solidFill>
@@ -3942,6 +3797,90 @@
           </p:txBody>
         </p:sp>
       </p:grpSp>
+      <p:sp>
+        <p:nvSpPr>
+          <p:cNvPr id="39" name="Text 40">
+            <a:extLst>
+              <a:ext uri="{FF2B5EF4-FFF2-40B4-BE49-F238E27FC236}">
+                <a16:creationId xmlns:a16="http://schemas.microsoft.com/office/drawing/2014/main" id="{D278F86C-A37C-95B0-570E-1D6727377B49}"/>
+              </a:ext>
+            </a:extLst>
+          </p:cNvPr>
+          <p:cNvSpPr/>
+          <p:nvPr/>
+        </p:nvSpPr>
+        <p:spPr>
+          <a:xfrm>
+            <a:off x="642621" y="2578102"/>
+            <a:ext cx="2832100" cy="2108198"/>
+          </a:xfrm>
+          <a:prstGeom prst="rect">
+            <a:avLst/>
+          </a:prstGeom>
+          <a:noFill/>
+          <a:ln/>
+        </p:spPr>
+        <p:txBody>
+          <a:bodyPr wrap="square" lIns="0" tIns="0" rIns="0" bIns="0" rtlCol="0" anchor="ctr" anchorCtr="0"/>
+          <a:lstStyle/>
+          <a:p>
+            <a:r>
+              <a:rPr lang="ja-JP" altLang="en-US" sz="1300" dirty="0"/>
+              <a:t>ジャンル </a:t>
+            </a:r>
+            <a:r>
+              <a:rPr lang="en-US" altLang="ja-JP" sz="1300" dirty="0"/>
+              <a:t>: </a:t>
+            </a:r>
+            <a:r>
+              <a:rPr lang="ja-JP" altLang="en-US" sz="1300" dirty="0"/>
+              <a:t>戦車シューターローグライク</a:t>
+            </a:r>
+            <a:br>
+              <a:rPr lang="en-US" altLang="ja-JP" sz="1300" dirty="0"/>
+            </a:br>
+            <a:br>
+              <a:rPr lang="en-US" altLang="ja-JP" sz="1300" dirty="0"/>
+            </a:br>
+            <a:r>
+              <a:rPr lang="ja-JP" altLang="en-US" sz="1300" dirty="0"/>
+              <a:t>ターゲット </a:t>
+            </a:r>
+            <a:r>
+              <a:rPr lang="en-US" altLang="ja-JP" sz="1300" dirty="0"/>
+              <a:t>: </a:t>
+            </a:r>
+            <a:r>
+              <a:rPr lang="ja-JP" altLang="en-US" sz="1300" dirty="0"/>
+              <a:t>パズルゲームなどゆっくりと考えるのが好きな人</a:t>
+            </a:r>
+            <a:br>
+              <a:rPr lang="en-US" altLang="ja-JP" sz="1300" dirty="0"/>
+            </a:br>
+            <a:br>
+              <a:rPr lang="en-US" altLang="ja-JP" sz="1300" dirty="0"/>
+            </a:br>
+            <a:r>
+              <a:rPr lang="ja-JP" altLang="en-US" sz="1300" dirty="0"/>
+              <a:t>プラットフォーム </a:t>
+            </a:r>
+            <a:r>
+              <a:rPr lang="en-US" altLang="ja-JP" sz="1300" dirty="0"/>
+              <a:t>: PC</a:t>
+            </a:r>
+            <a:br>
+              <a:rPr lang="en-US" altLang="ja-JP" sz="1300" dirty="0"/>
+            </a:br>
+            <a:br>
+              <a:rPr lang="en-US" altLang="ja-JP" sz="1300" dirty="0"/>
+            </a:br>
+            <a:br>
+              <a:rPr lang="en-US" altLang="ja-JP" sz="1300" dirty="0"/>
+            </a:br>
+            <a:endParaRPr lang="en-US" sz="1300" dirty="0"/>
+          </a:p>
+        </p:txBody>
+      </p:sp>
     </p:spTree>
     <p:extLst>
       <p:ext uri="{BB962C8B-B14F-4D97-AF65-F5344CB8AC3E}">
@@ -5764,8 +5703,8 @@
         </p:nvSpPr>
         <p:spPr>
           <a:xfrm>
-            <a:off x="546100" y="1549400"/>
-            <a:ext cx="2832100" cy="317500"/>
+            <a:off x="546099" y="1549400"/>
+            <a:ext cx="3778711" cy="317500"/>
           </a:xfrm>
           <a:prstGeom prst="rect">
             <a:avLst/>
@@ -5777,7 +5716,7 @@
           <a:bodyPr wrap="square" lIns="0" tIns="0" rIns="0" bIns="0" rtlCol="0" anchor="ctr"/>
           <a:lstStyle/>
           <a:p>
-            <a:pPr marL="0" indent="0" algn="l">
+            <a:pPr marL="0" indent="0" algn="ctr">
               <a:buNone/>
             </a:pPr>
             <a:r>
@@ -5806,8 +5745,8 @@
         </p:nvSpPr>
         <p:spPr>
           <a:xfrm>
-            <a:off x="4819183" y="1549400"/>
-            <a:ext cx="2832100" cy="317500"/>
+            <a:off x="4819182" y="1549400"/>
+            <a:ext cx="3844945" cy="317500"/>
           </a:xfrm>
           <a:prstGeom prst="rect">
             <a:avLst/>
@@ -5819,7 +5758,7 @@
           <a:bodyPr wrap="square" lIns="0" tIns="0" rIns="0" bIns="0" rtlCol="0" anchor="ctr"/>
           <a:lstStyle/>
           <a:p>
-            <a:pPr marL="0" indent="0" algn="l">
+            <a:pPr marL="0" indent="0" algn="ctr">
               <a:buNone/>
             </a:pPr>
             <a:r>
@@ -6901,6 +6840,17 @@
               <a:buNone/>
             </a:pPr>
             <a:r>
+              <a:rPr lang="ja-JP" altLang="en-US" sz="3200" b="1" dirty="0">
+                <a:solidFill>
+                  <a:srgbClr val="1A1D23"/>
+                </a:solidFill>
+                <a:latin typeface="Arial" pitchFamily="34" charset="0"/>
+                <a:ea typeface="Arial" pitchFamily="34" charset="-122"/>
+                <a:cs typeface="Arial" pitchFamily="34" charset="-120"/>
+              </a:rPr>
+              <a:t>戦車</a:t>
+            </a:r>
+            <a:r>
               <a:rPr lang="en-US" sz="3200" b="1" dirty="0">
                 <a:solidFill>
                   <a:srgbClr val="1A1D23"/>
@@ -6909,7 +6859,7 @@
                 <a:ea typeface="Arial" pitchFamily="34" charset="-122"/>
                 <a:cs typeface="Arial" pitchFamily="34" charset="-120"/>
               </a:rPr>
-              <a:t>操作感とエフェクト・演出</a:t>
+              <a:t>感</a:t>
             </a:r>
             <a:endParaRPr lang="en-US" sz="3200" dirty="0"/>
           </a:p>
@@ -7007,7 +6957,7 @@
           <a:bodyPr wrap="square" lIns="0" tIns="0" rIns="0" bIns="0" rtlCol="0" anchor="ctr" anchorCtr="0"/>
           <a:lstStyle/>
           <a:p>
-            <a:pPr marL="0" indent="0" algn="l">
+            <a:pPr marL="0" indent="0" algn="ctr">
               <a:buNone/>
             </a:pPr>
             <a:r>
@@ -7024,91 +6974,14 @@
       </p:sp>
       <p:sp>
         <p:nvSpPr>
-          <p:cNvPr id="41" name="Shape 39"/>
-          <p:cNvSpPr/>
-          <p:nvPr/>
-        </p:nvSpPr>
-        <p:spPr>
-          <a:xfrm>
-            <a:off x="368300" y="2095500"/>
-            <a:ext cx="3200400" cy="571500"/>
-          </a:xfrm>
-          <a:prstGeom prst="roundRect">
-            <a:avLst>
-              <a:gd name="adj" fmla="val 5556"/>
-            </a:avLst>
-          </a:prstGeom>
-          <a:solidFill>
-            <a:srgbClr val="FFFFFF"/>
-          </a:solidFill>
-          <a:ln w="12700">
-            <a:solidFill>
-              <a:srgbClr val="DDE0E6"/>
-            </a:solidFill>
-            <a:prstDash val="solid"/>
-          </a:ln>
-          <a:effectLst>
-            <a:outerShdw blurRad="101600" dist="25400" dir="2700000" algn="bl" rotWithShape="0">
-              <a:srgbClr val="000000">
-                <a:alpha val="8000"/>
-              </a:srgbClr>
-            </a:outerShdw>
-          </a:effectLst>
-        </p:spPr>
-        <p:txBody>
-          <a:bodyPr/>
-          <a:lstStyle/>
-          <a:p>
-            <a:endParaRPr lang="ja-JP" altLang="en-US"/>
-          </a:p>
-        </p:txBody>
-      </p:sp>
-      <p:sp>
-        <p:nvSpPr>
-          <p:cNvPr id="42" name="Text 40"/>
-          <p:cNvSpPr/>
-          <p:nvPr/>
-        </p:nvSpPr>
-        <p:spPr>
-          <a:xfrm>
-            <a:off x="546100" y="2222500"/>
-            <a:ext cx="2832100" cy="317500"/>
-          </a:xfrm>
-          <a:prstGeom prst="rect">
-            <a:avLst/>
-          </a:prstGeom>
-          <a:noFill/>
-          <a:ln/>
-        </p:spPr>
-        <p:txBody>
-          <a:bodyPr wrap="square" lIns="0" tIns="0" rIns="0" bIns="0" rtlCol="0" anchor="ctr" anchorCtr="0"/>
-          <a:lstStyle/>
-          <a:p>
-            <a:pPr marL="0" indent="0" algn="l">
-              <a:buNone/>
-            </a:pPr>
-            <a:r>
-              <a:rPr lang="en-US" sz="1400" b="1" dirty="0">
-                <a:solidFill>
-                  <a:srgbClr val="1A1D23"/>
-                </a:solidFill>
-              </a:rPr>
-              <a:t>エフェクト・演出</a:t>
-            </a:r>
-            <a:endParaRPr lang="en-US" sz="1400" dirty="0"/>
-          </a:p>
-        </p:txBody>
-      </p:sp>
-      <p:sp>
-        <p:nvSpPr>
           <p:cNvPr id="45" name="Shape 43"/>
           <p:cNvSpPr/>
           <p:nvPr/>
         </p:nvSpPr>
         <p:spPr>
           <a:xfrm>
-            <a:off x="3746500" y="1422400"/>
-            <a:ext cx="5029200" cy="571500"/>
+            <a:off x="368299" y="2165348"/>
+            <a:ext cx="8254999" cy="2658103"/>
           </a:xfrm>
           <a:prstGeom prst="roundRect">
             <a:avLst>
@@ -7135,73 +7008,13 @@
       </p:sp>
       <p:sp>
         <p:nvSpPr>
-          <p:cNvPr id="46" name="Shape 44"/>
-          <p:cNvSpPr/>
-          <p:nvPr/>
-        </p:nvSpPr>
-        <p:spPr>
-          <a:xfrm>
-            <a:off x="6720840" y="1485900"/>
-            <a:ext cx="0" cy="444500"/>
-          </a:xfrm>
-          <a:prstGeom prst="line">
-            <a:avLst/>
-          </a:prstGeom>
-          <a:noFill/>
-          <a:ln w="8890">
-            <a:solidFill>
-              <a:srgbClr val="B0BAC9"/>
-            </a:solidFill>
-            <a:prstDash val="dash"/>
-          </a:ln>
-        </p:spPr>
-        <p:txBody>
-          <a:bodyPr/>
-          <a:lstStyle/>
-          <a:p>
-            <a:endParaRPr lang="ja-JP" altLang="en-US"/>
-          </a:p>
-        </p:txBody>
-      </p:sp>
-      <p:sp>
-        <p:nvSpPr>
-          <p:cNvPr id="47" name="Shape 45"/>
-          <p:cNvSpPr/>
-          <p:nvPr/>
-        </p:nvSpPr>
-        <p:spPr>
-          <a:xfrm>
-            <a:off x="4754880" y="1708150"/>
-            <a:ext cx="3931920" cy="0"/>
-          </a:xfrm>
-          <a:prstGeom prst="line">
-            <a:avLst/>
-          </a:prstGeom>
-          <a:noFill/>
-          <a:ln w="8890">
-            <a:solidFill>
-              <a:srgbClr val="B0BAC9"/>
-            </a:solidFill>
-            <a:prstDash val="dash"/>
-          </a:ln>
-        </p:spPr>
-        <p:txBody>
-          <a:bodyPr/>
-          <a:lstStyle/>
-          <a:p>
-            <a:endParaRPr lang="ja-JP" altLang="en-US"/>
-          </a:p>
-        </p:txBody>
-      </p:sp>
-      <p:sp>
-        <p:nvSpPr>
           <p:cNvPr id="48" name="Text 46"/>
           <p:cNvSpPr/>
           <p:nvPr/>
         </p:nvSpPr>
         <p:spPr>
           <a:xfrm>
-            <a:off x="3746500" y="1485900"/>
+            <a:off x="1981198" y="3082019"/>
             <a:ext cx="5029200" cy="279400"/>
           </a:xfrm>
           <a:prstGeom prst="rect">
@@ -7235,7 +7048,7 @@
         </p:nvSpPr>
         <p:spPr>
           <a:xfrm>
-            <a:off x="3835400" y="1727200"/>
+            <a:off x="2070098" y="3350251"/>
             <a:ext cx="4851400" cy="203200"/>
           </a:xfrm>
           <a:prstGeom prst="rect">
@@ -7261,185 +7074,6 @@
                 </a:solidFill>
               </a:rPr>
               <a:t>操作シーンの</a:t>
-            </a:r>
-            <a:r>
-              <a:rPr lang="ja-JP" altLang="en-US" sz="950" dirty="0">
-                <a:solidFill>
-                  <a:srgbClr val="8A909E"/>
-                </a:solidFill>
-              </a:rPr>
-              <a:t>短い映像</a:t>
-            </a:r>
-            <a:endParaRPr lang="en-US" sz="950" dirty="0">
-              <a:solidFill>
-                <a:srgbClr val="8A909E"/>
-              </a:solidFill>
-            </a:endParaRPr>
-          </a:p>
-        </p:txBody>
-      </p:sp>
-      <p:sp>
-        <p:nvSpPr>
-          <p:cNvPr id="50" name="Shape 48"/>
-          <p:cNvSpPr/>
-          <p:nvPr/>
-        </p:nvSpPr>
-        <p:spPr>
-          <a:xfrm>
-            <a:off x="3746500" y="2095500"/>
-            <a:ext cx="5029200" cy="571500"/>
-          </a:xfrm>
-          <a:prstGeom prst="roundRect">
-            <a:avLst>
-              <a:gd name="adj" fmla="val 4444"/>
-            </a:avLst>
-          </a:prstGeom>
-          <a:solidFill>
-            <a:srgbClr val="E8EBF0"/>
-          </a:solidFill>
-          <a:ln w="19050">
-            <a:solidFill>
-              <a:srgbClr val="B0BAC9"/>
-            </a:solidFill>
-            <a:prstDash val="dash"/>
-          </a:ln>
-        </p:spPr>
-        <p:txBody>
-          <a:bodyPr/>
-          <a:lstStyle/>
-          <a:p>
-            <a:endParaRPr lang="ja-JP" altLang="en-US"/>
-          </a:p>
-        </p:txBody>
-      </p:sp>
-      <p:sp>
-        <p:nvSpPr>
-          <p:cNvPr id="51" name="Shape 49"/>
-          <p:cNvSpPr/>
-          <p:nvPr/>
-        </p:nvSpPr>
-        <p:spPr>
-          <a:xfrm>
-            <a:off x="6720840" y="2159000"/>
-            <a:ext cx="0" cy="444500"/>
-          </a:xfrm>
-          <a:prstGeom prst="line">
-            <a:avLst/>
-          </a:prstGeom>
-          <a:noFill/>
-          <a:ln w="8890">
-            <a:solidFill>
-              <a:srgbClr val="B0BAC9"/>
-            </a:solidFill>
-            <a:prstDash val="dash"/>
-          </a:ln>
-        </p:spPr>
-        <p:txBody>
-          <a:bodyPr/>
-          <a:lstStyle/>
-          <a:p>
-            <a:endParaRPr lang="ja-JP" altLang="en-US"/>
-          </a:p>
-        </p:txBody>
-      </p:sp>
-      <p:sp>
-        <p:nvSpPr>
-          <p:cNvPr id="52" name="Shape 50"/>
-          <p:cNvSpPr/>
-          <p:nvPr/>
-        </p:nvSpPr>
-        <p:spPr>
-          <a:xfrm>
-            <a:off x="4754880" y="2381250"/>
-            <a:ext cx="3931920" cy="0"/>
-          </a:xfrm>
-          <a:prstGeom prst="line">
-            <a:avLst/>
-          </a:prstGeom>
-          <a:noFill/>
-          <a:ln w="8890">
-            <a:solidFill>
-              <a:srgbClr val="B0BAC9"/>
-            </a:solidFill>
-            <a:prstDash val="dash"/>
-          </a:ln>
-        </p:spPr>
-        <p:txBody>
-          <a:bodyPr/>
-          <a:lstStyle/>
-          <a:p>
-            <a:endParaRPr lang="ja-JP" altLang="en-US"/>
-          </a:p>
-        </p:txBody>
-      </p:sp>
-      <p:sp>
-        <p:nvSpPr>
-          <p:cNvPr id="53" name="Text 51"/>
-          <p:cNvSpPr/>
-          <p:nvPr/>
-        </p:nvSpPr>
-        <p:spPr>
-          <a:xfrm>
-            <a:off x="3746500" y="2159000"/>
-            <a:ext cx="5029200" cy="279400"/>
-          </a:xfrm>
-          <a:prstGeom prst="rect">
-            <a:avLst/>
-          </a:prstGeom>
-          <a:noFill/>
-          <a:ln/>
-        </p:spPr>
-        <p:txBody>
-          <a:bodyPr wrap="square" lIns="0" tIns="0" rIns="0" bIns="0" rtlCol="0" anchor="ctr"/>
-          <a:lstStyle/>
-          <a:p>
-            <a:pPr algn="ctr"/>
-            <a:r>
-              <a:rPr lang="en-US" sz="1000" b="1" kern="0" spc="200" dirty="0">
-                <a:solidFill>
-                  <a:srgbClr val="B0BAC9"/>
-                </a:solidFill>
-              </a:rPr>
-              <a:t>[ VIDEO ]</a:t>
-            </a:r>
-            <a:endParaRPr lang="en-US" sz="1000" dirty="0"/>
-          </a:p>
-        </p:txBody>
-      </p:sp>
-      <p:sp>
-        <p:nvSpPr>
-          <p:cNvPr id="54" name="Text 52"/>
-          <p:cNvSpPr/>
-          <p:nvPr/>
-        </p:nvSpPr>
-        <p:spPr>
-          <a:xfrm>
-            <a:off x="3835400" y="2400300"/>
-            <a:ext cx="4851400" cy="203200"/>
-          </a:xfrm>
-          <a:prstGeom prst="rect">
-            <a:avLst/>
-          </a:prstGeom>
-          <a:noFill/>
-          <a:ln/>
-        </p:spPr>
-        <p:txBody>
-          <a:bodyPr wrap="square" lIns="0" tIns="0" rIns="0" bIns="0" rtlCol="0" anchor="t"/>
-          <a:lstStyle/>
-          <a:p>
-            <a:pPr marL="0" indent="0" algn="ctr">
-              <a:lnSpc>
-                <a:spcPct val="135000"/>
-              </a:lnSpc>
-              <a:buNone/>
-            </a:pPr>
-            <a:r>
-              <a:rPr lang="en-US" sz="950" dirty="0" err="1">
-                <a:solidFill>
-                  <a:srgbClr val="8A909E"/>
-                </a:solidFill>
-              </a:rPr>
-              <a:t>エフェクト演出の</a:t>
             </a:r>
             <a:r>
               <a:rPr lang="ja-JP" altLang="en-US" sz="950" dirty="0">
@@ -8568,83 +8202,104 @@
           </a:p>
         </p:txBody>
       </p:sp>
-      <p:sp>
-        <p:nvSpPr>
-          <p:cNvPr id="37" name="Shape 35"/>
-          <p:cNvSpPr/>
-          <p:nvPr/>
-        </p:nvSpPr>
-        <p:spPr>
-          <a:xfrm>
-            <a:off x="368300" y="1422400"/>
+      <p:grpSp>
+        <p:nvGrpSpPr>
+          <p:cNvPr id="39" name="グループ化 38">
+            <a:extLst>
+              <a:ext uri="{FF2B5EF4-FFF2-40B4-BE49-F238E27FC236}">
+                <a16:creationId xmlns:a16="http://schemas.microsoft.com/office/drawing/2014/main" id="{AB8D4FC0-B3C7-75D1-CDFC-F6EE409E0DF0}"/>
+              </a:ext>
+            </a:extLst>
+          </p:cNvPr>
+          <p:cNvGrpSpPr/>
+          <p:nvPr/>
+        </p:nvGrpSpPr>
+        <p:grpSpPr>
+          <a:xfrm>
+            <a:off x="2471418" y="1406294"/>
             <a:ext cx="4203700" cy="571500"/>
-          </a:xfrm>
-          <a:prstGeom prst="roundRect">
-            <a:avLst>
-              <a:gd name="adj" fmla="val 7407"/>
-            </a:avLst>
-          </a:prstGeom>
-          <a:solidFill>
-            <a:srgbClr val="FFFFFF"/>
-          </a:solidFill>
-          <a:ln w="12700">
-            <a:solidFill>
-              <a:srgbClr val="DDE0E6"/>
-            </a:solidFill>
-            <a:prstDash val="solid"/>
-          </a:ln>
-          <a:effectLst>
-            <a:outerShdw blurRad="101600" dist="25400" dir="2700000" algn="bl" rotWithShape="0">
-              <a:srgbClr val="000000">
-                <a:alpha val="8000"/>
-              </a:srgbClr>
-            </a:outerShdw>
-          </a:effectLst>
-        </p:spPr>
-        <p:txBody>
-          <a:bodyPr/>
-          <a:lstStyle/>
-          <a:p>
-            <a:endParaRPr lang="ja-JP" altLang="en-US"/>
-          </a:p>
-        </p:txBody>
-      </p:sp>
-      <p:sp>
-        <p:nvSpPr>
-          <p:cNvPr id="38" name="Text 36"/>
-          <p:cNvSpPr/>
-          <p:nvPr/>
-        </p:nvSpPr>
-        <p:spPr>
-          <a:xfrm>
-            <a:off x="548640" y="1549400"/>
-            <a:ext cx="3803907" cy="317500"/>
-          </a:xfrm>
-          <a:prstGeom prst="rect">
-            <a:avLst/>
-          </a:prstGeom>
-          <a:noFill/>
-          <a:ln/>
-        </p:spPr>
-        <p:txBody>
-          <a:bodyPr wrap="square" lIns="0" tIns="0" rIns="0" bIns="0" rtlCol="0" anchor="ctr" anchorCtr="0"/>
-          <a:lstStyle/>
-          <a:p>
-            <a:pPr marL="0" indent="0" algn="l">
-              <a:buNone/>
-            </a:pPr>
-            <a:r>
-              <a:rPr lang="ja-JP" altLang="en-US" sz="1400" b="1" dirty="0">
-                <a:solidFill>
-                  <a:srgbClr val="1A1D23"/>
-                </a:solidFill>
-              </a:rPr>
-              <a:t>数字が強くなるではない</a:t>
-            </a:r>
-            <a:endParaRPr lang="en-US" sz="1400" dirty="0"/>
-          </a:p>
-        </p:txBody>
-      </p:sp>
+            <a:chOff x="368300" y="1422400"/>
+            <a:chExt cx="4203700" cy="571500"/>
+          </a:xfrm>
+        </p:grpSpPr>
+        <p:sp>
+          <p:nvSpPr>
+            <p:cNvPr id="37" name="Shape 35"/>
+            <p:cNvSpPr/>
+            <p:nvPr/>
+          </p:nvSpPr>
+          <p:spPr>
+            <a:xfrm>
+              <a:off x="368300" y="1422400"/>
+              <a:ext cx="4203700" cy="571500"/>
+            </a:xfrm>
+            <a:prstGeom prst="roundRect">
+              <a:avLst>
+                <a:gd name="adj" fmla="val 7407"/>
+              </a:avLst>
+            </a:prstGeom>
+            <a:solidFill>
+              <a:srgbClr val="FFFFFF"/>
+            </a:solidFill>
+            <a:ln w="12700">
+              <a:solidFill>
+                <a:srgbClr val="DDE0E6"/>
+              </a:solidFill>
+              <a:prstDash val="solid"/>
+            </a:ln>
+            <a:effectLst>
+              <a:outerShdw blurRad="101600" dist="25400" dir="2700000" algn="bl" rotWithShape="0">
+                <a:srgbClr val="000000">
+                  <a:alpha val="8000"/>
+                </a:srgbClr>
+              </a:outerShdw>
+            </a:effectLst>
+          </p:spPr>
+          <p:txBody>
+            <a:bodyPr/>
+            <a:lstStyle/>
+            <a:p>
+              <a:endParaRPr lang="ja-JP" altLang="en-US"/>
+            </a:p>
+          </p:txBody>
+        </p:sp>
+        <p:sp>
+          <p:nvSpPr>
+            <p:cNvPr id="38" name="Text 36"/>
+            <p:cNvSpPr/>
+            <p:nvPr/>
+          </p:nvSpPr>
+          <p:spPr>
+            <a:xfrm>
+              <a:off x="548640" y="1549400"/>
+              <a:ext cx="3803907" cy="317500"/>
+            </a:xfrm>
+            <a:prstGeom prst="rect">
+              <a:avLst/>
+            </a:prstGeom>
+            <a:noFill/>
+            <a:ln/>
+          </p:spPr>
+          <p:txBody>
+            <a:bodyPr wrap="square" lIns="0" tIns="0" rIns="0" bIns="0" rtlCol="0" anchor="ctr" anchorCtr="0"/>
+            <a:lstStyle/>
+            <a:p>
+              <a:pPr marL="0" indent="0" algn="ctr">
+                <a:buNone/>
+              </a:pPr>
+              <a:r>
+                <a:rPr lang="ja-JP" altLang="en-US" sz="1400" b="1" dirty="0">
+                  <a:solidFill>
+                    <a:srgbClr val="1A1D23"/>
+                  </a:solidFill>
+                </a:rPr>
+                <a:t>数字だけが強くなるではない</a:t>
+              </a:r>
+              <a:endParaRPr lang="en-US" sz="1400" dirty="0"/>
+            </a:p>
+          </p:txBody>
+        </p:sp>
+      </p:grpSp>
       <p:grpSp>
         <p:nvGrpSpPr>
           <p:cNvPr id="53" name="グループ化 52">
@@ -8949,174 +8604,6 @@
           </p:txBody>
         </p:sp>
       </p:grpSp>
-      <p:grpSp>
-        <p:nvGrpSpPr>
-          <p:cNvPr id="58" name="グループ化 57">
-            <a:extLst>
-              <a:ext uri="{FF2B5EF4-FFF2-40B4-BE49-F238E27FC236}">
-                <a16:creationId xmlns:a16="http://schemas.microsoft.com/office/drawing/2014/main" id="{13BA98FF-1450-A875-96F9-CC56BF9E1A21}"/>
-              </a:ext>
-            </a:extLst>
-          </p:cNvPr>
-          <p:cNvGrpSpPr/>
-          <p:nvPr/>
-        </p:nvGrpSpPr>
-        <p:grpSpPr>
-          <a:xfrm>
-            <a:off x="4645155" y="1422400"/>
-            <a:ext cx="4206237" cy="571500"/>
-            <a:chOff x="3746500" y="2794000"/>
-            <a:chExt cx="5029200" cy="1917700"/>
-          </a:xfrm>
-        </p:grpSpPr>
-        <p:sp>
-          <p:nvSpPr>
-            <p:cNvPr id="59" name="Shape 43">
-              <a:extLst>
-                <a:ext uri="{FF2B5EF4-FFF2-40B4-BE49-F238E27FC236}">
-                  <a16:creationId xmlns:a16="http://schemas.microsoft.com/office/drawing/2014/main" id="{BCC78719-80B2-EA7A-021C-B23656E6D0FF}"/>
-                </a:ext>
-              </a:extLst>
-            </p:cNvPr>
-            <p:cNvSpPr/>
-            <p:nvPr/>
-          </p:nvSpPr>
-          <p:spPr>
-            <a:xfrm>
-              <a:off x="3746500" y="2794000"/>
-              <a:ext cx="5029200" cy="1917700"/>
-            </a:xfrm>
-            <a:prstGeom prst="roundRect">
-              <a:avLst>
-                <a:gd name="adj" fmla="val 3810"/>
-              </a:avLst>
-            </a:prstGeom>
-            <a:solidFill>
-              <a:srgbClr val="E8EBF0"/>
-            </a:solidFill>
-            <a:ln w="19050">
-              <a:solidFill>
-                <a:srgbClr val="B0BAC9"/>
-              </a:solidFill>
-              <a:prstDash val="dash"/>
-            </a:ln>
-          </p:spPr>
-          <p:txBody>
-            <a:bodyPr/>
-            <a:lstStyle/>
-            <a:p>
-              <a:endParaRPr lang="ja-JP" altLang="en-US"/>
-            </a:p>
-          </p:txBody>
-        </p:sp>
-        <p:sp>
-          <p:nvSpPr>
-            <p:cNvPr id="60" name="Text 46">
-              <a:extLst>
-                <a:ext uri="{FF2B5EF4-FFF2-40B4-BE49-F238E27FC236}">
-                  <a16:creationId xmlns:a16="http://schemas.microsoft.com/office/drawing/2014/main" id="{E5680920-655A-7CBF-5092-55EE785F5BA4}"/>
-                </a:ext>
-              </a:extLst>
-            </p:cNvPr>
-            <p:cNvSpPr/>
-            <p:nvPr/>
-          </p:nvSpPr>
-          <p:spPr>
-            <a:xfrm>
-              <a:off x="3746500" y="3429000"/>
-              <a:ext cx="5029200" cy="279400"/>
-            </a:xfrm>
-            <a:prstGeom prst="rect">
-              <a:avLst/>
-            </a:prstGeom>
-            <a:noFill/>
-            <a:ln/>
-          </p:spPr>
-          <p:txBody>
-            <a:bodyPr wrap="square" lIns="0" tIns="0" rIns="0" bIns="0" rtlCol="0" anchor="ctr"/>
-            <a:lstStyle/>
-            <a:p>
-              <a:pPr marL="0" indent="0" algn="ctr">
-                <a:buNone/>
-              </a:pPr>
-              <a:r>
-                <a:rPr lang="en-US" sz="1000" b="1" kern="0" spc="200" dirty="0">
-                  <a:solidFill>
-                    <a:srgbClr val="B0BAC9"/>
-                  </a:solidFill>
-                </a:rPr>
-                <a:t>[ IMAGE ]</a:t>
-              </a:r>
-              <a:endParaRPr lang="en-US" sz="1000" dirty="0"/>
-            </a:p>
-          </p:txBody>
-        </p:sp>
-        <p:sp>
-          <p:nvSpPr>
-            <p:cNvPr id="61" name="Text 47">
-              <a:extLst>
-                <a:ext uri="{FF2B5EF4-FFF2-40B4-BE49-F238E27FC236}">
-                  <a16:creationId xmlns:a16="http://schemas.microsoft.com/office/drawing/2014/main" id="{04BB1B76-CEBB-8AB5-302F-B1C8BED3BE05}"/>
-                </a:ext>
-              </a:extLst>
-            </p:cNvPr>
-            <p:cNvSpPr/>
-            <p:nvPr/>
-          </p:nvSpPr>
-          <p:spPr>
-            <a:xfrm>
-              <a:off x="3835400" y="3733800"/>
-              <a:ext cx="4851400" cy="812800"/>
-            </a:xfrm>
-            <a:prstGeom prst="rect">
-              <a:avLst/>
-            </a:prstGeom>
-            <a:noFill/>
-            <a:ln/>
-          </p:spPr>
-          <p:txBody>
-            <a:bodyPr wrap="square" lIns="0" tIns="0" rIns="0" bIns="0" rtlCol="0" anchor="t"/>
-            <a:lstStyle/>
-            <a:p>
-              <a:pPr marL="0" indent="0" algn="ctr">
-                <a:lnSpc>
-                  <a:spcPct val="135000"/>
-                </a:lnSpc>
-                <a:buNone/>
-              </a:pPr>
-              <a:r>
-                <a:rPr lang="ja-JP" altLang="en-US" sz="950" dirty="0">
-                  <a:solidFill>
-                    <a:srgbClr val="8A909E"/>
-                  </a:solidFill>
-                </a:rPr>
-                <a:t>モジュール選択画面</a:t>
-              </a:r>
-              <a:r>
-                <a:rPr lang="en-US" altLang="ja-JP" sz="950" dirty="0">
-                  <a:solidFill>
-                    <a:srgbClr val="8A909E"/>
-                  </a:solidFill>
-                </a:rPr>
-                <a:t> / </a:t>
-              </a:r>
-              <a:r>
-                <a:rPr lang="ja-JP" altLang="en-US" sz="950" dirty="0">
-                  <a:solidFill>
-                    <a:srgbClr val="8A909E"/>
-                  </a:solidFill>
-                </a:rPr>
-                <a:t>モジュール装備</a:t>
-              </a:r>
-              <a:endParaRPr lang="en-US" sz="950" dirty="0">
-                <a:solidFill>
-                  <a:srgbClr val="8A909E"/>
-                </a:solidFill>
-              </a:endParaRPr>
-            </a:p>
-          </p:txBody>
-        </p:sp>
-      </p:grpSp>
     </p:spTree>
     <p:extLst>
       <p:ext uri="{BB962C8B-B14F-4D97-AF65-F5344CB8AC3E}">
@@ -10727,12 +10214,12 @@
               <a:buNone/>
             </a:pPr>
             <a:r>
-              <a:rPr lang="en-US" sz="1400" b="1" dirty="0">
+              <a:rPr lang="ja-JP" altLang="en-US" sz="1400" b="1" dirty="0">
                 <a:solidFill>
                   <a:srgbClr val="1A1D23"/>
                 </a:solidFill>
               </a:rPr>
-              <a:t>5分で完結する爽快感</a:t>
+              <a:t>すぐに理解 すぐ遊ぶ</a:t>
             </a:r>
             <a:endParaRPr lang="en-US" sz="1400" dirty="0"/>
           </a:p>
@@ -10901,1460 +10388,6 @@
     <p:extLst>
       <p:ext uri="{BB962C8B-B14F-4D97-AF65-F5344CB8AC3E}">
         <p14:creationId xmlns:p14="http://schemas.microsoft.com/office/powerpoint/2010/main" val="730628736"/>
-      </p:ext>
-    </p:extLst>
-  </p:cSld>
-  <p:clrMapOvr>
-    <a:masterClrMapping/>
-  </p:clrMapOvr>
-</p:sld>
-</file>
-
-<file path=ppt/slides/slide7.xml><?xml version="1.0" encoding="utf-8"?>
-<p:sld xmlns:a="http://schemas.openxmlformats.org/drawingml/2006/main" xmlns:r="http://schemas.openxmlformats.org/officeDocument/2006/relationships" xmlns:p="http://schemas.openxmlformats.org/presentationml/2006/main">
-  <p:cSld name="Slide 6">
-    <p:bg>
-      <p:bgPr>
-        <a:solidFill>
-          <a:srgbClr val="F4F5F7"/>
-        </a:solidFill>
-        <a:effectLst/>
-      </p:bgPr>
-    </p:bg>
-    <p:spTree>
-      <p:nvGrpSpPr>
-        <p:cNvPr id="1" name=""/>
-        <p:cNvGrpSpPr/>
-        <p:nvPr/>
-      </p:nvGrpSpPr>
-      <p:grpSpPr>
-        <a:xfrm>
-          <a:off x="0" y="0"/>
-          <a:ext cx="0" cy="0"/>
-          <a:chOff x="0" y="0"/>
-          <a:chExt cx="0" cy="0"/>
-        </a:xfrm>
-      </p:grpSpPr>
-      <p:sp>
-        <p:nvSpPr>
-          <p:cNvPr id="2" name="Shape 0"/>
-          <p:cNvSpPr/>
-          <p:nvPr/>
-        </p:nvSpPr>
-        <p:spPr>
-          <a:xfrm>
-            <a:off x="0" y="457200"/>
-            <a:ext cx="9144000" cy="0"/>
-          </a:xfrm>
-          <a:prstGeom prst="line">
-            <a:avLst/>
-          </a:prstGeom>
-          <a:noFill/>
-          <a:ln w="6350">
-            <a:solidFill>
-              <a:srgbClr val="DDE0E6"/>
-            </a:solidFill>
-            <a:prstDash val="solid"/>
-          </a:ln>
-        </p:spPr>
-        <p:txBody>
-          <a:bodyPr/>
-          <a:lstStyle/>
-          <a:p>
-            <a:endParaRPr lang="ja-JP" altLang="en-US"/>
-          </a:p>
-        </p:txBody>
-      </p:sp>
-      <p:sp>
-        <p:nvSpPr>
-          <p:cNvPr id="3" name="Shape 1"/>
-          <p:cNvSpPr/>
-          <p:nvPr/>
-        </p:nvSpPr>
-        <p:spPr>
-          <a:xfrm>
-            <a:off x="0" y="914400"/>
-            <a:ext cx="9144000" cy="0"/>
-          </a:xfrm>
-          <a:prstGeom prst="line">
-            <a:avLst/>
-          </a:prstGeom>
-          <a:noFill/>
-          <a:ln w="6350">
-            <a:solidFill>
-              <a:srgbClr val="DDE0E6"/>
-            </a:solidFill>
-            <a:prstDash val="solid"/>
-          </a:ln>
-        </p:spPr>
-        <p:txBody>
-          <a:bodyPr/>
-          <a:lstStyle/>
-          <a:p>
-            <a:endParaRPr lang="ja-JP" altLang="en-US"/>
-          </a:p>
-        </p:txBody>
-      </p:sp>
-      <p:sp>
-        <p:nvSpPr>
-          <p:cNvPr id="4" name="Shape 2"/>
-          <p:cNvSpPr/>
-          <p:nvPr/>
-        </p:nvSpPr>
-        <p:spPr>
-          <a:xfrm>
-            <a:off x="0" y="1371600"/>
-            <a:ext cx="9144000" cy="0"/>
-          </a:xfrm>
-          <a:prstGeom prst="line">
-            <a:avLst/>
-          </a:prstGeom>
-          <a:noFill/>
-          <a:ln w="6350">
-            <a:solidFill>
-              <a:srgbClr val="DDE0E6"/>
-            </a:solidFill>
-            <a:prstDash val="solid"/>
-          </a:ln>
-        </p:spPr>
-        <p:txBody>
-          <a:bodyPr/>
-          <a:lstStyle/>
-          <a:p>
-            <a:endParaRPr lang="ja-JP" altLang="en-US"/>
-          </a:p>
-        </p:txBody>
-      </p:sp>
-      <p:sp>
-        <p:nvSpPr>
-          <p:cNvPr id="5" name="Shape 3"/>
-          <p:cNvSpPr/>
-          <p:nvPr/>
-        </p:nvSpPr>
-        <p:spPr>
-          <a:xfrm>
-            <a:off x="0" y="1828800"/>
-            <a:ext cx="9144000" cy="0"/>
-          </a:xfrm>
-          <a:prstGeom prst="line">
-            <a:avLst/>
-          </a:prstGeom>
-          <a:noFill/>
-          <a:ln w="6350">
-            <a:solidFill>
-              <a:srgbClr val="DDE0E6"/>
-            </a:solidFill>
-            <a:prstDash val="solid"/>
-          </a:ln>
-        </p:spPr>
-        <p:txBody>
-          <a:bodyPr/>
-          <a:lstStyle/>
-          <a:p>
-            <a:endParaRPr lang="ja-JP" altLang="en-US"/>
-          </a:p>
-        </p:txBody>
-      </p:sp>
-      <p:sp>
-        <p:nvSpPr>
-          <p:cNvPr id="6" name="Shape 4"/>
-          <p:cNvSpPr/>
-          <p:nvPr/>
-        </p:nvSpPr>
-        <p:spPr>
-          <a:xfrm>
-            <a:off x="0" y="2286000"/>
-            <a:ext cx="9144000" cy="0"/>
-          </a:xfrm>
-          <a:prstGeom prst="line">
-            <a:avLst/>
-          </a:prstGeom>
-          <a:noFill/>
-          <a:ln w="6350">
-            <a:solidFill>
-              <a:srgbClr val="DDE0E6"/>
-            </a:solidFill>
-            <a:prstDash val="solid"/>
-          </a:ln>
-        </p:spPr>
-        <p:txBody>
-          <a:bodyPr/>
-          <a:lstStyle/>
-          <a:p>
-            <a:endParaRPr lang="ja-JP" altLang="en-US"/>
-          </a:p>
-        </p:txBody>
-      </p:sp>
-      <p:sp>
-        <p:nvSpPr>
-          <p:cNvPr id="7" name="Shape 5"/>
-          <p:cNvSpPr/>
-          <p:nvPr/>
-        </p:nvSpPr>
-        <p:spPr>
-          <a:xfrm>
-            <a:off x="0" y="2743200"/>
-            <a:ext cx="9144000" cy="0"/>
-          </a:xfrm>
-          <a:prstGeom prst="line">
-            <a:avLst/>
-          </a:prstGeom>
-          <a:noFill/>
-          <a:ln w="6350">
-            <a:solidFill>
-              <a:srgbClr val="DDE0E6"/>
-            </a:solidFill>
-            <a:prstDash val="solid"/>
-          </a:ln>
-        </p:spPr>
-        <p:txBody>
-          <a:bodyPr/>
-          <a:lstStyle/>
-          <a:p>
-            <a:endParaRPr lang="ja-JP" altLang="en-US"/>
-          </a:p>
-        </p:txBody>
-      </p:sp>
-      <p:sp>
-        <p:nvSpPr>
-          <p:cNvPr id="8" name="Shape 6"/>
-          <p:cNvSpPr/>
-          <p:nvPr/>
-        </p:nvSpPr>
-        <p:spPr>
-          <a:xfrm>
-            <a:off x="0" y="3200400"/>
-            <a:ext cx="9144000" cy="0"/>
-          </a:xfrm>
-          <a:prstGeom prst="line">
-            <a:avLst/>
-          </a:prstGeom>
-          <a:noFill/>
-          <a:ln w="6350">
-            <a:solidFill>
-              <a:srgbClr val="DDE0E6"/>
-            </a:solidFill>
-            <a:prstDash val="solid"/>
-          </a:ln>
-        </p:spPr>
-        <p:txBody>
-          <a:bodyPr/>
-          <a:lstStyle/>
-          <a:p>
-            <a:endParaRPr lang="ja-JP" altLang="en-US"/>
-          </a:p>
-        </p:txBody>
-      </p:sp>
-      <p:sp>
-        <p:nvSpPr>
-          <p:cNvPr id="9" name="Shape 7"/>
-          <p:cNvSpPr/>
-          <p:nvPr/>
-        </p:nvSpPr>
-        <p:spPr>
-          <a:xfrm>
-            <a:off x="0" y="3657600"/>
-            <a:ext cx="9144000" cy="0"/>
-          </a:xfrm>
-          <a:prstGeom prst="line">
-            <a:avLst/>
-          </a:prstGeom>
-          <a:noFill/>
-          <a:ln w="6350">
-            <a:solidFill>
-              <a:srgbClr val="DDE0E6"/>
-            </a:solidFill>
-            <a:prstDash val="solid"/>
-          </a:ln>
-        </p:spPr>
-        <p:txBody>
-          <a:bodyPr/>
-          <a:lstStyle/>
-          <a:p>
-            <a:endParaRPr lang="ja-JP" altLang="en-US"/>
-          </a:p>
-        </p:txBody>
-      </p:sp>
-      <p:sp>
-        <p:nvSpPr>
-          <p:cNvPr id="10" name="Shape 8"/>
-          <p:cNvSpPr/>
-          <p:nvPr/>
-        </p:nvSpPr>
-        <p:spPr>
-          <a:xfrm>
-            <a:off x="0" y="4114800"/>
-            <a:ext cx="9144000" cy="0"/>
-          </a:xfrm>
-          <a:prstGeom prst="line">
-            <a:avLst/>
-          </a:prstGeom>
-          <a:noFill/>
-          <a:ln w="6350">
-            <a:solidFill>
-              <a:srgbClr val="DDE0E6"/>
-            </a:solidFill>
-            <a:prstDash val="solid"/>
-          </a:ln>
-        </p:spPr>
-        <p:txBody>
-          <a:bodyPr/>
-          <a:lstStyle/>
-          <a:p>
-            <a:endParaRPr lang="ja-JP" altLang="en-US"/>
-          </a:p>
-        </p:txBody>
-      </p:sp>
-      <p:sp>
-        <p:nvSpPr>
-          <p:cNvPr id="11" name="Shape 9"/>
-          <p:cNvSpPr/>
-          <p:nvPr/>
-        </p:nvSpPr>
-        <p:spPr>
-          <a:xfrm>
-            <a:off x="0" y="4572000"/>
-            <a:ext cx="9144000" cy="0"/>
-          </a:xfrm>
-          <a:prstGeom prst="line">
-            <a:avLst/>
-          </a:prstGeom>
-          <a:noFill/>
-          <a:ln w="6350">
-            <a:solidFill>
-              <a:srgbClr val="DDE0E6"/>
-            </a:solidFill>
-            <a:prstDash val="solid"/>
-          </a:ln>
-        </p:spPr>
-        <p:txBody>
-          <a:bodyPr/>
-          <a:lstStyle/>
-          <a:p>
-            <a:endParaRPr lang="ja-JP" altLang="en-US"/>
-          </a:p>
-        </p:txBody>
-      </p:sp>
-      <p:sp>
-        <p:nvSpPr>
-          <p:cNvPr id="12" name="Shape 10"/>
-          <p:cNvSpPr/>
-          <p:nvPr/>
-        </p:nvSpPr>
-        <p:spPr>
-          <a:xfrm>
-            <a:off x="0" y="5029200"/>
-            <a:ext cx="9144000" cy="0"/>
-          </a:xfrm>
-          <a:prstGeom prst="line">
-            <a:avLst/>
-          </a:prstGeom>
-          <a:noFill/>
-          <a:ln w="6350">
-            <a:solidFill>
-              <a:srgbClr val="DDE0E6"/>
-            </a:solidFill>
-            <a:prstDash val="solid"/>
-          </a:ln>
-        </p:spPr>
-        <p:txBody>
-          <a:bodyPr/>
-          <a:lstStyle/>
-          <a:p>
-            <a:endParaRPr lang="ja-JP" altLang="en-US"/>
-          </a:p>
-        </p:txBody>
-      </p:sp>
-      <p:sp>
-        <p:nvSpPr>
-          <p:cNvPr id="13" name="Shape 11"/>
-          <p:cNvSpPr/>
-          <p:nvPr/>
-        </p:nvSpPr>
-        <p:spPr>
-          <a:xfrm>
-            <a:off x="457200" y="0"/>
-            <a:ext cx="0" cy="5143500"/>
-          </a:xfrm>
-          <a:prstGeom prst="line">
-            <a:avLst/>
-          </a:prstGeom>
-          <a:noFill/>
-          <a:ln w="6350">
-            <a:solidFill>
-              <a:srgbClr val="DDE0E6"/>
-            </a:solidFill>
-            <a:prstDash val="solid"/>
-          </a:ln>
-        </p:spPr>
-        <p:txBody>
-          <a:bodyPr/>
-          <a:lstStyle/>
-          <a:p>
-            <a:endParaRPr lang="ja-JP" altLang="en-US"/>
-          </a:p>
-        </p:txBody>
-      </p:sp>
-      <p:sp>
-        <p:nvSpPr>
-          <p:cNvPr id="14" name="Shape 12"/>
-          <p:cNvSpPr/>
-          <p:nvPr/>
-        </p:nvSpPr>
-        <p:spPr>
-          <a:xfrm>
-            <a:off x="914400" y="0"/>
-            <a:ext cx="0" cy="5143500"/>
-          </a:xfrm>
-          <a:prstGeom prst="line">
-            <a:avLst/>
-          </a:prstGeom>
-          <a:noFill/>
-          <a:ln w="6350">
-            <a:solidFill>
-              <a:srgbClr val="DDE0E6"/>
-            </a:solidFill>
-            <a:prstDash val="solid"/>
-          </a:ln>
-        </p:spPr>
-        <p:txBody>
-          <a:bodyPr/>
-          <a:lstStyle/>
-          <a:p>
-            <a:endParaRPr lang="ja-JP" altLang="en-US"/>
-          </a:p>
-        </p:txBody>
-      </p:sp>
-      <p:sp>
-        <p:nvSpPr>
-          <p:cNvPr id="15" name="Shape 13"/>
-          <p:cNvSpPr/>
-          <p:nvPr/>
-        </p:nvSpPr>
-        <p:spPr>
-          <a:xfrm>
-            <a:off x="1371600" y="0"/>
-            <a:ext cx="0" cy="5143500"/>
-          </a:xfrm>
-          <a:prstGeom prst="line">
-            <a:avLst/>
-          </a:prstGeom>
-          <a:noFill/>
-          <a:ln w="6350">
-            <a:solidFill>
-              <a:srgbClr val="DDE0E6"/>
-            </a:solidFill>
-            <a:prstDash val="solid"/>
-          </a:ln>
-        </p:spPr>
-        <p:txBody>
-          <a:bodyPr/>
-          <a:lstStyle/>
-          <a:p>
-            <a:endParaRPr lang="ja-JP" altLang="en-US"/>
-          </a:p>
-        </p:txBody>
-      </p:sp>
-      <p:sp>
-        <p:nvSpPr>
-          <p:cNvPr id="16" name="Shape 14"/>
-          <p:cNvSpPr/>
-          <p:nvPr/>
-        </p:nvSpPr>
-        <p:spPr>
-          <a:xfrm>
-            <a:off x="1828800" y="0"/>
-            <a:ext cx="0" cy="5143500"/>
-          </a:xfrm>
-          <a:prstGeom prst="line">
-            <a:avLst/>
-          </a:prstGeom>
-          <a:noFill/>
-          <a:ln w="6350">
-            <a:solidFill>
-              <a:srgbClr val="DDE0E6"/>
-            </a:solidFill>
-            <a:prstDash val="solid"/>
-          </a:ln>
-        </p:spPr>
-        <p:txBody>
-          <a:bodyPr/>
-          <a:lstStyle/>
-          <a:p>
-            <a:endParaRPr lang="ja-JP" altLang="en-US"/>
-          </a:p>
-        </p:txBody>
-      </p:sp>
-      <p:sp>
-        <p:nvSpPr>
-          <p:cNvPr id="17" name="Shape 15"/>
-          <p:cNvSpPr/>
-          <p:nvPr/>
-        </p:nvSpPr>
-        <p:spPr>
-          <a:xfrm>
-            <a:off x="2286000" y="0"/>
-            <a:ext cx="0" cy="5143500"/>
-          </a:xfrm>
-          <a:prstGeom prst="line">
-            <a:avLst/>
-          </a:prstGeom>
-          <a:noFill/>
-          <a:ln w="6350">
-            <a:solidFill>
-              <a:srgbClr val="DDE0E6"/>
-            </a:solidFill>
-            <a:prstDash val="solid"/>
-          </a:ln>
-        </p:spPr>
-        <p:txBody>
-          <a:bodyPr/>
-          <a:lstStyle/>
-          <a:p>
-            <a:endParaRPr lang="ja-JP" altLang="en-US"/>
-          </a:p>
-        </p:txBody>
-      </p:sp>
-      <p:sp>
-        <p:nvSpPr>
-          <p:cNvPr id="18" name="Shape 16"/>
-          <p:cNvSpPr/>
-          <p:nvPr/>
-        </p:nvSpPr>
-        <p:spPr>
-          <a:xfrm>
-            <a:off x="2743200" y="0"/>
-            <a:ext cx="0" cy="5143500"/>
-          </a:xfrm>
-          <a:prstGeom prst="line">
-            <a:avLst/>
-          </a:prstGeom>
-          <a:noFill/>
-          <a:ln w="6350">
-            <a:solidFill>
-              <a:srgbClr val="DDE0E6"/>
-            </a:solidFill>
-            <a:prstDash val="solid"/>
-          </a:ln>
-        </p:spPr>
-        <p:txBody>
-          <a:bodyPr/>
-          <a:lstStyle/>
-          <a:p>
-            <a:endParaRPr lang="ja-JP" altLang="en-US"/>
-          </a:p>
-        </p:txBody>
-      </p:sp>
-      <p:sp>
-        <p:nvSpPr>
-          <p:cNvPr id="19" name="Shape 17"/>
-          <p:cNvSpPr/>
-          <p:nvPr/>
-        </p:nvSpPr>
-        <p:spPr>
-          <a:xfrm>
-            <a:off x="3200400" y="0"/>
-            <a:ext cx="0" cy="5143500"/>
-          </a:xfrm>
-          <a:prstGeom prst="line">
-            <a:avLst/>
-          </a:prstGeom>
-          <a:noFill/>
-          <a:ln w="6350">
-            <a:solidFill>
-              <a:srgbClr val="DDE0E6"/>
-            </a:solidFill>
-            <a:prstDash val="solid"/>
-          </a:ln>
-        </p:spPr>
-        <p:txBody>
-          <a:bodyPr/>
-          <a:lstStyle/>
-          <a:p>
-            <a:endParaRPr lang="ja-JP" altLang="en-US"/>
-          </a:p>
-        </p:txBody>
-      </p:sp>
-      <p:sp>
-        <p:nvSpPr>
-          <p:cNvPr id="20" name="Shape 18"/>
-          <p:cNvSpPr/>
-          <p:nvPr/>
-        </p:nvSpPr>
-        <p:spPr>
-          <a:xfrm>
-            <a:off x="3657600" y="0"/>
-            <a:ext cx="0" cy="5143500"/>
-          </a:xfrm>
-          <a:prstGeom prst="line">
-            <a:avLst/>
-          </a:prstGeom>
-          <a:noFill/>
-          <a:ln w="6350">
-            <a:solidFill>
-              <a:srgbClr val="DDE0E6"/>
-            </a:solidFill>
-            <a:prstDash val="solid"/>
-          </a:ln>
-        </p:spPr>
-        <p:txBody>
-          <a:bodyPr/>
-          <a:lstStyle/>
-          <a:p>
-            <a:endParaRPr lang="ja-JP" altLang="en-US"/>
-          </a:p>
-        </p:txBody>
-      </p:sp>
-      <p:sp>
-        <p:nvSpPr>
-          <p:cNvPr id="21" name="Shape 19"/>
-          <p:cNvSpPr/>
-          <p:nvPr/>
-        </p:nvSpPr>
-        <p:spPr>
-          <a:xfrm>
-            <a:off x="4114800" y="0"/>
-            <a:ext cx="0" cy="5143500"/>
-          </a:xfrm>
-          <a:prstGeom prst="line">
-            <a:avLst/>
-          </a:prstGeom>
-          <a:noFill/>
-          <a:ln w="6350">
-            <a:solidFill>
-              <a:srgbClr val="DDE0E6"/>
-            </a:solidFill>
-            <a:prstDash val="solid"/>
-          </a:ln>
-        </p:spPr>
-        <p:txBody>
-          <a:bodyPr/>
-          <a:lstStyle/>
-          <a:p>
-            <a:endParaRPr lang="ja-JP" altLang="en-US"/>
-          </a:p>
-        </p:txBody>
-      </p:sp>
-      <p:sp>
-        <p:nvSpPr>
-          <p:cNvPr id="22" name="Shape 20"/>
-          <p:cNvSpPr/>
-          <p:nvPr/>
-        </p:nvSpPr>
-        <p:spPr>
-          <a:xfrm>
-            <a:off x="4572000" y="0"/>
-            <a:ext cx="0" cy="5143500"/>
-          </a:xfrm>
-          <a:prstGeom prst="line">
-            <a:avLst/>
-          </a:prstGeom>
-          <a:noFill/>
-          <a:ln w="6350">
-            <a:solidFill>
-              <a:srgbClr val="DDE0E6"/>
-            </a:solidFill>
-            <a:prstDash val="solid"/>
-          </a:ln>
-        </p:spPr>
-        <p:txBody>
-          <a:bodyPr/>
-          <a:lstStyle/>
-          <a:p>
-            <a:endParaRPr lang="ja-JP" altLang="en-US"/>
-          </a:p>
-        </p:txBody>
-      </p:sp>
-      <p:sp>
-        <p:nvSpPr>
-          <p:cNvPr id="23" name="Shape 21"/>
-          <p:cNvSpPr/>
-          <p:nvPr/>
-        </p:nvSpPr>
-        <p:spPr>
-          <a:xfrm>
-            <a:off x="5029200" y="0"/>
-            <a:ext cx="0" cy="5143500"/>
-          </a:xfrm>
-          <a:prstGeom prst="line">
-            <a:avLst/>
-          </a:prstGeom>
-          <a:noFill/>
-          <a:ln w="6350">
-            <a:solidFill>
-              <a:srgbClr val="DDE0E6"/>
-            </a:solidFill>
-            <a:prstDash val="solid"/>
-          </a:ln>
-        </p:spPr>
-        <p:txBody>
-          <a:bodyPr/>
-          <a:lstStyle/>
-          <a:p>
-            <a:endParaRPr lang="ja-JP" altLang="en-US"/>
-          </a:p>
-        </p:txBody>
-      </p:sp>
-      <p:sp>
-        <p:nvSpPr>
-          <p:cNvPr id="24" name="Shape 22"/>
-          <p:cNvSpPr/>
-          <p:nvPr/>
-        </p:nvSpPr>
-        <p:spPr>
-          <a:xfrm>
-            <a:off x="5486400" y="0"/>
-            <a:ext cx="0" cy="5143500"/>
-          </a:xfrm>
-          <a:prstGeom prst="line">
-            <a:avLst/>
-          </a:prstGeom>
-          <a:noFill/>
-          <a:ln w="6350">
-            <a:solidFill>
-              <a:srgbClr val="DDE0E6"/>
-            </a:solidFill>
-            <a:prstDash val="solid"/>
-          </a:ln>
-        </p:spPr>
-        <p:txBody>
-          <a:bodyPr/>
-          <a:lstStyle/>
-          <a:p>
-            <a:endParaRPr lang="ja-JP" altLang="en-US"/>
-          </a:p>
-        </p:txBody>
-      </p:sp>
-      <p:sp>
-        <p:nvSpPr>
-          <p:cNvPr id="25" name="Shape 23"/>
-          <p:cNvSpPr/>
-          <p:nvPr/>
-        </p:nvSpPr>
-        <p:spPr>
-          <a:xfrm>
-            <a:off x="5943600" y="0"/>
-            <a:ext cx="0" cy="5143500"/>
-          </a:xfrm>
-          <a:prstGeom prst="line">
-            <a:avLst/>
-          </a:prstGeom>
-          <a:noFill/>
-          <a:ln w="6350">
-            <a:solidFill>
-              <a:srgbClr val="DDE0E6"/>
-            </a:solidFill>
-            <a:prstDash val="solid"/>
-          </a:ln>
-        </p:spPr>
-        <p:txBody>
-          <a:bodyPr/>
-          <a:lstStyle/>
-          <a:p>
-            <a:endParaRPr lang="ja-JP" altLang="en-US"/>
-          </a:p>
-        </p:txBody>
-      </p:sp>
-      <p:sp>
-        <p:nvSpPr>
-          <p:cNvPr id="26" name="Shape 24"/>
-          <p:cNvSpPr/>
-          <p:nvPr/>
-        </p:nvSpPr>
-        <p:spPr>
-          <a:xfrm>
-            <a:off x="6400800" y="0"/>
-            <a:ext cx="0" cy="5143500"/>
-          </a:xfrm>
-          <a:prstGeom prst="line">
-            <a:avLst/>
-          </a:prstGeom>
-          <a:noFill/>
-          <a:ln w="6350">
-            <a:solidFill>
-              <a:srgbClr val="DDE0E6"/>
-            </a:solidFill>
-            <a:prstDash val="solid"/>
-          </a:ln>
-        </p:spPr>
-        <p:txBody>
-          <a:bodyPr/>
-          <a:lstStyle/>
-          <a:p>
-            <a:endParaRPr lang="ja-JP" altLang="en-US"/>
-          </a:p>
-        </p:txBody>
-      </p:sp>
-      <p:sp>
-        <p:nvSpPr>
-          <p:cNvPr id="27" name="Shape 25"/>
-          <p:cNvSpPr/>
-          <p:nvPr/>
-        </p:nvSpPr>
-        <p:spPr>
-          <a:xfrm>
-            <a:off x="6858000" y="0"/>
-            <a:ext cx="0" cy="5143500"/>
-          </a:xfrm>
-          <a:prstGeom prst="line">
-            <a:avLst/>
-          </a:prstGeom>
-          <a:noFill/>
-          <a:ln w="6350">
-            <a:solidFill>
-              <a:srgbClr val="DDE0E6"/>
-            </a:solidFill>
-            <a:prstDash val="solid"/>
-          </a:ln>
-        </p:spPr>
-        <p:txBody>
-          <a:bodyPr/>
-          <a:lstStyle/>
-          <a:p>
-            <a:endParaRPr lang="ja-JP" altLang="en-US"/>
-          </a:p>
-        </p:txBody>
-      </p:sp>
-      <p:sp>
-        <p:nvSpPr>
-          <p:cNvPr id="28" name="Shape 26"/>
-          <p:cNvSpPr/>
-          <p:nvPr/>
-        </p:nvSpPr>
-        <p:spPr>
-          <a:xfrm>
-            <a:off x="7315200" y="0"/>
-            <a:ext cx="0" cy="5143500"/>
-          </a:xfrm>
-          <a:prstGeom prst="line">
-            <a:avLst/>
-          </a:prstGeom>
-          <a:noFill/>
-          <a:ln w="6350">
-            <a:solidFill>
-              <a:srgbClr val="DDE0E6"/>
-            </a:solidFill>
-            <a:prstDash val="solid"/>
-          </a:ln>
-        </p:spPr>
-        <p:txBody>
-          <a:bodyPr/>
-          <a:lstStyle/>
-          <a:p>
-            <a:endParaRPr lang="ja-JP" altLang="en-US"/>
-          </a:p>
-        </p:txBody>
-      </p:sp>
-      <p:sp>
-        <p:nvSpPr>
-          <p:cNvPr id="29" name="Shape 27"/>
-          <p:cNvSpPr/>
-          <p:nvPr/>
-        </p:nvSpPr>
-        <p:spPr>
-          <a:xfrm>
-            <a:off x="7772400" y="0"/>
-            <a:ext cx="0" cy="5143500"/>
-          </a:xfrm>
-          <a:prstGeom prst="line">
-            <a:avLst/>
-          </a:prstGeom>
-          <a:noFill/>
-          <a:ln w="6350">
-            <a:solidFill>
-              <a:srgbClr val="DDE0E6"/>
-            </a:solidFill>
-            <a:prstDash val="solid"/>
-          </a:ln>
-        </p:spPr>
-        <p:txBody>
-          <a:bodyPr/>
-          <a:lstStyle/>
-          <a:p>
-            <a:endParaRPr lang="ja-JP" altLang="en-US"/>
-          </a:p>
-        </p:txBody>
-      </p:sp>
-      <p:sp>
-        <p:nvSpPr>
-          <p:cNvPr id="30" name="Shape 28"/>
-          <p:cNvSpPr/>
-          <p:nvPr/>
-        </p:nvSpPr>
-        <p:spPr>
-          <a:xfrm>
-            <a:off x="8229600" y="0"/>
-            <a:ext cx="0" cy="5143500"/>
-          </a:xfrm>
-          <a:prstGeom prst="line">
-            <a:avLst/>
-          </a:prstGeom>
-          <a:noFill/>
-          <a:ln w="6350">
-            <a:solidFill>
-              <a:srgbClr val="DDE0E6"/>
-            </a:solidFill>
-            <a:prstDash val="solid"/>
-          </a:ln>
-        </p:spPr>
-        <p:txBody>
-          <a:bodyPr/>
-          <a:lstStyle/>
-          <a:p>
-            <a:endParaRPr lang="ja-JP" altLang="en-US"/>
-          </a:p>
-        </p:txBody>
-      </p:sp>
-      <p:sp>
-        <p:nvSpPr>
-          <p:cNvPr id="31" name="Shape 29"/>
-          <p:cNvSpPr/>
-          <p:nvPr/>
-        </p:nvSpPr>
-        <p:spPr>
-          <a:xfrm>
-            <a:off x="8686800" y="0"/>
-            <a:ext cx="0" cy="5143500"/>
-          </a:xfrm>
-          <a:prstGeom prst="line">
-            <a:avLst/>
-          </a:prstGeom>
-          <a:noFill/>
-          <a:ln w="6350">
-            <a:solidFill>
-              <a:srgbClr val="DDE0E6"/>
-            </a:solidFill>
-            <a:prstDash val="solid"/>
-          </a:ln>
-        </p:spPr>
-        <p:txBody>
-          <a:bodyPr/>
-          <a:lstStyle/>
-          <a:p>
-            <a:endParaRPr lang="ja-JP" altLang="en-US"/>
-          </a:p>
-        </p:txBody>
-      </p:sp>
-      <p:sp>
-        <p:nvSpPr>
-          <p:cNvPr id="32" name="Shape 30"/>
-          <p:cNvSpPr/>
-          <p:nvPr/>
-        </p:nvSpPr>
-        <p:spPr>
-          <a:xfrm>
-            <a:off x="8750300" y="4914900"/>
-            <a:ext cx="365760" cy="228600"/>
-          </a:xfrm>
-          <a:prstGeom prst="rect">
-            <a:avLst/>
-          </a:prstGeom>
-          <a:solidFill>
-            <a:srgbClr val="00C2A8"/>
-          </a:solidFill>
-          <a:ln w="12700">
-            <a:solidFill>
-              <a:srgbClr val="00C2A8"/>
-            </a:solidFill>
-            <a:prstDash val="solid"/>
-          </a:ln>
-        </p:spPr>
-        <p:txBody>
-          <a:bodyPr/>
-          <a:lstStyle/>
-          <a:p>
-            <a:endParaRPr lang="ja-JP" altLang="en-US"/>
-          </a:p>
-        </p:txBody>
-      </p:sp>
-      <p:sp>
-        <p:nvSpPr>
-          <p:cNvPr id="33" name="Text 31"/>
-          <p:cNvSpPr/>
-          <p:nvPr/>
-        </p:nvSpPr>
-        <p:spPr>
-          <a:xfrm>
-            <a:off x="8750300" y="4914900"/>
-            <a:ext cx="365760" cy="228600"/>
-          </a:xfrm>
-          <a:prstGeom prst="rect">
-            <a:avLst/>
-          </a:prstGeom>
-          <a:noFill/>
-          <a:ln/>
-        </p:spPr>
-        <p:txBody>
-          <a:bodyPr wrap="square" lIns="0" tIns="0" rIns="0" bIns="0" rtlCol="0" anchor="ctr"/>
-          <a:lstStyle/>
-          <a:p>
-            <a:pPr marL="0" indent="0" algn="ctr">
-              <a:buNone/>
-            </a:pPr>
-            <a:r>
-              <a:rPr lang="en-US" sz="900" b="1" dirty="0">
-                <a:solidFill>
-                  <a:srgbClr val="FFFFFF"/>
-                </a:solidFill>
-              </a:rPr>
-              <a:t>6</a:t>
-            </a:r>
-            <a:endParaRPr lang="en-US" sz="900" dirty="0"/>
-          </a:p>
-        </p:txBody>
-      </p:sp>
-      <p:sp>
-        <p:nvSpPr>
-          <p:cNvPr id="34" name="Text 32"/>
-          <p:cNvSpPr/>
-          <p:nvPr/>
-        </p:nvSpPr>
-        <p:spPr>
-          <a:xfrm>
-            <a:off x="457200" y="320040"/>
-            <a:ext cx="8229600" cy="201168"/>
-          </a:xfrm>
-          <a:prstGeom prst="rect">
-            <a:avLst/>
-          </a:prstGeom>
-          <a:noFill/>
-          <a:ln/>
-        </p:spPr>
-        <p:txBody>
-          <a:bodyPr wrap="square" lIns="0" tIns="0" rIns="0" bIns="0" rtlCol="0" anchor="ctr"/>
-          <a:lstStyle/>
-          <a:p>
-            <a:pPr marL="0" indent="0" algn="l">
-              <a:buNone/>
-            </a:pPr>
-            <a:r>
-              <a:rPr lang="en-US" sz="800" b="1" kern="0" spc="300" dirty="0">
-                <a:solidFill>
-                  <a:srgbClr val="00C2A8"/>
-                </a:solidFill>
-              </a:rPr>
-              <a:t>CLOSING</a:t>
-            </a:r>
-            <a:endParaRPr lang="en-US" sz="800" dirty="0"/>
-          </a:p>
-        </p:txBody>
-      </p:sp>
-      <p:sp>
-        <p:nvSpPr>
-          <p:cNvPr id="35" name="Text 33"/>
-          <p:cNvSpPr/>
-          <p:nvPr/>
-        </p:nvSpPr>
-        <p:spPr>
-          <a:xfrm>
-            <a:off x="457200" y="548640"/>
-            <a:ext cx="8229600" cy="685800"/>
-          </a:xfrm>
-          <a:prstGeom prst="rect">
-            <a:avLst/>
-          </a:prstGeom>
-          <a:noFill/>
-          <a:ln/>
-        </p:spPr>
-        <p:txBody>
-          <a:bodyPr wrap="square" lIns="0" tIns="0" rIns="0" bIns="0" rtlCol="0" anchor="ctr"/>
-          <a:lstStyle/>
-          <a:p>
-            <a:pPr marL="0" indent="0" algn="l">
-              <a:buNone/>
-            </a:pPr>
-            <a:r>
-              <a:rPr lang="en-US" sz="3200" b="1" dirty="0">
-                <a:solidFill>
-                  <a:srgbClr val="1A1D23"/>
-                </a:solidFill>
-                <a:latin typeface="Arial" pitchFamily="34" charset="0"/>
-                <a:ea typeface="Arial" pitchFamily="34" charset="-122"/>
-                <a:cs typeface="Arial" pitchFamily="34" charset="-120"/>
-              </a:rPr>
-              <a:t>締め</a:t>
-            </a:r>
-            <a:endParaRPr lang="en-US" sz="3200" dirty="0"/>
-          </a:p>
-        </p:txBody>
-      </p:sp>
-      <p:sp>
-        <p:nvSpPr>
-          <p:cNvPr id="36" name="Shape 34"/>
-          <p:cNvSpPr/>
-          <p:nvPr/>
-        </p:nvSpPr>
-        <p:spPr>
-          <a:xfrm>
-            <a:off x="457200" y="1280160"/>
-            <a:ext cx="8229600" cy="0"/>
-          </a:xfrm>
-          <a:prstGeom prst="line">
-            <a:avLst/>
-          </a:prstGeom>
-          <a:noFill/>
-          <a:ln w="12700">
-            <a:solidFill>
-              <a:srgbClr val="DDE0E6"/>
-            </a:solidFill>
-            <a:prstDash val="solid"/>
-          </a:ln>
-        </p:spPr>
-        <p:txBody>
-          <a:bodyPr/>
-          <a:lstStyle/>
-          <a:p>
-            <a:endParaRPr lang="ja-JP" altLang="en-US"/>
-          </a:p>
-        </p:txBody>
-      </p:sp>
-      <p:sp>
-        <p:nvSpPr>
-          <p:cNvPr id="37" name="Shape 35"/>
-          <p:cNvSpPr/>
-          <p:nvPr/>
-        </p:nvSpPr>
-        <p:spPr>
-          <a:xfrm>
-            <a:off x="365760" y="1422400"/>
-            <a:ext cx="8412480" cy="571500"/>
-          </a:xfrm>
-          <a:prstGeom prst="roundRect">
-            <a:avLst>
-              <a:gd name="adj" fmla="val 6667"/>
-            </a:avLst>
-          </a:prstGeom>
-          <a:solidFill>
-            <a:srgbClr val="FFFFFF"/>
-          </a:solidFill>
-          <a:ln w="12700">
-            <a:solidFill>
-              <a:srgbClr val="DDE0E6"/>
-            </a:solidFill>
-            <a:prstDash val="solid"/>
-          </a:ln>
-          <a:effectLst>
-            <a:outerShdw blurRad="101600" dist="25400" dir="2700000" algn="bl" rotWithShape="0">
-              <a:srgbClr val="000000">
-                <a:alpha val="8000"/>
-              </a:srgbClr>
-            </a:outerShdw>
-          </a:effectLst>
-        </p:spPr>
-        <p:txBody>
-          <a:bodyPr/>
-          <a:lstStyle/>
-          <a:p>
-            <a:endParaRPr lang="ja-JP" altLang="en-US"/>
-          </a:p>
-        </p:txBody>
-      </p:sp>
-      <p:sp>
-        <p:nvSpPr>
-          <p:cNvPr id="38" name="Text 36"/>
-          <p:cNvSpPr/>
-          <p:nvPr/>
-        </p:nvSpPr>
-        <p:spPr>
-          <a:xfrm>
-            <a:off x="548640" y="1549400"/>
-            <a:ext cx="8046720" cy="317500"/>
-          </a:xfrm>
-          <a:prstGeom prst="rect">
-            <a:avLst/>
-          </a:prstGeom>
-          <a:noFill/>
-          <a:ln/>
-        </p:spPr>
-        <p:txBody>
-          <a:bodyPr wrap="square" lIns="0" tIns="0" rIns="0" bIns="0" rtlCol="0" anchor="ctr" anchorCtr="0"/>
-          <a:lstStyle/>
-          <a:p>
-            <a:pPr marL="0" indent="0" algn="l">
-              <a:buNone/>
-            </a:pPr>
-            <a:r>
-              <a:rPr lang="en-US" sz="1400" b="1" dirty="0">
-                <a:solidFill>
-                  <a:srgbClr val="1A1D23"/>
-                </a:solidFill>
-              </a:rPr>
-              <a:t>締めのメッセージ</a:t>
-            </a:r>
-            <a:endParaRPr lang="en-US" sz="1400" dirty="0"/>
-          </a:p>
-        </p:txBody>
-      </p:sp>
-      <p:sp>
-        <p:nvSpPr>
-          <p:cNvPr id="41" name="Shape 39"/>
-          <p:cNvSpPr/>
-          <p:nvPr/>
-        </p:nvSpPr>
-        <p:spPr>
-          <a:xfrm>
-            <a:off x="368300" y="2095500"/>
-            <a:ext cx="3200400" cy="571500"/>
-          </a:xfrm>
-          <a:prstGeom prst="roundRect">
-            <a:avLst>
-              <a:gd name="adj" fmla="val 5263"/>
-            </a:avLst>
-          </a:prstGeom>
-          <a:solidFill>
-            <a:srgbClr val="FFFFFF"/>
-          </a:solidFill>
-          <a:ln w="12700">
-            <a:solidFill>
-              <a:srgbClr val="DDE0E6"/>
-            </a:solidFill>
-            <a:prstDash val="solid"/>
-          </a:ln>
-          <a:effectLst>
-            <a:outerShdw blurRad="101600" dist="25400" dir="2700000" algn="bl" rotWithShape="0">
-              <a:srgbClr val="000000">
-                <a:alpha val="8000"/>
-              </a:srgbClr>
-            </a:outerShdw>
-          </a:effectLst>
-        </p:spPr>
-        <p:txBody>
-          <a:bodyPr/>
-          <a:lstStyle/>
-          <a:p>
-            <a:endParaRPr lang="ja-JP" altLang="en-US"/>
-          </a:p>
-        </p:txBody>
-      </p:sp>
-      <p:sp>
-        <p:nvSpPr>
-          <p:cNvPr id="42" name="Text 40"/>
-          <p:cNvSpPr/>
-          <p:nvPr/>
-        </p:nvSpPr>
-        <p:spPr>
-          <a:xfrm>
-            <a:off x="546100" y="2222500"/>
-            <a:ext cx="2832100" cy="317500"/>
-          </a:xfrm>
-          <a:prstGeom prst="rect">
-            <a:avLst/>
-          </a:prstGeom>
-          <a:noFill/>
-          <a:ln/>
-        </p:spPr>
-        <p:txBody>
-          <a:bodyPr wrap="square" lIns="0" tIns="0" rIns="0" bIns="0" rtlCol="0" anchor="ctr" anchorCtr="0"/>
-          <a:lstStyle/>
-          <a:p>
-            <a:pPr marL="0" indent="0" algn="l">
-              <a:buNone/>
-            </a:pPr>
-            <a:r>
-              <a:rPr lang="en-US" sz="1400" b="1" dirty="0">
-                <a:solidFill>
-                  <a:srgbClr val="1A1D23"/>
-                </a:solidFill>
-              </a:rPr>
-              <a:t>TGSで目指すこと</a:t>
-            </a:r>
-            <a:endParaRPr lang="en-US" sz="1400" dirty="0"/>
-          </a:p>
-        </p:txBody>
-      </p:sp>
-      <p:sp>
-        <p:nvSpPr>
-          <p:cNvPr id="45" name="Shape 43"/>
-          <p:cNvSpPr/>
-          <p:nvPr/>
-        </p:nvSpPr>
-        <p:spPr>
-          <a:xfrm>
-            <a:off x="3746500" y="2095500"/>
-            <a:ext cx="5029200" cy="571500"/>
-          </a:xfrm>
-          <a:prstGeom prst="roundRect">
-            <a:avLst>
-              <a:gd name="adj" fmla="val 4211"/>
-            </a:avLst>
-          </a:prstGeom>
-          <a:solidFill>
-            <a:srgbClr val="E8EBF0"/>
-          </a:solidFill>
-          <a:ln w="19050">
-            <a:solidFill>
-              <a:srgbClr val="B0BAC9"/>
-            </a:solidFill>
-            <a:prstDash val="dash"/>
-          </a:ln>
-        </p:spPr>
-        <p:txBody>
-          <a:bodyPr/>
-          <a:lstStyle/>
-          <a:p>
-            <a:endParaRPr lang="ja-JP" altLang="en-US"/>
-          </a:p>
-        </p:txBody>
-      </p:sp>
-      <p:sp>
-        <p:nvSpPr>
-          <p:cNvPr id="46" name="Shape 44"/>
-          <p:cNvSpPr/>
-          <p:nvPr/>
-        </p:nvSpPr>
-        <p:spPr>
-          <a:xfrm>
-            <a:off x="6720840" y="2159000"/>
-            <a:ext cx="0" cy="444500"/>
-          </a:xfrm>
-          <a:prstGeom prst="line">
-            <a:avLst/>
-          </a:prstGeom>
-          <a:noFill/>
-          <a:ln w="8890">
-            <a:solidFill>
-              <a:srgbClr val="B0BAC9"/>
-            </a:solidFill>
-            <a:prstDash val="dash"/>
-          </a:ln>
-        </p:spPr>
-        <p:txBody>
-          <a:bodyPr/>
-          <a:lstStyle/>
-          <a:p>
-            <a:endParaRPr lang="ja-JP" altLang="en-US"/>
-          </a:p>
-        </p:txBody>
-      </p:sp>
-      <p:sp>
-        <p:nvSpPr>
-          <p:cNvPr id="47" name="Shape 45"/>
-          <p:cNvSpPr/>
-          <p:nvPr/>
-        </p:nvSpPr>
-        <p:spPr>
-          <a:xfrm>
-            <a:off x="4754880" y="2381250"/>
-            <a:ext cx="3931920" cy="0"/>
-          </a:xfrm>
-          <a:prstGeom prst="line">
-            <a:avLst/>
-          </a:prstGeom>
-          <a:noFill/>
-          <a:ln w="8890">
-            <a:solidFill>
-              <a:srgbClr val="B0BAC9"/>
-            </a:solidFill>
-            <a:prstDash val="dash"/>
-          </a:ln>
-        </p:spPr>
-        <p:txBody>
-          <a:bodyPr/>
-          <a:lstStyle/>
-          <a:p>
-            <a:endParaRPr lang="ja-JP" altLang="en-US"/>
-          </a:p>
-        </p:txBody>
-      </p:sp>
-      <p:sp>
-        <p:nvSpPr>
-          <p:cNvPr id="48" name="Text 46"/>
-          <p:cNvSpPr/>
-          <p:nvPr/>
-        </p:nvSpPr>
-        <p:spPr>
-          <a:xfrm>
-            <a:off x="3746500" y="2159000"/>
-            <a:ext cx="5029200" cy="279400"/>
-          </a:xfrm>
-          <a:prstGeom prst="rect">
-            <a:avLst/>
-          </a:prstGeom>
-          <a:noFill/>
-          <a:ln/>
-        </p:spPr>
-        <p:txBody>
-          <a:bodyPr wrap="square" lIns="0" tIns="0" rIns="0" bIns="0" rtlCol="0" anchor="ctr"/>
-          <a:lstStyle/>
-          <a:p>
-            <a:pPr marL="0" indent="0" algn="ctr">
-              <a:buNone/>
-            </a:pPr>
-            <a:r>
-              <a:rPr lang="en-US" sz="1000" b="1" kern="0" spc="200" dirty="0">
-                <a:solidFill>
-                  <a:srgbClr val="B0BAC9"/>
-                </a:solidFill>
-              </a:rPr>
-              <a:t>[ IMAGE ]</a:t>
-            </a:r>
-            <a:endParaRPr lang="en-US" sz="1000" dirty="0"/>
-          </a:p>
-        </p:txBody>
-      </p:sp>
-      <p:sp>
-        <p:nvSpPr>
-          <p:cNvPr id="49" name="Text 47"/>
-          <p:cNvSpPr/>
-          <p:nvPr/>
-        </p:nvSpPr>
-        <p:spPr>
-          <a:xfrm>
-            <a:off x="3835400" y="2400300"/>
-            <a:ext cx="4851400" cy="203200"/>
-          </a:xfrm>
-          <a:prstGeom prst="rect">
-            <a:avLst/>
-          </a:prstGeom>
-          <a:noFill/>
-          <a:ln/>
-        </p:spPr>
-        <p:txBody>
-          <a:bodyPr wrap="square" lIns="0" tIns="0" rIns="0" bIns="0" rtlCol="0" anchor="t"/>
-          <a:lstStyle/>
-          <a:p>
-            <a:pPr marL="0" indent="0" algn="ctr">
-              <a:lnSpc>
-                <a:spcPct val="135000"/>
-              </a:lnSpc>
-              <a:buNone/>
-            </a:pPr>
-            <a:r>
-              <a:rPr lang="ja-JP" altLang="en-US" sz="950" dirty="0">
-                <a:solidFill>
-                  <a:srgbClr val="8A909E"/>
-                </a:solidFill>
-              </a:rPr>
-              <a:t>プレイ動画</a:t>
-            </a:r>
-            <a:r>
-              <a:rPr lang="en-US" altLang="ja-JP" sz="950" dirty="0">
-                <a:solidFill>
-                  <a:srgbClr val="8A909E"/>
-                </a:solidFill>
-              </a:rPr>
-              <a:t>URL</a:t>
-            </a:r>
-            <a:r>
-              <a:rPr lang="ja-JP" altLang="en-US" sz="950" dirty="0">
-                <a:solidFill>
-                  <a:srgbClr val="8A909E"/>
-                </a:solidFill>
-              </a:rPr>
-              <a:t>・映像</a:t>
-            </a:r>
-            <a:endParaRPr lang="en-US" sz="950" dirty="0">
-              <a:solidFill>
-                <a:srgbClr val="8A909E"/>
-              </a:solidFill>
-            </a:endParaRPr>
-          </a:p>
-        </p:txBody>
-      </p:sp>
-    </p:spTree>
-    <p:extLst>
-      <p:ext uri="{BB962C8B-B14F-4D97-AF65-F5344CB8AC3E}">
-        <p14:creationId xmlns:p14="http://schemas.microsoft.com/office/powerpoint/2010/main" val="120550280"/>
       </p:ext>
     </p:extLst>
   </p:cSld>
